--- a/PresentationFinal.pptx
+++ b/PresentationFinal.pptx
@@ -5,21 +5,19 @@
     <p:sldMasterId id="2147483648" r:id="rId1"/>
   </p:sldMasterIdLst>
   <p:notesMasterIdLst>
-    <p:notesMasterId r:id="rId14"/>
+    <p:notesMasterId r:id="rId12"/>
   </p:notesMasterIdLst>
   <p:sldIdLst>
     <p:sldId id="256" r:id="rId2"/>
     <p:sldId id="257" r:id="rId3"/>
     <p:sldId id="258" r:id="rId4"/>
-    <p:sldId id="259" r:id="rId5"/>
-    <p:sldId id="260" r:id="rId6"/>
-    <p:sldId id="261" r:id="rId7"/>
-    <p:sldId id="262" r:id="rId8"/>
-    <p:sldId id="263" r:id="rId9"/>
-    <p:sldId id="264" r:id="rId10"/>
-    <p:sldId id="265" r:id="rId11"/>
-    <p:sldId id="266" r:id="rId12"/>
-    <p:sldId id="267" r:id="rId13"/>
+    <p:sldId id="261" r:id="rId5"/>
+    <p:sldId id="262" r:id="rId6"/>
+    <p:sldId id="264" r:id="rId7"/>
+    <p:sldId id="263" r:id="rId8"/>
+    <p:sldId id="265" r:id="rId9"/>
+    <p:sldId id="266" r:id="rId10"/>
+    <p:sldId id="267" r:id="rId11"/>
   </p:sldIdLst>
   <p:sldSz cx="12192000" cy="6858000"/>
   <p:notesSz cx="6858000" cy="9144000"/>
@@ -118,3545 +116,12 @@
       </a:defRPr>
     </a:lvl9pPr>
   </p:defaultTextStyle>
+  <p:extLst>
+    <p:ext uri="{EFAFB233-063F-42B5-8137-9DF3F51BA10A}">
+      <p15:sldGuideLst xmlns:p15="http://schemas.microsoft.com/office/powerpoint/2012/main"/>
+    </p:ext>
+  </p:extLst>
 </p:presentation>
-</file>
-
-<file path=ppt/diagrams/colors1.xml><?xml version="1.0" encoding="utf-8"?>
-<dgm:colorsDef xmlns:dgm="http://schemas.openxmlformats.org/drawingml/2006/diagram" xmlns:a="http://schemas.openxmlformats.org/drawingml/2006/main" uniqueId="urn:microsoft.com/office/officeart/2018/5/colors/Iconchunking_neutralbg_colorful1">
-  <dgm:title val=""/>
-  <dgm:desc val=""/>
-  <dgm:catLst>
-    <dgm:cat type="colorful" pri="10100"/>
-  </dgm:catLst>
-  <dgm:styleLbl name="node0">
-    <dgm:fillClrLst meth="repeat">
-      <a:schemeClr val="accent1"/>
-    </dgm:fillClrLst>
-    <dgm:linClrLst meth="repeat">
-      <a:schemeClr val="lt1"/>
-    </dgm:linClrLst>
-    <dgm:effectClrLst/>
-    <dgm:txLinClrLst/>
-    <dgm:txFillClrLst/>
-    <dgm:txEffectClrLst/>
-  </dgm:styleLbl>
-  <dgm:styleLbl name="node1">
-    <dgm:fillClrLst meth="repeat">
-      <a:schemeClr val="accent2"/>
-      <a:schemeClr val="accent3"/>
-      <a:schemeClr val="accent4"/>
-      <a:schemeClr val="accent5"/>
-      <a:schemeClr val="accent6"/>
-    </dgm:fillClrLst>
-    <dgm:linClrLst meth="repeat">
-      <a:schemeClr val="lt1">
-        <a:alpha val="0"/>
-      </a:schemeClr>
-    </dgm:linClrLst>
-    <dgm:effectClrLst/>
-    <dgm:txLinClrLst/>
-    <dgm:txFillClrLst/>
-    <dgm:txEffectClrLst/>
-  </dgm:styleLbl>
-  <dgm:styleLbl name="alignNode1">
-    <dgm:fillClrLst meth="repeat">
-      <a:schemeClr val="accent2"/>
-      <a:schemeClr val="accent3"/>
-      <a:schemeClr val="accent4"/>
-      <a:schemeClr val="accent5"/>
-      <a:schemeClr val="accent6"/>
-    </dgm:fillClrLst>
-    <dgm:linClrLst meth="repeat">
-      <a:schemeClr val="accent2"/>
-      <a:schemeClr val="accent3"/>
-      <a:schemeClr val="accent4"/>
-      <a:schemeClr val="accent5"/>
-      <a:schemeClr val="accent6"/>
-    </dgm:linClrLst>
-    <dgm:effectClrLst/>
-    <dgm:txLinClrLst/>
-    <dgm:txFillClrLst/>
-    <dgm:txEffectClrLst/>
-  </dgm:styleLbl>
-  <dgm:styleLbl name="lnNode1">
-    <dgm:fillClrLst meth="repeat">
-      <a:schemeClr val="accent2"/>
-      <a:schemeClr val="accent3"/>
-      <a:schemeClr val="accent4"/>
-      <a:schemeClr val="accent5"/>
-      <a:schemeClr val="accent6"/>
-    </dgm:fillClrLst>
-    <dgm:linClrLst meth="repeat">
-      <a:schemeClr val="lt1"/>
-    </dgm:linClrLst>
-    <dgm:effectClrLst/>
-    <dgm:txLinClrLst/>
-    <dgm:txFillClrLst/>
-    <dgm:txEffectClrLst/>
-  </dgm:styleLbl>
-  <dgm:styleLbl name="vennNode1">
-    <dgm:fillClrLst meth="repeat">
-      <a:schemeClr val="accent2">
-        <a:alpha val="50000"/>
-      </a:schemeClr>
-      <a:schemeClr val="accent3">
-        <a:alpha val="50000"/>
-      </a:schemeClr>
-      <a:schemeClr val="accent4">
-        <a:alpha val="50000"/>
-      </a:schemeClr>
-      <a:schemeClr val="accent5">
-        <a:alpha val="50000"/>
-      </a:schemeClr>
-      <a:schemeClr val="accent6">
-        <a:alpha val="50000"/>
-      </a:schemeClr>
-    </dgm:fillClrLst>
-    <dgm:linClrLst meth="repeat">
-      <a:schemeClr val="lt1"/>
-    </dgm:linClrLst>
-    <dgm:effectClrLst/>
-    <dgm:txLinClrLst/>
-    <dgm:txFillClrLst/>
-    <dgm:txEffectClrLst/>
-  </dgm:styleLbl>
-  <dgm:styleLbl name="node2">
-    <dgm:fillClrLst>
-      <a:schemeClr val="accent2"/>
-    </dgm:fillClrLst>
-    <dgm:linClrLst meth="repeat">
-      <a:schemeClr val="lt1"/>
-    </dgm:linClrLst>
-    <dgm:effectClrLst/>
-    <dgm:txLinClrLst/>
-    <dgm:txFillClrLst/>
-    <dgm:txEffectClrLst/>
-  </dgm:styleLbl>
-  <dgm:styleLbl name="node3">
-    <dgm:fillClrLst>
-      <a:schemeClr val="accent3"/>
-    </dgm:fillClrLst>
-    <dgm:linClrLst meth="repeat">
-      <a:schemeClr val="lt1"/>
-    </dgm:linClrLst>
-    <dgm:effectClrLst/>
-    <dgm:txLinClrLst/>
-    <dgm:txFillClrLst/>
-    <dgm:txEffectClrLst/>
-  </dgm:styleLbl>
-  <dgm:styleLbl name="node4">
-    <dgm:fillClrLst>
-      <a:schemeClr val="accent4"/>
-    </dgm:fillClrLst>
-    <dgm:linClrLst meth="repeat">
-      <a:schemeClr val="lt1"/>
-    </dgm:linClrLst>
-    <dgm:effectClrLst/>
-    <dgm:txLinClrLst/>
-    <dgm:txFillClrLst/>
-    <dgm:txEffectClrLst/>
-  </dgm:styleLbl>
-  <dgm:styleLbl name="fgImgPlace1">
-    <dgm:fillClrLst meth="repeat">
-      <a:schemeClr val="accent2">
-        <a:tint val="50000"/>
-      </a:schemeClr>
-      <a:schemeClr val="accent3">
-        <a:tint val="50000"/>
-      </a:schemeClr>
-      <a:schemeClr val="accent4">
-        <a:tint val="50000"/>
-      </a:schemeClr>
-      <a:schemeClr val="accent5">
-        <a:tint val="50000"/>
-      </a:schemeClr>
-      <a:schemeClr val="accent6">
-        <a:tint val="50000"/>
-      </a:schemeClr>
-    </dgm:fillClrLst>
-    <dgm:linClrLst meth="repeat">
-      <a:schemeClr val="lt1"/>
-    </dgm:linClrLst>
-    <dgm:effectClrLst/>
-    <dgm:txLinClrLst/>
-    <dgm:txFillClrLst meth="repeat">
-      <a:schemeClr val="lt1"/>
-    </dgm:txFillClrLst>
-    <dgm:txEffectClrLst/>
-  </dgm:styleLbl>
-  <dgm:styleLbl name="alignImgPlace1">
-    <dgm:fillClrLst>
-      <a:schemeClr val="accent1">
-        <a:tint val="50000"/>
-      </a:schemeClr>
-      <a:schemeClr val="accent2">
-        <a:tint val="20000"/>
-      </a:schemeClr>
-    </dgm:fillClrLst>
-    <dgm:linClrLst meth="repeat">
-      <a:schemeClr val="lt1"/>
-    </dgm:linClrLst>
-    <dgm:effectClrLst/>
-    <dgm:txLinClrLst/>
-    <dgm:txFillClrLst meth="repeat">
-      <a:schemeClr val="lt1"/>
-    </dgm:txFillClrLst>
-    <dgm:txEffectClrLst/>
-  </dgm:styleLbl>
-  <dgm:styleLbl name="bgImgPlace1">
-    <dgm:fillClrLst>
-      <a:schemeClr val="accent1">
-        <a:tint val="50000"/>
-      </a:schemeClr>
-      <a:schemeClr val="accent2">
-        <a:tint val="20000"/>
-      </a:schemeClr>
-    </dgm:fillClrLst>
-    <dgm:linClrLst meth="repeat">
-      <a:schemeClr val="lt1"/>
-    </dgm:linClrLst>
-    <dgm:effectClrLst/>
-    <dgm:txLinClrLst/>
-    <dgm:txFillClrLst meth="repeat">
-      <a:schemeClr val="lt1"/>
-    </dgm:txFillClrLst>
-    <dgm:txEffectClrLst/>
-  </dgm:styleLbl>
-  <dgm:styleLbl name="sibTrans2D1">
-    <dgm:fillClrLst meth="repeat">
-      <a:schemeClr val="accent2"/>
-      <a:schemeClr val="accent3"/>
-      <a:schemeClr val="accent4"/>
-      <a:schemeClr val="accent5"/>
-      <a:schemeClr val="accent6"/>
-    </dgm:fillClrLst>
-    <dgm:linClrLst meth="cycle">
-      <a:schemeClr val="lt1"/>
-    </dgm:linClrLst>
-    <dgm:effectClrLst/>
-    <dgm:txLinClrLst/>
-    <dgm:txFillClrLst/>
-    <dgm:txEffectClrLst/>
-  </dgm:styleLbl>
-  <dgm:styleLbl name="fgSibTrans2D1">
-    <dgm:fillClrLst meth="repeat">
-      <a:schemeClr val="accent2"/>
-      <a:schemeClr val="accent3"/>
-      <a:schemeClr val="accent4"/>
-      <a:schemeClr val="accent5"/>
-      <a:schemeClr val="accent6"/>
-    </dgm:fillClrLst>
-    <dgm:linClrLst meth="cycle">
-      <a:schemeClr val="lt1"/>
-    </dgm:linClrLst>
-    <dgm:effectClrLst/>
-    <dgm:txLinClrLst/>
-    <dgm:txFillClrLst meth="repeat">
-      <a:schemeClr val="lt1"/>
-    </dgm:txFillClrLst>
-    <dgm:txEffectClrLst/>
-  </dgm:styleLbl>
-  <dgm:styleLbl name="bgSibTrans2D1">
-    <dgm:fillClrLst meth="repeat">
-      <a:schemeClr val="accent2"/>
-      <a:schemeClr val="accent3"/>
-      <a:schemeClr val="accent4"/>
-      <a:schemeClr val="accent5"/>
-      <a:schemeClr val="accent6"/>
-    </dgm:fillClrLst>
-    <dgm:linClrLst meth="cycle">
-      <a:schemeClr val="lt1"/>
-    </dgm:linClrLst>
-    <dgm:effectClrLst/>
-    <dgm:txLinClrLst/>
-    <dgm:txFillClrLst meth="repeat">
-      <a:schemeClr val="lt1"/>
-    </dgm:txFillClrLst>
-    <dgm:txEffectClrLst/>
-  </dgm:styleLbl>
-  <dgm:styleLbl name="sibTrans1D1">
-    <dgm:fillClrLst meth="repeat">
-      <a:schemeClr val="accent2"/>
-      <a:schemeClr val="accent3"/>
-      <a:schemeClr val="accent4"/>
-      <a:schemeClr val="accent5"/>
-      <a:schemeClr val="accent6"/>
-    </dgm:fillClrLst>
-    <dgm:linClrLst meth="repeat">
-      <a:schemeClr val="accent2"/>
-      <a:schemeClr val="accent3"/>
-      <a:schemeClr val="accent4"/>
-      <a:schemeClr val="accent5"/>
-      <a:schemeClr val="accent6"/>
-    </dgm:linClrLst>
-    <dgm:effectClrLst/>
-    <dgm:txLinClrLst/>
-    <dgm:txFillClrLst meth="repeat">
-      <a:schemeClr val="tx1"/>
-    </dgm:txFillClrLst>
-    <dgm:txEffectClrLst/>
-  </dgm:styleLbl>
-  <dgm:styleLbl name="callout">
-    <dgm:fillClrLst meth="repeat">
-      <a:schemeClr val="accent2"/>
-    </dgm:fillClrLst>
-    <dgm:linClrLst meth="repeat">
-      <a:schemeClr val="accent2">
-        <a:tint val="50000"/>
-      </a:schemeClr>
-    </dgm:linClrLst>
-    <dgm:effectClrLst/>
-    <dgm:txLinClrLst/>
-    <dgm:txFillClrLst meth="repeat">
-      <a:schemeClr val="tx1"/>
-    </dgm:txFillClrLst>
-    <dgm:txEffectClrLst/>
-  </dgm:styleLbl>
-  <dgm:styleLbl name="asst0">
-    <dgm:fillClrLst meth="repeat">
-      <a:schemeClr val="accent1"/>
-    </dgm:fillClrLst>
-    <dgm:linClrLst meth="repeat">
-      <a:schemeClr val="lt1"/>
-    </dgm:linClrLst>
-    <dgm:effectClrLst/>
-    <dgm:txLinClrLst/>
-    <dgm:txFillClrLst/>
-    <dgm:txEffectClrLst/>
-  </dgm:styleLbl>
-  <dgm:styleLbl name="asst1">
-    <dgm:fillClrLst meth="repeat">
-      <a:schemeClr val="accent2"/>
-    </dgm:fillClrLst>
-    <dgm:linClrLst meth="repeat">
-      <a:schemeClr val="lt1"/>
-    </dgm:linClrLst>
-    <dgm:effectClrLst/>
-    <dgm:txLinClrLst/>
-    <dgm:txFillClrLst/>
-    <dgm:txEffectClrLst/>
-  </dgm:styleLbl>
-  <dgm:styleLbl name="asst2">
-    <dgm:fillClrLst>
-      <a:schemeClr val="accent3"/>
-    </dgm:fillClrLst>
-    <dgm:linClrLst meth="repeat">
-      <a:schemeClr val="lt1"/>
-    </dgm:linClrLst>
-    <dgm:effectClrLst/>
-    <dgm:txLinClrLst/>
-    <dgm:txFillClrLst/>
-    <dgm:txEffectClrLst/>
-  </dgm:styleLbl>
-  <dgm:styleLbl name="asst3">
-    <dgm:fillClrLst>
-      <a:schemeClr val="accent4"/>
-    </dgm:fillClrLst>
-    <dgm:linClrLst meth="repeat">
-      <a:schemeClr val="lt1"/>
-    </dgm:linClrLst>
-    <dgm:effectClrLst/>
-    <dgm:txLinClrLst/>
-    <dgm:txFillClrLst/>
-    <dgm:txEffectClrLst/>
-  </dgm:styleLbl>
-  <dgm:styleLbl name="asst4">
-    <dgm:fillClrLst>
-      <a:schemeClr val="accent5"/>
-    </dgm:fillClrLst>
-    <dgm:linClrLst meth="repeat">
-      <a:schemeClr val="lt1"/>
-    </dgm:linClrLst>
-    <dgm:effectClrLst/>
-    <dgm:txLinClrLst/>
-    <dgm:txFillClrLst/>
-    <dgm:txEffectClrLst/>
-  </dgm:styleLbl>
-  <dgm:styleLbl name="parChTrans2D1">
-    <dgm:fillClrLst meth="repeat">
-      <a:schemeClr val="accent2"/>
-    </dgm:fillClrLst>
-    <dgm:linClrLst meth="repeat">
-      <a:schemeClr val="lt1"/>
-    </dgm:linClrLst>
-    <dgm:effectClrLst/>
-    <dgm:txLinClrLst/>
-    <dgm:txFillClrLst meth="repeat">
-      <a:schemeClr val="lt1"/>
-    </dgm:txFillClrLst>
-    <dgm:txEffectClrLst/>
-  </dgm:styleLbl>
-  <dgm:styleLbl name="parChTrans2D2">
-    <dgm:fillClrLst meth="repeat">
-      <a:schemeClr val="accent3"/>
-    </dgm:fillClrLst>
-    <dgm:linClrLst meth="repeat">
-      <a:schemeClr val="lt1"/>
-    </dgm:linClrLst>
-    <dgm:effectClrLst/>
-    <dgm:txLinClrLst/>
-    <dgm:txFillClrLst/>
-    <dgm:txEffectClrLst/>
-  </dgm:styleLbl>
-  <dgm:styleLbl name="parChTrans2D3">
-    <dgm:fillClrLst meth="repeat">
-      <a:schemeClr val="accent4"/>
-    </dgm:fillClrLst>
-    <dgm:linClrLst meth="repeat">
-      <a:schemeClr val="lt1"/>
-    </dgm:linClrLst>
-    <dgm:effectClrLst/>
-    <dgm:txLinClrLst/>
-    <dgm:txFillClrLst/>
-    <dgm:txEffectClrLst/>
-  </dgm:styleLbl>
-  <dgm:styleLbl name="parChTrans2D4">
-    <dgm:fillClrLst meth="repeat">
-      <a:schemeClr val="accent5"/>
-    </dgm:fillClrLst>
-    <dgm:linClrLst meth="repeat">
-      <a:schemeClr val="lt1"/>
-    </dgm:linClrLst>
-    <dgm:effectClrLst/>
-    <dgm:txLinClrLst/>
-    <dgm:txFillClrLst meth="repeat">
-      <a:schemeClr val="lt1"/>
-    </dgm:txFillClrLst>
-    <dgm:txEffectClrLst/>
-  </dgm:styleLbl>
-  <dgm:styleLbl name="parChTrans1D1">
-    <dgm:fillClrLst meth="repeat">
-      <a:schemeClr val="accent2"/>
-    </dgm:fillClrLst>
-    <dgm:linClrLst meth="repeat">
-      <a:schemeClr val="accent1"/>
-    </dgm:linClrLst>
-    <dgm:effectClrLst/>
-    <dgm:txLinClrLst/>
-    <dgm:txFillClrLst meth="repeat">
-      <a:schemeClr val="tx1"/>
-    </dgm:txFillClrLst>
-    <dgm:txEffectClrLst/>
-  </dgm:styleLbl>
-  <dgm:styleLbl name="parChTrans1D2">
-    <dgm:fillClrLst meth="repeat">
-      <a:schemeClr val="accent3">
-        <a:tint val="90000"/>
-      </a:schemeClr>
-    </dgm:fillClrLst>
-    <dgm:linClrLst meth="repeat">
-      <a:schemeClr val="accent2"/>
-    </dgm:linClrLst>
-    <dgm:effectClrLst/>
-    <dgm:txLinClrLst/>
-    <dgm:txFillClrLst meth="repeat">
-      <a:schemeClr val="tx1"/>
-    </dgm:txFillClrLst>
-    <dgm:txEffectClrLst/>
-  </dgm:styleLbl>
-  <dgm:styleLbl name="parChTrans1D3">
-    <dgm:fillClrLst meth="repeat">
-      <a:schemeClr val="accent4">
-        <a:tint val="70000"/>
-      </a:schemeClr>
-    </dgm:fillClrLst>
-    <dgm:linClrLst meth="repeat">
-      <a:schemeClr val="accent3"/>
-    </dgm:linClrLst>
-    <dgm:effectClrLst/>
-    <dgm:txLinClrLst/>
-    <dgm:txFillClrLst meth="repeat">
-      <a:schemeClr val="tx1"/>
-    </dgm:txFillClrLst>
-    <dgm:txEffectClrLst/>
-  </dgm:styleLbl>
-  <dgm:styleLbl name="parChTrans1D4">
-    <dgm:fillClrLst meth="repeat">
-      <a:schemeClr val="accent5">
-        <a:tint val="50000"/>
-      </a:schemeClr>
-    </dgm:fillClrLst>
-    <dgm:linClrLst meth="repeat">
-      <a:schemeClr val="accent4"/>
-    </dgm:linClrLst>
-    <dgm:effectClrLst/>
-    <dgm:txLinClrLst/>
-    <dgm:txFillClrLst meth="repeat">
-      <a:schemeClr val="tx1"/>
-    </dgm:txFillClrLst>
-    <dgm:txEffectClrLst/>
-  </dgm:styleLbl>
-  <dgm:styleLbl name="fgAcc1">
-    <dgm:fillClrLst meth="repeat">
-      <a:schemeClr val="lt1">
-        <a:alpha val="90000"/>
-      </a:schemeClr>
-    </dgm:fillClrLst>
-    <dgm:linClrLst meth="repeat">
-      <a:schemeClr val="accent2"/>
-      <a:schemeClr val="accent3"/>
-      <a:schemeClr val="accent4"/>
-      <a:schemeClr val="accent5"/>
-      <a:schemeClr val="accent6"/>
-    </dgm:linClrLst>
-    <dgm:effectClrLst/>
-    <dgm:txLinClrLst/>
-    <dgm:txFillClrLst meth="repeat">
-      <a:schemeClr val="dk1"/>
-    </dgm:txFillClrLst>
-    <dgm:txEffectClrLst/>
-  </dgm:styleLbl>
-  <dgm:styleLbl name="conFgAcc1">
-    <dgm:fillClrLst meth="repeat">
-      <a:schemeClr val="lt1">
-        <a:alpha val="90000"/>
-      </a:schemeClr>
-    </dgm:fillClrLst>
-    <dgm:linClrLst meth="repeat">
-      <a:schemeClr val="accent2"/>
-      <a:schemeClr val="accent3"/>
-      <a:schemeClr val="accent4"/>
-      <a:schemeClr val="accent5"/>
-      <a:schemeClr val="accent6"/>
-    </dgm:linClrLst>
-    <dgm:effectClrLst/>
-    <dgm:txLinClrLst/>
-    <dgm:txFillClrLst meth="repeat">
-      <a:schemeClr val="dk1"/>
-    </dgm:txFillClrLst>
-    <dgm:txEffectClrLst/>
-  </dgm:styleLbl>
-  <dgm:styleLbl name="alignAcc1">
-    <dgm:fillClrLst meth="repeat">
-      <a:schemeClr val="lt1">
-        <a:alpha val="90000"/>
-      </a:schemeClr>
-    </dgm:fillClrLst>
-    <dgm:linClrLst meth="repeat">
-      <a:schemeClr val="accent2"/>
-      <a:schemeClr val="accent3"/>
-      <a:schemeClr val="accent4"/>
-      <a:schemeClr val="accent5"/>
-      <a:schemeClr val="accent6"/>
-    </dgm:linClrLst>
-    <dgm:effectClrLst/>
-    <dgm:txLinClrLst/>
-    <dgm:txFillClrLst meth="repeat">
-      <a:schemeClr val="dk1"/>
-    </dgm:txFillClrLst>
-    <dgm:txEffectClrLst/>
-  </dgm:styleLbl>
-  <dgm:styleLbl name="trAlignAcc1">
-    <dgm:fillClrLst meth="repeat">
-      <a:schemeClr val="lt1">
-        <a:alpha val="40000"/>
-      </a:schemeClr>
-    </dgm:fillClrLst>
-    <dgm:linClrLst meth="repeat">
-      <a:schemeClr val="accent1"/>
-    </dgm:linClrLst>
-    <dgm:effectClrLst/>
-    <dgm:txLinClrLst/>
-    <dgm:txFillClrLst meth="repeat">
-      <a:schemeClr val="dk1"/>
-    </dgm:txFillClrLst>
-    <dgm:txEffectClrLst/>
-  </dgm:styleLbl>
-  <dgm:styleLbl name="bgAcc1">
-    <dgm:fillClrLst meth="repeat">
-      <a:schemeClr val="lt1">
-        <a:alpha val="90000"/>
-      </a:schemeClr>
-    </dgm:fillClrLst>
-    <dgm:linClrLst meth="repeat">
-      <a:schemeClr val="accent2"/>
-      <a:schemeClr val="accent3"/>
-      <a:schemeClr val="accent4"/>
-      <a:schemeClr val="accent5"/>
-      <a:schemeClr val="accent6"/>
-    </dgm:linClrLst>
-    <dgm:effectClrLst/>
-    <dgm:txLinClrLst/>
-    <dgm:txFillClrLst meth="repeat">
-      <a:schemeClr val="dk1"/>
-    </dgm:txFillClrLst>
-    <dgm:txEffectClrLst/>
-  </dgm:styleLbl>
-  <dgm:styleLbl name="solidFgAcc1">
-    <dgm:fillClrLst meth="repeat">
-      <a:schemeClr val="lt1"/>
-    </dgm:fillClrLst>
-    <dgm:linClrLst meth="repeat">
-      <a:schemeClr val="accent2"/>
-      <a:schemeClr val="accent3"/>
-      <a:schemeClr val="accent4"/>
-      <a:schemeClr val="accent5"/>
-      <a:schemeClr val="accent6"/>
-    </dgm:linClrLst>
-    <dgm:effectClrLst/>
-    <dgm:txLinClrLst/>
-    <dgm:txFillClrLst meth="repeat">
-      <a:schemeClr val="dk1"/>
-    </dgm:txFillClrLst>
-    <dgm:txEffectClrLst/>
-  </dgm:styleLbl>
-  <dgm:styleLbl name="solidAlignAcc1">
-    <dgm:fillClrLst meth="repeat">
-      <a:schemeClr val="lt1"/>
-    </dgm:fillClrLst>
-    <dgm:linClrLst meth="repeat">
-      <a:schemeClr val="accent2"/>
-      <a:schemeClr val="accent3"/>
-      <a:schemeClr val="accent4"/>
-      <a:schemeClr val="accent5"/>
-      <a:schemeClr val="accent6"/>
-    </dgm:linClrLst>
-    <dgm:effectClrLst/>
-    <dgm:txLinClrLst/>
-    <dgm:txFillClrLst meth="repeat">
-      <a:schemeClr val="dk1"/>
-    </dgm:txFillClrLst>
-    <dgm:txEffectClrLst/>
-  </dgm:styleLbl>
-  <dgm:styleLbl name="solidBgAcc1">
-    <dgm:fillClrLst meth="repeat">
-      <a:schemeClr val="lt1"/>
-    </dgm:fillClrLst>
-    <dgm:linClrLst meth="repeat">
-      <a:schemeClr val="accent2"/>
-      <a:schemeClr val="accent3"/>
-      <a:schemeClr val="accent4"/>
-      <a:schemeClr val="accent5"/>
-      <a:schemeClr val="accent6"/>
-    </dgm:linClrLst>
-    <dgm:effectClrLst/>
-    <dgm:txLinClrLst/>
-    <dgm:txFillClrLst meth="repeat">
-      <a:schemeClr val="dk1"/>
-    </dgm:txFillClrLst>
-    <dgm:txEffectClrLst/>
-  </dgm:styleLbl>
-  <dgm:styleLbl name="fgAccFollowNode1">
-    <dgm:fillClrLst meth="repeat">
-      <a:schemeClr val="accent2">
-        <a:tint val="40000"/>
-        <a:alpha val="90000"/>
-      </a:schemeClr>
-      <a:schemeClr val="accent3">
-        <a:tint val="40000"/>
-        <a:alpha val="90000"/>
-      </a:schemeClr>
-      <a:schemeClr val="accent4">
-        <a:tint val="40000"/>
-        <a:alpha val="90000"/>
-      </a:schemeClr>
-      <a:schemeClr val="accent5">
-        <a:tint val="40000"/>
-        <a:alpha val="90000"/>
-      </a:schemeClr>
-      <a:schemeClr val="accent6">
-        <a:tint val="40000"/>
-        <a:alpha val="90000"/>
-      </a:schemeClr>
-    </dgm:fillClrLst>
-    <dgm:linClrLst meth="repeat">
-      <a:schemeClr val="accent2">
-        <a:tint val="40000"/>
-        <a:alpha val="90000"/>
-      </a:schemeClr>
-      <a:schemeClr val="accent3">
-        <a:tint val="40000"/>
-        <a:alpha val="90000"/>
-      </a:schemeClr>
-      <a:schemeClr val="accent4">
-        <a:tint val="40000"/>
-        <a:alpha val="90000"/>
-      </a:schemeClr>
-      <a:schemeClr val="accent5">
-        <a:tint val="40000"/>
-        <a:alpha val="90000"/>
-      </a:schemeClr>
-      <a:schemeClr val="accent6">
-        <a:tint val="40000"/>
-        <a:alpha val="90000"/>
-      </a:schemeClr>
-    </dgm:linClrLst>
-    <dgm:effectClrLst/>
-    <dgm:txLinClrLst/>
-    <dgm:txFillClrLst meth="repeat">
-      <a:schemeClr val="dk1"/>
-    </dgm:txFillClrLst>
-    <dgm:txEffectClrLst/>
-  </dgm:styleLbl>
-  <dgm:styleLbl name="alignAccFollowNode1">
-    <dgm:fillClrLst meth="repeat">
-      <a:schemeClr val="accent2">
-        <a:tint val="40000"/>
-        <a:alpha val="90000"/>
-      </a:schemeClr>
-      <a:schemeClr val="accent3">
-        <a:tint val="40000"/>
-        <a:alpha val="90000"/>
-      </a:schemeClr>
-      <a:schemeClr val="accent4">
-        <a:tint val="40000"/>
-        <a:alpha val="90000"/>
-      </a:schemeClr>
-      <a:schemeClr val="accent5">
-        <a:tint val="40000"/>
-        <a:alpha val="90000"/>
-      </a:schemeClr>
-      <a:schemeClr val="accent6">
-        <a:tint val="40000"/>
-        <a:alpha val="90000"/>
-      </a:schemeClr>
-    </dgm:fillClrLst>
-    <dgm:linClrLst meth="repeat">
-      <a:schemeClr val="accent2">
-        <a:tint val="40000"/>
-        <a:alpha val="90000"/>
-      </a:schemeClr>
-      <a:schemeClr val="accent3">
-        <a:tint val="40000"/>
-        <a:alpha val="90000"/>
-      </a:schemeClr>
-      <a:schemeClr val="accent4">
-        <a:tint val="40000"/>
-        <a:alpha val="90000"/>
-      </a:schemeClr>
-      <a:schemeClr val="accent5">
-        <a:tint val="40000"/>
-        <a:alpha val="90000"/>
-      </a:schemeClr>
-      <a:schemeClr val="accent6">
-        <a:tint val="40000"/>
-        <a:alpha val="90000"/>
-      </a:schemeClr>
-    </dgm:linClrLst>
-    <dgm:effectClrLst/>
-    <dgm:txLinClrLst/>
-    <dgm:txFillClrLst meth="repeat">
-      <a:schemeClr val="dk1"/>
-    </dgm:txFillClrLst>
-    <dgm:txEffectClrLst/>
-  </dgm:styleLbl>
-  <dgm:styleLbl name="bgAccFollowNode1">
-    <dgm:fillClrLst meth="repeat">
-      <a:schemeClr val="accent2">
-        <a:tint val="40000"/>
-        <a:alpha val="90000"/>
-      </a:schemeClr>
-      <a:schemeClr val="accent3">
-        <a:tint val="40000"/>
-        <a:alpha val="90000"/>
-      </a:schemeClr>
-      <a:schemeClr val="accent4">
-        <a:tint val="40000"/>
-        <a:alpha val="90000"/>
-      </a:schemeClr>
-      <a:schemeClr val="accent5">
-        <a:tint val="40000"/>
-        <a:alpha val="90000"/>
-      </a:schemeClr>
-      <a:schemeClr val="accent6">
-        <a:tint val="40000"/>
-        <a:alpha val="90000"/>
-      </a:schemeClr>
-    </dgm:fillClrLst>
-    <dgm:linClrLst meth="repeat">
-      <a:schemeClr val="accent2">
-        <a:tint val="40000"/>
-        <a:alpha val="90000"/>
-      </a:schemeClr>
-      <a:schemeClr val="accent3">
-        <a:tint val="40000"/>
-        <a:alpha val="90000"/>
-      </a:schemeClr>
-      <a:schemeClr val="accent4">
-        <a:tint val="40000"/>
-        <a:alpha val="90000"/>
-      </a:schemeClr>
-      <a:schemeClr val="accent5">
-        <a:tint val="40000"/>
-        <a:alpha val="90000"/>
-      </a:schemeClr>
-      <a:schemeClr val="accent6">
-        <a:tint val="40000"/>
-        <a:alpha val="90000"/>
-      </a:schemeClr>
-    </dgm:linClrLst>
-    <dgm:effectClrLst/>
-    <dgm:txLinClrLst/>
-    <dgm:txFillClrLst meth="repeat">
-      <a:schemeClr val="dk1"/>
-    </dgm:txFillClrLst>
-    <dgm:txEffectClrLst/>
-  </dgm:styleLbl>
-  <dgm:styleLbl name="fgAcc0">
-    <dgm:fillClrLst meth="repeat">
-      <a:schemeClr val="lt1">
-        <a:alpha val="90000"/>
-      </a:schemeClr>
-    </dgm:fillClrLst>
-    <dgm:linClrLst>
-      <a:schemeClr val="accent1"/>
-    </dgm:linClrLst>
-    <dgm:effectClrLst/>
-    <dgm:txLinClrLst/>
-    <dgm:txFillClrLst meth="repeat">
-      <a:schemeClr val="dk1"/>
-    </dgm:txFillClrLst>
-    <dgm:txEffectClrLst/>
-  </dgm:styleLbl>
-  <dgm:styleLbl name="fgAcc2">
-    <dgm:fillClrLst meth="repeat">
-      <a:schemeClr val="lt1">
-        <a:alpha val="90000"/>
-      </a:schemeClr>
-    </dgm:fillClrLst>
-    <dgm:linClrLst>
-      <a:schemeClr val="accent2"/>
-    </dgm:linClrLst>
-    <dgm:effectClrLst/>
-    <dgm:txLinClrLst/>
-    <dgm:txFillClrLst meth="repeat">
-      <a:schemeClr val="dk1"/>
-    </dgm:txFillClrLst>
-    <dgm:txEffectClrLst/>
-  </dgm:styleLbl>
-  <dgm:styleLbl name="fgAcc3">
-    <dgm:fillClrLst meth="repeat">
-      <a:schemeClr val="lt1">
-        <a:alpha val="90000"/>
-      </a:schemeClr>
-    </dgm:fillClrLst>
-    <dgm:linClrLst>
-      <a:schemeClr val="accent3"/>
-    </dgm:linClrLst>
-    <dgm:effectClrLst/>
-    <dgm:txLinClrLst/>
-    <dgm:txFillClrLst meth="repeat">
-      <a:schemeClr val="dk1"/>
-    </dgm:txFillClrLst>
-    <dgm:txEffectClrLst/>
-  </dgm:styleLbl>
-  <dgm:styleLbl name="fgAcc4">
-    <dgm:fillClrLst meth="repeat">
-      <a:schemeClr val="lt1">
-        <a:alpha val="90000"/>
-      </a:schemeClr>
-    </dgm:fillClrLst>
-    <dgm:linClrLst>
-      <a:schemeClr val="accent4"/>
-    </dgm:linClrLst>
-    <dgm:effectClrLst/>
-    <dgm:txLinClrLst/>
-    <dgm:txFillClrLst meth="repeat">
-      <a:schemeClr val="dk1"/>
-    </dgm:txFillClrLst>
-    <dgm:txEffectClrLst/>
-  </dgm:styleLbl>
-  <dgm:styleLbl name="bgShp">
-    <dgm:fillClrLst meth="repeat">
-      <a:schemeClr val="bg1">
-        <a:lumMod val="95000"/>
-      </a:schemeClr>
-    </dgm:fillClrLst>
-    <dgm:linClrLst meth="repeat">
-      <a:schemeClr val="dk1"/>
-    </dgm:linClrLst>
-    <dgm:effectClrLst/>
-    <dgm:txLinClrLst/>
-    <dgm:txFillClrLst meth="repeat">
-      <a:schemeClr val="dk1"/>
-    </dgm:txFillClrLst>
-    <dgm:txEffectClrLst/>
-  </dgm:styleLbl>
-  <dgm:styleLbl name="dkBgShp">
-    <dgm:fillClrLst meth="repeat">
-      <a:schemeClr val="accent2">
-        <a:shade val="90000"/>
-      </a:schemeClr>
-    </dgm:fillClrLst>
-    <dgm:linClrLst meth="repeat">
-      <a:schemeClr val="dk1"/>
-    </dgm:linClrLst>
-    <dgm:effectClrLst/>
-    <dgm:txLinClrLst/>
-    <dgm:txFillClrLst meth="repeat">
-      <a:schemeClr val="lt1"/>
-    </dgm:txFillClrLst>
-    <dgm:txEffectClrLst/>
-  </dgm:styleLbl>
-  <dgm:styleLbl name="trBgShp">
-    <dgm:fillClrLst meth="repeat">
-      <a:schemeClr val="accent1">
-        <a:tint val="50000"/>
-        <a:alpha val="40000"/>
-      </a:schemeClr>
-    </dgm:fillClrLst>
-    <dgm:linClrLst meth="repeat">
-      <a:schemeClr val="accent2"/>
-    </dgm:linClrLst>
-    <dgm:effectClrLst/>
-    <dgm:txLinClrLst/>
-    <dgm:txFillClrLst meth="repeat">
-      <a:schemeClr val="lt1"/>
-    </dgm:txFillClrLst>
-    <dgm:txEffectClrLst/>
-  </dgm:styleLbl>
-  <dgm:styleLbl name="fgShp">
-    <dgm:fillClrLst meth="repeat">
-      <a:schemeClr val="accent2">
-        <a:tint val="40000"/>
-      </a:schemeClr>
-    </dgm:fillClrLst>
-    <dgm:linClrLst meth="repeat">
-      <a:schemeClr val="lt1"/>
-    </dgm:linClrLst>
-    <dgm:effectClrLst/>
-    <dgm:txLinClrLst/>
-    <dgm:txFillClrLst meth="repeat">
-      <a:schemeClr val="dk1"/>
-    </dgm:txFillClrLst>
-    <dgm:txEffectClrLst/>
-  </dgm:styleLbl>
-  <dgm:styleLbl name="revTx">
-    <dgm:fillClrLst meth="repeat">
-      <a:schemeClr val="lt1">
-        <a:alpha val="0"/>
-      </a:schemeClr>
-    </dgm:fillClrLst>
-    <dgm:linClrLst meth="repeat">
-      <a:schemeClr val="dk1">
-        <a:alpha val="0"/>
-      </a:schemeClr>
-    </dgm:linClrLst>
-    <dgm:effectClrLst/>
-    <dgm:txLinClrLst/>
-    <dgm:txFillClrLst meth="repeat">
-      <a:schemeClr val="tx1"/>
-    </dgm:txFillClrLst>
-    <dgm:txEffectClrLst/>
-  </dgm:styleLbl>
-</dgm:colorsDef>
-</file>
-
-<file path=ppt/diagrams/data1.xml><?xml version="1.0" encoding="utf-8"?>
-<dgm:dataModel xmlns:dgm="http://schemas.openxmlformats.org/drawingml/2006/diagram" xmlns:a="http://schemas.openxmlformats.org/drawingml/2006/main">
-  <dgm:ptLst>
-    <dgm:pt modelId="{2CE5F57F-E7E9-4CED-AFD4-0E1384AD73AE}" type="doc">
-      <dgm:prSet loTypeId="urn:microsoft.com/office/officeart/2018/2/layout/IconVerticalSolidList" loCatId="icon" qsTypeId="urn:microsoft.com/office/officeart/2005/8/quickstyle/simple1" qsCatId="simple" csTypeId="urn:microsoft.com/office/officeart/2018/5/colors/Iconchunking_neutralbg_colorful1" csCatId="colorful" phldr="1"/>
-      <dgm:spPr/>
-      <dgm:t>
-        <a:bodyPr/>
-        <a:lstStyle/>
-        <a:p>
-          <a:endParaRPr lang="en-US"/>
-        </a:p>
-      </dgm:t>
-    </dgm:pt>
-    <dgm:pt modelId="{F6A13E17-2A04-450A-8DC1-B189C6C8598F}">
-      <dgm:prSet/>
-      <dgm:spPr/>
-      <dgm:t>
-        <a:bodyPr/>
-        <a:lstStyle/>
-        <a:p>
-          <a:r>
-            <a:rPr lang="en-US"/>
-            <a:t>Literature Review </a:t>
-          </a:r>
-        </a:p>
-      </dgm:t>
-    </dgm:pt>
-    <dgm:pt modelId="{84643489-C23D-40B7-9C97-D37F3DDAE3CE}" type="parTrans" cxnId="{EBB14066-2285-4D42-A9AD-AAEB5D401766}">
-      <dgm:prSet/>
-      <dgm:spPr/>
-      <dgm:t>
-        <a:bodyPr/>
-        <a:lstStyle/>
-        <a:p>
-          <a:endParaRPr lang="en-US"/>
-        </a:p>
-      </dgm:t>
-    </dgm:pt>
-    <dgm:pt modelId="{2EB4069D-9C12-402C-96A8-191B495797E7}" type="sibTrans" cxnId="{EBB14066-2285-4D42-A9AD-AAEB5D401766}">
-      <dgm:prSet/>
-      <dgm:spPr/>
-      <dgm:t>
-        <a:bodyPr/>
-        <a:lstStyle/>
-        <a:p>
-          <a:endParaRPr lang="en-US"/>
-        </a:p>
-      </dgm:t>
-    </dgm:pt>
-    <dgm:pt modelId="{663405A0-6A3E-4E06-88A7-73731EA19945}">
-      <dgm:prSet/>
-      <dgm:spPr/>
-      <dgm:t>
-        <a:bodyPr/>
-        <a:lstStyle/>
-        <a:p>
-          <a:r>
-            <a:rPr lang="en-US"/>
-            <a:t>Comparative Analysis (existing systems, tech choices) </a:t>
-          </a:r>
-        </a:p>
-      </dgm:t>
-    </dgm:pt>
-    <dgm:pt modelId="{E1E92FA2-B7C6-4684-86AA-B6F6F6832654}" type="parTrans" cxnId="{49A8BB1C-F7D8-4BA2-9164-4D146AE1282E}">
-      <dgm:prSet/>
-      <dgm:spPr/>
-      <dgm:t>
-        <a:bodyPr/>
-        <a:lstStyle/>
-        <a:p>
-          <a:endParaRPr lang="en-US"/>
-        </a:p>
-      </dgm:t>
-    </dgm:pt>
-    <dgm:pt modelId="{24B8B10E-BF80-4118-8611-BF054B3FCF4F}" type="sibTrans" cxnId="{49A8BB1C-F7D8-4BA2-9164-4D146AE1282E}">
-      <dgm:prSet/>
-      <dgm:spPr/>
-      <dgm:t>
-        <a:bodyPr/>
-        <a:lstStyle/>
-        <a:p>
-          <a:endParaRPr lang="en-US"/>
-        </a:p>
-      </dgm:t>
-    </dgm:pt>
-    <dgm:pt modelId="{9AACA964-5374-4061-9026-62A5D59575CE}">
-      <dgm:prSet/>
-      <dgm:spPr/>
-      <dgm:t>
-        <a:bodyPr/>
-        <a:lstStyle/>
-        <a:p>
-          <a:r>
-            <a:rPr lang="en-US"/>
-            <a:t>Theoretical Analysis (web architecture, geospatial, routing) </a:t>
-          </a:r>
-        </a:p>
-      </dgm:t>
-    </dgm:pt>
-    <dgm:pt modelId="{BE831253-F9B4-4385-A6AA-4E11EF617193}" type="parTrans" cxnId="{5B92F489-24CD-4CC9-9251-9BC1314F9CA4}">
-      <dgm:prSet/>
-      <dgm:spPr/>
-      <dgm:t>
-        <a:bodyPr/>
-        <a:lstStyle/>
-        <a:p>
-          <a:endParaRPr lang="en-US"/>
-        </a:p>
-      </dgm:t>
-    </dgm:pt>
-    <dgm:pt modelId="{4F05C16E-3D29-4FF3-B55D-8D6EC820823C}" type="sibTrans" cxnId="{5B92F489-24CD-4CC9-9251-9BC1314F9CA4}">
-      <dgm:prSet/>
-      <dgm:spPr/>
-      <dgm:t>
-        <a:bodyPr/>
-        <a:lstStyle/>
-        <a:p>
-          <a:endParaRPr lang="en-US"/>
-        </a:p>
-      </dgm:t>
-    </dgm:pt>
-    <dgm:pt modelId="{13106A0D-160F-483F-8624-9864FD7701BA}">
-      <dgm:prSet/>
-      <dgm:spPr/>
-      <dgm:t>
-        <a:bodyPr/>
-        <a:lstStyle/>
-        <a:p>
-          <a:r>
-            <a:rPr lang="en-US"/>
-            <a:t>Geospatial Analysis </a:t>
-          </a:r>
-        </a:p>
-      </dgm:t>
-    </dgm:pt>
-    <dgm:pt modelId="{1B7DDAD3-889B-412E-B5DD-8E7AE5A761BB}" type="parTrans" cxnId="{9D1F5EF3-28A4-4315-B676-D98ED7C06288}">
-      <dgm:prSet/>
-      <dgm:spPr/>
-      <dgm:t>
-        <a:bodyPr/>
-        <a:lstStyle/>
-        <a:p>
-          <a:endParaRPr lang="en-US"/>
-        </a:p>
-      </dgm:t>
-    </dgm:pt>
-    <dgm:pt modelId="{D7212F53-4D3B-484E-9A4B-BE41A802D7EE}" type="sibTrans" cxnId="{9D1F5EF3-28A4-4315-B676-D98ED7C06288}">
-      <dgm:prSet/>
-      <dgm:spPr/>
-      <dgm:t>
-        <a:bodyPr/>
-        <a:lstStyle/>
-        <a:p>
-          <a:endParaRPr lang="en-US"/>
-        </a:p>
-      </dgm:t>
-    </dgm:pt>
-    <dgm:pt modelId="{C6F4BEFA-BE77-4169-A8C4-FE186E38C8D9}">
-      <dgm:prSet/>
-      <dgm:spPr/>
-      <dgm:t>
-        <a:bodyPr/>
-        <a:lstStyle/>
-        <a:p>
-          <a:r>
-            <a:rPr lang="en-US"/>
-            <a:t>Testing (unit, integration, usability considerations)</a:t>
-          </a:r>
-        </a:p>
-      </dgm:t>
-    </dgm:pt>
-    <dgm:pt modelId="{6155D35F-60B4-460B-B365-591B62724FBE}" type="parTrans" cxnId="{59009476-4607-4FEE-B628-1200A7CD163B}">
-      <dgm:prSet/>
-      <dgm:spPr/>
-      <dgm:t>
-        <a:bodyPr/>
-        <a:lstStyle/>
-        <a:p>
-          <a:endParaRPr lang="en-US"/>
-        </a:p>
-      </dgm:t>
-    </dgm:pt>
-    <dgm:pt modelId="{69ACE6A1-DFC4-4D74-A64C-F4DA9DCACE87}" type="sibTrans" cxnId="{59009476-4607-4FEE-B628-1200A7CD163B}">
-      <dgm:prSet/>
-      <dgm:spPr/>
-      <dgm:t>
-        <a:bodyPr/>
-        <a:lstStyle/>
-        <a:p>
-          <a:endParaRPr lang="en-US"/>
-        </a:p>
-      </dgm:t>
-    </dgm:pt>
-    <dgm:pt modelId="{602D9633-423A-4161-AC31-7D9552633A0D}" type="pres">
-      <dgm:prSet presAssocID="{2CE5F57F-E7E9-4CED-AFD4-0E1384AD73AE}" presName="root" presStyleCnt="0">
-        <dgm:presLayoutVars>
-          <dgm:dir/>
-          <dgm:resizeHandles val="exact"/>
-        </dgm:presLayoutVars>
-      </dgm:prSet>
-      <dgm:spPr/>
-    </dgm:pt>
-    <dgm:pt modelId="{DE07E000-33CC-4FC1-ABD0-CA315637049C}" type="pres">
-      <dgm:prSet presAssocID="{F6A13E17-2A04-450A-8DC1-B189C6C8598F}" presName="compNode" presStyleCnt="0"/>
-      <dgm:spPr/>
-    </dgm:pt>
-    <dgm:pt modelId="{44838404-13DA-4016-BA10-97FCCFCB94C3}" type="pres">
-      <dgm:prSet presAssocID="{F6A13E17-2A04-450A-8DC1-B189C6C8598F}" presName="bgRect" presStyleLbl="bgShp" presStyleIdx="0" presStyleCnt="5"/>
-      <dgm:spPr/>
-    </dgm:pt>
-    <dgm:pt modelId="{829438AD-265E-4A5B-A19E-EF53771F2C32}" type="pres">
-      <dgm:prSet presAssocID="{F6A13E17-2A04-450A-8DC1-B189C6C8598F}" presName="iconRect" presStyleLbl="node1" presStyleIdx="0" presStyleCnt="5"/>
-      <dgm:spPr>
-        <a:blipFill>
-          <a:blip xmlns:r="http://schemas.openxmlformats.org/officeDocument/2006/relationships" r:embed="rId1">
-            <a:extLst>
-              <a:ext uri="{28A0092B-C50C-407E-A947-70E740481C1C}">
-                <a14:useLocalDpi xmlns:a14="http://schemas.microsoft.com/office/drawing/2010/main" val="0"/>
-              </a:ext>
-              <a:ext uri="{96DAC541-7B7A-43D3-8B79-37D633B846F1}">
-                <asvg:svgBlip xmlns:asvg="http://schemas.microsoft.com/office/drawing/2016/SVG/main" r:embed="rId2"/>
-              </a:ext>
-            </a:extLst>
-          </a:blip>
-          <a:stretch>
-            <a:fillRect/>
-          </a:stretch>
-        </a:blipFill>
-        <a:ln>
-          <a:noFill/>
-        </a:ln>
-      </dgm:spPr>
-      <dgm:extLst>
-        <a:ext uri="{E40237B7-FDA0-4F09-8148-C483321AD2D9}">
-          <dgm14:cNvPr xmlns:dgm14="http://schemas.microsoft.com/office/drawing/2010/diagram" id="0" name="" descr="Books"/>
-        </a:ext>
-      </dgm:extLst>
-    </dgm:pt>
-    <dgm:pt modelId="{031C8821-C3C2-4F87-88BD-75873F52CD33}" type="pres">
-      <dgm:prSet presAssocID="{F6A13E17-2A04-450A-8DC1-B189C6C8598F}" presName="spaceRect" presStyleCnt="0"/>
-      <dgm:spPr/>
-    </dgm:pt>
-    <dgm:pt modelId="{A342814F-8B03-4BB9-8419-39642A43AC6A}" type="pres">
-      <dgm:prSet presAssocID="{F6A13E17-2A04-450A-8DC1-B189C6C8598F}" presName="parTx" presStyleLbl="revTx" presStyleIdx="0" presStyleCnt="5">
-        <dgm:presLayoutVars>
-          <dgm:chMax val="0"/>
-          <dgm:chPref val="0"/>
-        </dgm:presLayoutVars>
-      </dgm:prSet>
-      <dgm:spPr/>
-    </dgm:pt>
-    <dgm:pt modelId="{518939DA-5ADB-470B-8972-66BAF01FB9E9}" type="pres">
-      <dgm:prSet presAssocID="{2EB4069D-9C12-402C-96A8-191B495797E7}" presName="sibTrans" presStyleCnt="0"/>
-      <dgm:spPr/>
-    </dgm:pt>
-    <dgm:pt modelId="{E317BEB9-B926-4740-92DD-FF9A1D748AE6}" type="pres">
-      <dgm:prSet presAssocID="{663405A0-6A3E-4E06-88A7-73731EA19945}" presName="compNode" presStyleCnt="0"/>
-      <dgm:spPr/>
-    </dgm:pt>
-    <dgm:pt modelId="{4287159E-016C-4741-9DEC-81E1C28BA15C}" type="pres">
-      <dgm:prSet presAssocID="{663405A0-6A3E-4E06-88A7-73731EA19945}" presName="bgRect" presStyleLbl="bgShp" presStyleIdx="1" presStyleCnt="5"/>
-      <dgm:spPr/>
-    </dgm:pt>
-    <dgm:pt modelId="{B7DE7D7F-2BA2-4902-BEAC-FD1FB3A388E3}" type="pres">
-      <dgm:prSet presAssocID="{663405A0-6A3E-4E06-88A7-73731EA19945}" presName="iconRect" presStyleLbl="node1" presStyleIdx="1" presStyleCnt="5"/>
-      <dgm:spPr>
-        <a:blipFill>
-          <a:blip xmlns:r="http://schemas.openxmlformats.org/officeDocument/2006/relationships" r:embed="rId3">
-            <a:extLst>
-              <a:ext uri="{28A0092B-C50C-407E-A947-70E740481C1C}">
-                <a14:useLocalDpi xmlns:a14="http://schemas.microsoft.com/office/drawing/2010/main" val="0"/>
-              </a:ext>
-              <a:ext uri="{96DAC541-7B7A-43D3-8B79-37D633B846F1}">
-                <asvg:svgBlip xmlns:asvg="http://schemas.microsoft.com/office/drawing/2016/SVG/main" r:embed="rId4"/>
-              </a:ext>
-            </a:extLst>
-          </a:blip>
-          <a:stretch>
-            <a:fillRect/>
-          </a:stretch>
-        </a:blipFill>
-        <a:ln>
-          <a:noFill/>
-        </a:ln>
-      </dgm:spPr>
-      <dgm:extLst>
-        <a:ext uri="{E40237B7-FDA0-4F09-8148-C483321AD2D9}">
-          <dgm14:cNvPr xmlns:dgm14="http://schemas.microsoft.com/office/drawing/2010/diagram" id="0" name="" descr="Venn Diagram"/>
-        </a:ext>
-      </dgm:extLst>
-    </dgm:pt>
-    <dgm:pt modelId="{2D78B059-C5C9-47E2-9AFF-168DCE0F38E0}" type="pres">
-      <dgm:prSet presAssocID="{663405A0-6A3E-4E06-88A7-73731EA19945}" presName="spaceRect" presStyleCnt="0"/>
-      <dgm:spPr/>
-    </dgm:pt>
-    <dgm:pt modelId="{B0758E69-B5ED-428F-9871-9F8364680499}" type="pres">
-      <dgm:prSet presAssocID="{663405A0-6A3E-4E06-88A7-73731EA19945}" presName="parTx" presStyleLbl="revTx" presStyleIdx="1" presStyleCnt="5">
-        <dgm:presLayoutVars>
-          <dgm:chMax val="0"/>
-          <dgm:chPref val="0"/>
-        </dgm:presLayoutVars>
-      </dgm:prSet>
-      <dgm:spPr/>
-    </dgm:pt>
-    <dgm:pt modelId="{BF365BB0-D651-4AB7-B2B0-31DCA43AE4B0}" type="pres">
-      <dgm:prSet presAssocID="{24B8B10E-BF80-4118-8611-BF054B3FCF4F}" presName="sibTrans" presStyleCnt="0"/>
-      <dgm:spPr/>
-    </dgm:pt>
-    <dgm:pt modelId="{FC88119A-8E95-4406-BF60-F82571695BC3}" type="pres">
-      <dgm:prSet presAssocID="{9AACA964-5374-4061-9026-62A5D59575CE}" presName="compNode" presStyleCnt="0"/>
-      <dgm:spPr/>
-    </dgm:pt>
-    <dgm:pt modelId="{5AADEBE7-3E2B-4FEC-BB6B-6E7C9337CCE7}" type="pres">
-      <dgm:prSet presAssocID="{9AACA964-5374-4061-9026-62A5D59575CE}" presName="bgRect" presStyleLbl="bgShp" presStyleIdx="2" presStyleCnt="5"/>
-      <dgm:spPr/>
-    </dgm:pt>
-    <dgm:pt modelId="{116A1B8A-3570-4AF8-BEF2-D24E956F0F97}" type="pres">
-      <dgm:prSet presAssocID="{9AACA964-5374-4061-9026-62A5D59575CE}" presName="iconRect" presStyleLbl="node1" presStyleIdx="2" presStyleCnt="5"/>
-      <dgm:spPr>
-        <a:blipFill>
-          <a:blip xmlns:r="http://schemas.openxmlformats.org/officeDocument/2006/relationships" r:embed="rId5">
-            <a:extLst>
-              <a:ext uri="{28A0092B-C50C-407E-A947-70E740481C1C}">
-                <a14:useLocalDpi xmlns:a14="http://schemas.microsoft.com/office/drawing/2010/main" val="0"/>
-              </a:ext>
-              <a:ext uri="{96DAC541-7B7A-43D3-8B79-37D633B846F1}">
-                <asvg:svgBlip xmlns:asvg="http://schemas.microsoft.com/office/drawing/2016/SVG/main" r:embed="rId6"/>
-              </a:ext>
-            </a:extLst>
-          </a:blip>
-          <a:stretch>
-            <a:fillRect/>
-          </a:stretch>
-        </a:blipFill>
-        <a:ln>
-          <a:noFill/>
-        </a:ln>
-      </dgm:spPr>
-      <dgm:extLst>
-        <a:ext uri="{E40237B7-FDA0-4F09-8148-C483321AD2D9}">
-          <dgm14:cNvPr xmlns:dgm14="http://schemas.microsoft.com/office/drawing/2010/diagram" id="0" name="" descr="Drawing Compass"/>
-        </a:ext>
-      </dgm:extLst>
-    </dgm:pt>
-    <dgm:pt modelId="{27CF90DF-4C80-4DF5-A737-3B09CCE92292}" type="pres">
-      <dgm:prSet presAssocID="{9AACA964-5374-4061-9026-62A5D59575CE}" presName="spaceRect" presStyleCnt="0"/>
-      <dgm:spPr/>
-    </dgm:pt>
-    <dgm:pt modelId="{CA1937E6-A1BC-4D71-9E9E-9F3F58AFC04E}" type="pres">
-      <dgm:prSet presAssocID="{9AACA964-5374-4061-9026-62A5D59575CE}" presName="parTx" presStyleLbl="revTx" presStyleIdx="2" presStyleCnt="5">
-        <dgm:presLayoutVars>
-          <dgm:chMax val="0"/>
-          <dgm:chPref val="0"/>
-        </dgm:presLayoutVars>
-      </dgm:prSet>
-      <dgm:spPr/>
-    </dgm:pt>
-    <dgm:pt modelId="{145D234F-06B0-456C-906A-2EC7EABBAAE6}" type="pres">
-      <dgm:prSet presAssocID="{4F05C16E-3D29-4FF3-B55D-8D6EC820823C}" presName="sibTrans" presStyleCnt="0"/>
-      <dgm:spPr/>
-    </dgm:pt>
-    <dgm:pt modelId="{8CF208F7-3D12-40BD-A370-5E8115201197}" type="pres">
-      <dgm:prSet presAssocID="{13106A0D-160F-483F-8624-9864FD7701BA}" presName="compNode" presStyleCnt="0"/>
-      <dgm:spPr/>
-    </dgm:pt>
-    <dgm:pt modelId="{2B17AC4C-DCDC-4270-8B05-A3D432CED932}" type="pres">
-      <dgm:prSet presAssocID="{13106A0D-160F-483F-8624-9864FD7701BA}" presName="bgRect" presStyleLbl="bgShp" presStyleIdx="3" presStyleCnt="5"/>
-      <dgm:spPr/>
-    </dgm:pt>
-    <dgm:pt modelId="{03F17E6B-659E-438F-8E62-0D803B9BBDF6}" type="pres">
-      <dgm:prSet presAssocID="{13106A0D-160F-483F-8624-9864FD7701BA}" presName="iconRect" presStyleLbl="node1" presStyleIdx="3" presStyleCnt="5"/>
-      <dgm:spPr>
-        <a:blipFill>
-          <a:blip xmlns:r="http://schemas.openxmlformats.org/officeDocument/2006/relationships" r:embed="rId7">
-            <a:extLst>
-              <a:ext uri="{28A0092B-C50C-407E-A947-70E740481C1C}">
-                <a14:useLocalDpi xmlns:a14="http://schemas.microsoft.com/office/drawing/2010/main" val="0"/>
-              </a:ext>
-              <a:ext uri="{96DAC541-7B7A-43D3-8B79-37D633B846F1}">
-                <asvg:svgBlip xmlns:asvg="http://schemas.microsoft.com/office/drawing/2016/SVG/main" r:embed="rId8"/>
-              </a:ext>
-            </a:extLst>
-          </a:blip>
-          <a:stretch>
-            <a:fillRect/>
-          </a:stretch>
-        </a:blipFill>
-        <a:ln>
-          <a:noFill/>
-        </a:ln>
-      </dgm:spPr>
-      <dgm:extLst>
-        <a:ext uri="{E40237B7-FDA0-4F09-8148-C483321AD2D9}">
-          <dgm14:cNvPr xmlns:dgm14="http://schemas.microsoft.com/office/drawing/2010/diagram" id="0" name="" descr="Map with pin"/>
-        </a:ext>
-      </dgm:extLst>
-    </dgm:pt>
-    <dgm:pt modelId="{8176FC59-BD13-4A90-BBF7-F2F897006842}" type="pres">
-      <dgm:prSet presAssocID="{13106A0D-160F-483F-8624-9864FD7701BA}" presName="spaceRect" presStyleCnt="0"/>
-      <dgm:spPr/>
-    </dgm:pt>
-    <dgm:pt modelId="{ADA7763D-D93E-4B46-AED0-E0B90465EDD4}" type="pres">
-      <dgm:prSet presAssocID="{13106A0D-160F-483F-8624-9864FD7701BA}" presName="parTx" presStyleLbl="revTx" presStyleIdx="3" presStyleCnt="5">
-        <dgm:presLayoutVars>
-          <dgm:chMax val="0"/>
-          <dgm:chPref val="0"/>
-        </dgm:presLayoutVars>
-      </dgm:prSet>
-      <dgm:spPr/>
-    </dgm:pt>
-    <dgm:pt modelId="{AA96190C-7648-4747-A22A-E7D82379472D}" type="pres">
-      <dgm:prSet presAssocID="{D7212F53-4D3B-484E-9A4B-BE41A802D7EE}" presName="sibTrans" presStyleCnt="0"/>
-      <dgm:spPr/>
-    </dgm:pt>
-    <dgm:pt modelId="{30D42736-C907-483F-B6FD-30319F91C066}" type="pres">
-      <dgm:prSet presAssocID="{C6F4BEFA-BE77-4169-A8C4-FE186E38C8D9}" presName="compNode" presStyleCnt="0"/>
-      <dgm:spPr/>
-    </dgm:pt>
-    <dgm:pt modelId="{63511EE0-C3EF-4439-89F2-7B321D82DC51}" type="pres">
-      <dgm:prSet presAssocID="{C6F4BEFA-BE77-4169-A8C4-FE186E38C8D9}" presName="bgRect" presStyleLbl="bgShp" presStyleIdx="4" presStyleCnt="5"/>
-      <dgm:spPr/>
-    </dgm:pt>
-    <dgm:pt modelId="{79818F71-0FF1-435D-816A-D055982FE395}" type="pres">
-      <dgm:prSet presAssocID="{C6F4BEFA-BE77-4169-A8C4-FE186E38C8D9}" presName="iconRect" presStyleLbl="node1" presStyleIdx="4" presStyleCnt="5"/>
-      <dgm:spPr>
-        <a:blipFill>
-          <a:blip xmlns:r="http://schemas.openxmlformats.org/officeDocument/2006/relationships" r:embed="rId9">
-            <a:extLst>
-              <a:ext uri="{28A0092B-C50C-407E-A947-70E740481C1C}">
-                <a14:useLocalDpi xmlns:a14="http://schemas.microsoft.com/office/drawing/2010/main" val="0"/>
-              </a:ext>
-              <a:ext uri="{96DAC541-7B7A-43D3-8B79-37D633B846F1}">
-                <asvg:svgBlip xmlns:asvg="http://schemas.microsoft.com/office/drawing/2016/SVG/main" r:embed="rId10"/>
-              </a:ext>
-            </a:extLst>
-          </a:blip>
-          <a:stretch>
-            <a:fillRect/>
-          </a:stretch>
-        </a:blipFill>
-        <a:ln>
-          <a:noFill/>
-        </a:ln>
-      </dgm:spPr>
-      <dgm:extLst>
-        <a:ext uri="{E40237B7-FDA0-4F09-8148-C483321AD2D9}">
-          <dgm14:cNvPr xmlns:dgm14="http://schemas.microsoft.com/office/drawing/2010/diagram" id="0" name="" descr="Flowchart"/>
-        </a:ext>
-      </dgm:extLst>
-    </dgm:pt>
-    <dgm:pt modelId="{D6005341-D0EE-452E-A047-B8F921654DBE}" type="pres">
-      <dgm:prSet presAssocID="{C6F4BEFA-BE77-4169-A8C4-FE186E38C8D9}" presName="spaceRect" presStyleCnt="0"/>
-      <dgm:spPr/>
-    </dgm:pt>
-    <dgm:pt modelId="{7DD0D187-AB93-4DCC-A767-DE78E72F8510}" type="pres">
-      <dgm:prSet presAssocID="{C6F4BEFA-BE77-4169-A8C4-FE186E38C8D9}" presName="parTx" presStyleLbl="revTx" presStyleIdx="4" presStyleCnt="5">
-        <dgm:presLayoutVars>
-          <dgm:chMax val="0"/>
-          <dgm:chPref val="0"/>
-        </dgm:presLayoutVars>
-      </dgm:prSet>
-      <dgm:spPr/>
-    </dgm:pt>
-  </dgm:ptLst>
-  <dgm:cxnLst>
-    <dgm:cxn modelId="{49A8BB1C-F7D8-4BA2-9164-4D146AE1282E}" srcId="{2CE5F57F-E7E9-4CED-AFD4-0E1384AD73AE}" destId="{663405A0-6A3E-4E06-88A7-73731EA19945}" srcOrd="1" destOrd="0" parTransId="{E1E92FA2-B7C6-4684-86AA-B6F6F6832654}" sibTransId="{24B8B10E-BF80-4118-8611-BF054B3FCF4F}"/>
-    <dgm:cxn modelId="{633EDA36-204A-4877-8FBE-25FD958F5687}" type="presOf" srcId="{9AACA964-5374-4061-9026-62A5D59575CE}" destId="{CA1937E6-A1BC-4D71-9E9E-9F3F58AFC04E}" srcOrd="0" destOrd="0" presId="urn:microsoft.com/office/officeart/2018/2/layout/IconVerticalSolidList"/>
-    <dgm:cxn modelId="{73C65238-61E4-4ED1-B9E9-814A2A95361F}" type="presOf" srcId="{F6A13E17-2A04-450A-8DC1-B189C6C8598F}" destId="{A342814F-8B03-4BB9-8419-39642A43AC6A}" srcOrd="0" destOrd="0" presId="urn:microsoft.com/office/officeart/2018/2/layout/IconVerticalSolidList"/>
-    <dgm:cxn modelId="{55EEB64C-89FE-4E24-BDDB-966CFD780861}" type="presOf" srcId="{2CE5F57F-E7E9-4CED-AFD4-0E1384AD73AE}" destId="{602D9633-423A-4161-AC31-7D9552633A0D}" srcOrd="0" destOrd="0" presId="urn:microsoft.com/office/officeart/2018/2/layout/IconVerticalSolidList"/>
-    <dgm:cxn modelId="{EBB14066-2285-4D42-A9AD-AAEB5D401766}" srcId="{2CE5F57F-E7E9-4CED-AFD4-0E1384AD73AE}" destId="{F6A13E17-2A04-450A-8DC1-B189C6C8598F}" srcOrd="0" destOrd="0" parTransId="{84643489-C23D-40B7-9C97-D37F3DDAE3CE}" sibTransId="{2EB4069D-9C12-402C-96A8-191B495797E7}"/>
-    <dgm:cxn modelId="{EA3E8270-5FBA-490A-A501-CB1B162FA5C6}" type="presOf" srcId="{13106A0D-160F-483F-8624-9864FD7701BA}" destId="{ADA7763D-D93E-4B46-AED0-E0B90465EDD4}" srcOrd="0" destOrd="0" presId="urn:microsoft.com/office/officeart/2018/2/layout/IconVerticalSolidList"/>
-    <dgm:cxn modelId="{59009476-4607-4FEE-B628-1200A7CD163B}" srcId="{2CE5F57F-E7E9-4CED-AFD4-0E1384AD73AE}" destId="{C6F4BEFA-BE77-4169-A8C4-FE186E38C8D9}" srcOrd="4" destOrd="0" parTransId="{6155D35F-60B4-460B-B365-591B62724FBE}" sibTransId="{69ACE6A1-DFC4-4D74-A64C-F4DA9DCACE87}"/>
-    <dgm:cxn modelId="{5B92F489-24CD-4CC9-9251-9BC1314F9CA4}" srcId="{2CE5F57F-E7E9-4CED-AFD4-0E1384AD73AE}" destId="{9AACA964-5374-4061-9026-62A5D59575CE}" srcOrd="2" destOrd="0" parTransId="{BE831253-F9B4-4385-A6AA-4E11EF617193}" sibTransId="{4F05C16E-3D29-4FF3-B55D-8D6EC820823C}"/>
-    <dgm:cxn modelId="{34387E9F-5D1F-42D3-B193-3F0E89C67D0D}" type="presOf" srcId="{C6F4BEFA-BE77-4169-A8C4-FE186E38C8D9}" destId="{7DD0D187-AB93-4DCC-A767-DE78E72F8510}" srcOrd="0" destOrd="0" presId="urn:microsoft.com/office/officeart/2018/2/layout/IconVerticalSolidList"/>
-    <dgm:cxn modelId="{9D1F5EF3-28A4-4315-B676-D98ED7C06288}" srcId="{2CE5F57F-E7E9-4CED-AFD4-0E1384AD73AE}" destId="{13106A0D-160F-483F-8624-9864FD7701BA}" srcOrd="3" destOrd="0" parTransId="{1B7DDAD3-889B-412E-B5DD-8E7AE5A761BB}" sibTransId="{D7212F53-4D3B-484E-9A4B-BE41A802D7EE}"/>
-    <dgm:cxn modelId="{997FCEFC-E25A-4465-882B-8C30D35DF20C}" type="presOf" srcId="{663405A0-6A3E-4E06-88A7-73731EA19945}" destId="{B0758E69-B5ED-428F-9871-9F8364680499}" srcOrd="0" destOrd="0" presId="urn:microsoft.com/office/officeart/2018/2/layout/IconVerticalSolidList"/>
-    <dgm:cxn modelId="{48C70D45-83CF-42FA-AE28-B41D38346B3C}" type="presParOf" srcId="{602D9633-423A-4161-AC31-7D9552633A0D}" destId="{DE07E000-33CC-4FC1-ABD0-CA315637049C}" srcOrd="0" destOrd="0" presId="urn:microsoft.com/office/officeart/2018/2/layout/IconVerticalSolidList"/>
-    <dgm:cxn modelId="{29FB817E-F739-48FC-91BC-450B423789AB}" type="presParOf" srcId="{DE07E000-33CC-4FC1-ABD0-CA315637049C}" destId="{44838404-13DA-4016-BA10-97FCCFCB94C3}" srcOrd="0" destOrd="0" presId="urn:microsoft.com/office/officeart/2018/2/layout/IconVerticalSolidList"/>
-    <dgm:cxn modelId="{3161515E-A827-4E50-A5DF-B5EDA0763E30}" type="presParOf" srcId="{DE07E000-33CC-4FC1-ABD0-CA315637049C}" destId="{829438AD-265E-4A5B-A19E-EF53771F2C32}" srcOrd="1" destOrd="0" presId="urn:microsoft.com/office/officeart/2018/2/layout/IconVerticalSolidList"/>
-    <dgm:cxn modelId="{86DEB6AE-5083-4319-BA22-826A7008DAB1}" type="presParOf" srcId="{DE07E000-33CC-4FC1-ABD0-CA315637049C}" destId="{031C8821-C3C2-4F87-88BD-75873F52CD33}" srcOrd="2" destOrd="0" presId="urn:microsoft.com/office/officeart/2018/2/layout/IconVerticalSolidList"/>
-    <dgm:cxn modelId="{01E5D3AA-DED2-41C5-A691-E6082F9C7DFA}" type="presParOf" srcId="{DE07E000-33CC-4FC1-ABD0-CA315637049C}" destId="{A342814F-8B03-4BB9-8419-39642A43AC6A}" srcOrd="3" destOrd="0" presId="urn:microsoft.com/office/officeart/2018/2/layout/IconVerticalSolidList"/>
-    <dgm:cxn modelId="{595DA7C3-DDD6-4DD0-BD63-4CF018FD3120}" type="presParOf" srcId="{602D9633-423A-4161-AC31-7D9552633A0D}" destId="{518939DA-5ADB-470B-8972-66BAF01FB9E9}" srcOrd="1" destOrd="0" presId="urn:microsoft.com/office/officeart/2018/2/layout/IconVerticalSolidList"/>
-    <dgm:cxn modelId="{2876EB9A-8B99-4713-8C30-ED6D30F14395}" type="presParOf" srcId="{602D9633-423A-4161-AC31-7D9552633A0D}" destId="{E317BEB9-B926-4740-92DD-FF9A1D748AE6}" srcOrd="2" destOrd="0" presId="urn:microsoft.com/office/officeart/2018/2/layout/IconVerticalSolidList"/>
-    <dgm:cxn modelId="{9B98D018-8D6C-46FF-BAA8-46991A3E0E85}" type="presParOf" srcId="{E317BEB9-B926-4740-92DD-FF9A1D748AE6}" destId="{4287159E-016C-4741-9DEC-81E1C28BA15C}" srcOrd="0" destOrd="0" presId="urn:microsoft.com/office/officeart/2018/2/layout/IconVerticalSolidList"/>
-    <dgm:cxn modelId="{2B6C393F-11CF-47BC-BEEA-304AE3E17089}" type="presParOf" srcId="{E317BEB9-B926-4740-92DD-FF9A1D748AE6}" destId="{B7DE7D7F-2BA2-4902-BEAC-FD1FB3A388E3}" srcOrd="1" destOrd="0" presId="urn:microsoft.com/office/officeart/2018/2/layout/IconVerticalSolidList"/>
-    <dgm:cxn modelId="{4EF637A0-1125-4656-B8A8-145DAC94498F}" type="presParOf" srcId="{E317BEB9-B926-4740-92DD-FF9A1D748AE6}" destId="{2D78B059-C5C9-47E2-9AFF-168DCE0F38E0}" srcOrd="2" destOrd="0" presId="urn:microsoft.com/office/officeart/2018/2/layout/IconVerticalSolidList"/>
-    <dgm:cxn modelId="{7AD9C5F0-D20D-43D6-AACA-60CDAF44BACF}" type="presParOf" srcId="{E317BEB9-B926-4740-92DD-FF9A1D748AE6}" destId="{B0758E69-B5ED-428F-9871-9F8364680499}" srcOrd="3" destOrd="0" presId="urn:microsoft.com/office/officeart/2018/2/layout/IconVerticalSolidList"/>
-    <dgm:cxn modelId="{02497181-B144-470A-86FF-DD486548B349}" type="presParOf" srcId="{602D9633-423A-4161-AC31-7D9552633A0D}" destId="{BF365BB0-D651-4AB7-B2B0-31DCA43AE4B0}" srcOrd="3" destOrd="0" presId="urn:microsoft.com/office/officeart/2018/2/layout/IconVerticalSolidList"/>
-    <dgm:cxn modelId="{AC2C59AC-1818-4DAF-AFB7-2D92D5364DA5}" type="presParOf" srcId="{602D9633-423A-4161-AC31-7D9552633A0D}" destId="{FC88119A-8E95-4406-BF60-F82571695BC3}" srcOrd="4" destOrd="0" presId="urn:microsoft.com/office/officeart/2018/2/layout/IconVerticalSolidList"/>
-    <dgm:cxn modelId="{F2839623-1D1F-459B-BF3B-6F1292EF2457}" type="presParOf" srcId="{FC88119A-8E95-4406-BF60-F82571695BC3}" destId="{5AADEBE7-3E2B-4FEC-BB6B-6E7C9337CCE7}" srcOrd="0" destOrd="0" presId="urn:microsoft.com/office/officeart/2018/2/layout/IconVerticalSolidList"/>
-    <dgm:cxn modelId="{DB53E0C2-DBA8-44D9-A8E4-91722E929722}" type="presParOf" srcId="{FC88119A-8E95-4406-BF60-F82571695BC3}" destId="{116A1B8A-3570-4AF8-BEF2-D24E956F0F97}" srcOrd="1" destOrd="0" presId="urn:microsoft.com/office/officeart/2018/2/layout/IconVerticalSolidList"/>
-    <dgm:cxn modelId="{5B9FC030-E8E7-4870-97F9-F2B78236555A}" type="presParOf" srcId="{FC88119A-8E95-4406-BF60-F82571695BC3}" destId="{27CF90DF-4C80-4DF5-A737-3B09CCE92292}" srcOrd="2" destOrd="0" presId="urn:microsoft.com/office/officeart/2018/2/layout/IconVerticalSolidList"/>
-    <dgm:cxn modelId="{95EA115C-ED90-4522-9AC6-52EB89D180E8}" type="presParOf" srcId="{FC88119A-8E95-4406-BF60-F82571695BC3}" destId="{CA1937E6-A1BC-4D71-9E9E-9F3F58AFC04E}" srcOrd="3" destOrd="0" presId="urn:microsoft.com/office/officeart/2018/2/layout/IconVerticalSolidList"/>
-    <dgm:cxn modelId="{834D9345-2F7F-4E8C-B812-1DCE9FD91668}" type="presParOf" srcId="{602D9633-423A-4161-AC31-7D9552633A0D}" destId="{145D234F-06B0-456C-906A-2EC7EABBAAE6}" srcOrd="5" destOrd="0" presId="urn:microsoft.com/office/officeart/2018/2/layout/IconVerticalSolidList"/>
-    <dgm:cxn modelId="{79AE6A9C-5C68-4DEB-BAEC-6DD79B9C1AE0}" type="presParOf" srcId="{602D9633-423A-4161-AC31-7D9552633A0D}" destId="{8CF208F7-3D12-40BD-A370-5E8115201197}" srcOrd="6" destOrd="0" presId="urn:microsoft.com/office/officeart/2018/2/layout/IconVerticalSolidList"/>
-    <dgm:cxn modelId="{012AAA4F-5715-44F3-A1C7-5DCCFD0955BA}" type="presParOf" srcId="{8CF208F7-3D12-40BD-A370-5E8115201197}" destId="{2B17AC4C-DCDC-4270-8B05-A3D432CED932}" srcOrd="0" destOrd="0" presId="urn:microsoft.com/office/officeart/2018/2/layout/IconVerticalSolidList"/>
-    <dgm:cxn modelId="{B4A897F2-0252-4556-B398-BE599352982F}" type="presParOf" srcId="{8CF208F7-3D12-40BD-A370-5E8115201197}" destId="{03F17E6B-659E-438F-8E62-0D803B9BBDF6}" srcOrd="1" destOrd="0" presId="urn:microsoft.com/office/officeart/2018/2/layout/IconVerticalSolidList"/>
-    <dgm:cxn modelId="{5B18BB57-0310-4809-A448-612B654665F0}" type="presParOf" srcId="{8CF208F7-3D12-40BD-A370-5E8115201197}" destId="{8176FC59-BD13-4A90-BBF7-F2F897006842}" srcOrd="2" destOrd="0" presId="urn:microsoft.com/office/officeart/2018/2/layout/IconVerticalSolidList"/>
-    <dgm:cxn modelId="{AC57101E-4B71-4BF3-956F-D3B2C1DEE0D1}" type="presParOf" srcId="{8CF208F7-3D12-40BD-A370-5E8115201197}" destId="{ADA7763D-D93E-4B46-AED0-E0B90465EDD4}" srcOrd="3" destOrd="0" presId="urn:microsoft.com/office/officeart/2018/2/layout/IconVerticalSolidList"/>
-    <dgm:cxn modelId="{B2087233-7E40-48C8-8163-A049F0AD9783}" type="presParOf" srcId="{602D9633-423A-4161-AC31-7D9552633A0D}" destId="{AA96190C-7648-4747-A22A-E7D82379472D}" srcOrd="7" destOrd="0" presId="urn:microsoft.com/office/officeart/2018/2/layout/IconVerticalSolidList"/>
-    <dgm:cxn modelId="{A89A0A64-9F2B-42B4-A57A-D3750527B501}" type="presParOf" srcId="{602D9633-423A-4161-AC31-7D9552633A0D}" destId="{30D42736-C907-483F-B6FD-30319F91C066}" srcOrd="8" destOrd="0" presId="urn:microsoft.com/office/officeart/2018/2/layout/IconVerticalSolidList"/>
-    <dgm:cxn modelId="{E1EFC847-57CF-4A29-ADF2-E90502FD92B3}" type="presParOf" srcId="{30D42736-C907-483F-B6FD-30319F91C066}" destId="{63511EE0-C3EF-4439-89F2-7B321D82DC51}" srcOrd="0" destOrd="0" presId="urn:microsoft.com/office/officeart/2018/2/layout/IconVerticalSolidList"/>
-    <dgm:cxn modelId="{FC6995AE-8940-43D4-B2E8-982633D2A2D2}" type="presParOf" srcId="{30D42736-C907-483F-B6FD-30319F91C066}" destId="{79818F71-0FF1-435D-816A-D055982FE395}" srcOrd="1" destOrd="0" presId="urn:microsoft.com/office/officeart/2018/2/layout/IconVerticalSolidList"/>
-    <dgm:cxn modelId="{6055ACD1-01E9-4F4B-A0FA-47BADE7C2C8A}" type="presParOf" srcId="{30D42736-C907-483F-B6FD-30319F91C066}" destId="{D6005341-D0EE-452E-A047-B8F921654DBE}" srcOrd="2" destOrd="0" presId="urn:microsoft.com/office/officeart/2018/2/layout/IconVerticalSolidList"/>
-    <dgm:cxn modelId="{A365CE19-77C4-4A49-8901-56C9DF5871EC}" type="presParOf" srcId="{30D42736-C907-483F-B6FD-30319F91C066}" destId="{7DD0D187-AB93-4DCC-A767-DE78E72F8510}" srcOrd="3" destOrd="0" presId="urn:microsoft.com/office/officeart/2018/2/layout/IconVerticalSolidList"/>
-  </dgm:cxnLst>
-  <dgm:bg/>
-  <dgm:whole/>
-  <dgm:extLst>
-    <a:ext uri="http://schemas.microsoft.com/office/drawing/2008/diagram">
-      <dsp:dataModelExt xmlns:dsp="http://schemas.microsoft.com/office/drawing/2008/diagram" relId="rId7" minVer="http://schemas.openxmlformats.org/drawingml/2006/diagram"/>
-    </a:ext>
-  </dgm:extLst>
-</dgm:dataModel>
-</file>
-
-<file path=ppt/diagrams/drawing1.xml><?xml version="1.0" encoding="utf-8"?>
-<dsp:drawing xmlns:dgm="http://schemas.openxmlformats.org/drawingml/2006/diagram" xmlns:dsp="http://schemas.microsoft.com/office/drawing/2008/diagram" xmlns:a="http://schemas.openxmlformats.org/drawingml/2006/main">
-  <dsp:spTree>
-    <dsp:nvGrpSpPr>
-      <dsp:cNvPr id="0" name=""/>
-      <dsp:cNvGrpSpPr/>
-    </dsp:nvGrpSpPr>
-    <dsp:grpSpPr/>
-    <dsp:sp modelId="{44838404-13DA-4016-BA10-97FCCFCB94C3}">
-      <dsp:nvSpPr>
-        <dsp:cNvPr id="0" name=""/>
-        <dsp:cNvSpPr/>
-      </dsp:nvSpPr>
-      <dsp:spPr>
-        <a:xfrm>
-          <a:off x="0" y="4366"/>
-          <a:ext cx="6245265" cy="930102"/>
-        </a:xfrm>
-        <a:prstGeom prst="roundRect">
-          <a:avLst>
-            <a:gd name="adj" fmla="val 10000"/>
-          </a:avLst>
-        </a:prstGeom>
-        <a:solidFill>
-          <a:schemeClr val="bg1">
-            <a:lumMod val="95000"/>
-            <a:hueOff val="0"/>
-            <a:satOff val="0"/>
-            <a:lumOff val="0"/>
-            <a:alphaOff val="0"/>
-          </a:schemeClr>
-        </a:solidFill>
-        <a:ln>
-          <a:noFill/>
-        </a:ln>
-        <a:effectLst/>
-      </dsp:spPr>
-      <dsp:style>
-        <a:lnRef idx="0">
-          <a:scrgbClr r="0" g="0" b="0"/>
-        </a:lnRef>
-        <a:fillRef idx="1">
-          <a:scrgbClr r="0" g="0" b="0"/>
-        </a:fillRef>
-        <a:effectRef idx="0">
-          <a:scrgbClr r="0" g="0" b="0"/>
-        </a:effectRef>
-        <a:fontRef idx="minor"/>
-      </dsp:style>
-    </dsp:sp>
-    <dsp:sp modelId="{829438AD-265E-4A5B-A19E-EF53771F2C32}">
-      <dsp:nvSpPr>
-        <dsp:cNvPr id="0" name=""/>
-        <dsp:cNvSpPr/>
-      </dsp:nvSpPr>
-      <dsp:spPr>
-        <a:xfrm>
-          <a:off x="281355" y="213639"/>
-          <a:ext cx="511556" cy="511556"/>
-        </a:xfrm>
-        <a:prstGeom prst="rect">
-          <a:avLst/>
-        </a:prstGeom>
-        <a:blipFill>
-          <a:blip xmlns:r="http://schemas.openxmlformats.org/officeDocument/2006/relationships" r:embed="rId1">
-            <a:extLst>
-              <a:ext uri="{28A0092B-C50C-407E-A947-70E740481C1C}">
-                <a14:useLocalDpi xmlns:a14="http://schemas.microsoft.com/office/drawing/2010/main" val="0"/>
-              </a:ext>
-              <a:ext uri="{96DAC541-7B7A-43D3-8B79-37D633B846F1}">
-                <asvg:svgBlip xmlns:asvg="http://schemas.microsoft.com/office/drawing/2016/SVG/main" r:embed="rId2"/>
-              </a:ext>
-            </a:extLst>
-          </a:blip>
-          <a:stretch>
-            <a:fillRect/>
-          </a:stretch>
-        </a:blipFill>
-        <a:ln w="19050" cap="flat" cmpd="sng" algn="ctr">
-          <a:noFill/>
-          <a:prstDash val="solid"/>
-          <a:miter lim="800000"/>
-        </a:ln>
-        <a:effectLst/>
-      </dsp:spPr>
-      <dsp:style>
-        <a:lnRef idx="2">
-          <a:scrgbClr r="0" g="0" b="0"/>
-        </a:lnRef>
-        <a:fillRef idx="1">
-          <a:scrgbClr r="0" g="0" b="0"/>
-        </a:fillRef>
-        <a:effectRef idx="0">
-          <a:scrgbClr r="0" g="0" b="0"/>
-        </a:effectRef>
-        <a:fontRef idx="minor">
-          <a:schemeClr val="lt1"/>
-        </a:fontRef>
-      </dsp:style>
-    </dsp:sp>
-    <dsp:sp modelId="{A342814F-8B03-4BB9-8419-39642A43AC6A}">
-      <dsp:nvSpPr>
-        <dsp:cNvPr id="0" name=""/>
-        <dsp:cNvSpPr/>
-      </dsp:nvSpPr>
-      <dsp:spPr>
-        <a:xfrm>
-          <a:off x="1074268" y="4366"/>
-          <a:ext cx="5170996" cy="930102"/>
-        </a:xfrm>
-        <a:prstGeom prst="rect">
-          <a:avLst/>
-        </a:prstGeom>
-        <a:noFill/>
-        <a:ln>
-          <a:noFill/>
-        </a:ln>
-        <a:effectLst/>
-      </dsp:spPr>
-      <dsp:style>
-        <a:lnRef idx="0">
-          <a:scrgbClr r="0" g="0" b="0"/>
-        </a:lnRef>
-        <a:fillRef idx="0">
-          <a:scrgbClr r="0" g="0" b="0"/>
-        </a:fillRef>
-        <a:effectRef idx="0">
-          <a:scrgbClr r="0" g="0" b="0"/>
-        </a:effectRef>
-        <a:fontRef idx="minor"/>
-      </dsp:style>
-      <dsp:txBody>
-        <a:bodyPr spcFirstLastPara="0" vert="horz" wrap="square" lIns="98436" tIns="98436" rIns="98436" bIns="98436" numCol="1" spcCol="1270" anchor="ctr" anchorCtr="0">
-          <a:noAutofit/>
-        </a:bodyPr>
-        <a:lstStyle/>
-        <a:p>
-          <a:pPr marL="0" lvl="0" indent="0" algn="l" defTabSz="844550">
-            <a:lnSpc>
-              <a:spcPct val="90000"/>
-            </a:lnSpc>
-            <a:spcBef>
-              <a:spcPct val="0"/>
-            </a:spcBef>
-            <a:spcAft>
-              <a:spcPct val="35000"/>
-            </a:spcAft>
-            <a:buNone/>
-          </a:pPr>
-          <a:r>
-            <a:rPr lang="en-US" sz="1900" kern="1200"/>
-            <a:t>Literature Review </a:t>
-          </a:r>
-        </a:p>
-      </dsp:txBody>
-      <dsp:txXfrm>
-        <a:off x="1074268" y="4366"/>
-        <a:ext cx="5170996" cy="930102"/>
-      </dsp:txXfrm>
-    </dsp:sp>
-    <dsp:sp modelId="{4287159E-016C-4741-9DEC-81E1C28BA15C}">
-      <dsp:nvSpPr>
-        <dsp:cNvPr id="0" name=""/>
-        <dsp:cNvSpPr/>
-      </dsp:nvSpPr>
-      <dsp:spPr>
-        <a:xfrm>
-          <a:off x="0" y="1166994"/>
-          <a:ext cx="6245265" cy="930102"/>
-        </a:xfrm>
-        <a:prstGeom prst="roundRect">
-          <a:avLst>
-            <a:gd name="adj" fmla="val 10000"/>
-          </a:avLst>
-        </a:prstGeom>
-        <a:solidFill>
-          <a:schemeClr val="bg1">
-            <a:lumMod val="95000"/>
-            <a:hueOff val="0"/>
-            <a:satOff val="0"/>
-            <a:lumOff val="0"/>
-            <a:alphaOff val="0"/>
-          </a:schemeClr>
-        </a:solidFill>
-        <a:ln>
-          <a:noFill/>
-        </a:ln>
-        <a:effectLst/>
-      </dsp:spPr>
-      <dsp:style>
-        <a:lnRef idx="0">
-          <a:scrgbClr r="0" g="0" b="0"/>
-        </a:lnRef>
-        <a:fillRef idx="1">
-          <a:scrgbClr r="0" g="0" b="0"/>
-        </a:fillRef>
-        <a:effectRef idx="0">
-          <a:scrgbClr r="0" g="0" b="0"/>
-        </a:effectRef>
-        <a:fontRef idx="minor"/>
-      </dsp:style>
-    </dsp:sp>
-    <dsp:sp modelId="{B7DE7D7F-2BA2-4902-BEAC-FD1FB3A388E3}">
-      <dsp:nvSpPr>
-        <dsp:cNvPr id="0" name=""/>
-        <dsp:cNvSpPr/>
-      </dsp:nvSpPr>
-      <dsp:spPr>
-        <a:xfrm>
-          <a:off x="281355" y="1376267"/>
-          <a:ext cx="511556" cy="511556"/>
-        </a:xfrm>
-        <a:prstGeom prst="rect">
-          <a:avLst/>
-        </a:prstGeom>
-        <a:blipFill>
-          <a:blip xmlns:r="http://schemas.openxmlformats.org/officeDocument/2006/relationships" r:embed="rId3">
-            <a:extLst>
-              <a:ext uri="{28A0092B-C50C-407E-A947-70E740481C1C}">
-                <a14:useLocalDpi xmlns:a14="http://schemas.microsoft.com/office/drawing/2010/main" val="0"/>
-              </a:ext>
-              <a:ext uri="{96DAC541-7B7A-43D3-8B79-37D633B846F1}">
-                <asvg:svgBlip xmlns:asvg="http://schemas.microsoft.com/office/drawing/2016/SVG/main" r:embed="rId4"/>
-              </a:ext>
-            </a:extLst>
-          </a:blip>
-          <a:stretch>
-            <a:fillRect/>
-          </a:stretch>
-        </a:blipFill>
-        <a:ln w="19050" cap="flat" cmpd="sng" algn="ctr">
-          <a:noFill/>
-          <a:prstDash val="solid"/>
-          <a:miter lim="800000"/>
-        </a:ln>
-        <a:effectLst/>
-      </dsp:spPr>
-      <dsp:style>
-        <a:lnRef idx="2">
-          <a:scrgbClr r="0" g="0" b="0"/>
-        </a:lnRef>
-        <a:fillRef idx="1">
-          <a:scrgbClr r="0" g="0" b="0"/>
-        </a:fillRef>
-        <a:effectRef idx="0">
-          <a:scrgbClr r="0" g="0" b="0"/>
-        </a:effectRef>
-        <a:fontRef idx="minor">
-          <a:schemeClr val="lt1"/>
-        </a:fontRef>
-      </dsp:style>
-    </dsp:sp>
-    <dsp:sp modelId="{B0758E69-B5ED-428F-9871-9F8364680499}">
-      <dsp:nvSpPr>
-        <dsp:cNvPr id="0" name=""/>
-        <dsp:cNvSpPr/>
-      </dsp:nvSpPr>
-      <dsp:spPr>
-        <a:xfrm>
-          <a:off x="1074268" y="1166994"/>
-          <a:ext cx="5170996" cy="930102"/>
-        </a:xfrm>
-        <a:prstGeom prst="rect">
-          <a:avLst/>
-        </a:prstGeom>
-        <a:noFill/>
-        <a:ln>
-          <a:noFill/>
-        </a:ln>
-        <a:effectLst/>
-      </dsp:spPr>
-      <dsp:style>
-        <a:lnRef idx="0">
-          <a:scrgbClr r="0" g="0" b="0"/>
-        </a:lnRef>
-        <a:fillRef idx="0">
-          <a:scrgbClr r="0" g="0" b="0"/>
-        </a:fillRef>
-        <a:effectRef idx="0">
-          <a:scrgbClr r="0" g="0" b="0"/>
-        </a:effectRef>
-        <a:fontRef idx="minor"/>
-      </dsp:style>
-      <dsp:txBody>
-        <a:bodyPr spcFirstLastPara="0" vert="horz" wrap="square" lIns="98436" tIns="98436" rIns="98436" bIns="98436" numCol="1" spcCol="1270" anchor="ctr" anchorCtr="0">
-          <a:noAutofit/>
-        </a:bodyPr>
-        <a:lstStyle/>
-        <a:p>
-          <a:pPr marL="0" lvl="0" indent="0" algn="l" defTabSz="844550">
-            <a:lnSpc>
-              <a:spcPct val="90000"/>
-            </a:lnSpc>
-            <a:spcBef>
-              <a:spcPct val="0"/>
-            </a:spcBef>
-            <a:spcAft>
-              <a:spcPct val="35000"/>
-            </a:spcAft>
-            <a:buNone/>
-          </a:pPr>
-          <a:r>
-            <a:rPr lang="en-US" sz="1900" kern="1200"/>
-            <a:t>Comparative Analysis (existing systems, tech choices) </a:t>
-          </a:r>
-        </a:p>
-      </dsp:txBody>
-      <dsp:txXfrm>
-        <a:off x="1074268" y="1166994"/>
-        <a:ext cx="5170996" cy="930102"/>
-      </dsp:txXfrm>
-    </dsp:sp>
-    <dsp:sp modelId="{5AADEBE7-3E2B-4FEC-BB6B-6E7C9337CCE7}">
-      <dsp:nvSpPr>
-        <dsp:cNvPr id="0" name=""/>
-        <dsp:cNvSpPr/>
-      </dsp:nvSpPr>
-      <dsp:spPr>
-        <a:xfrm>
-          <a:off x="0" y="2329622"/>
-          <a:ext cx="6245265" cy="930102"/>
-        </a:xfrm>
-        <a:prstGeom prst="roundRect">
-          <a:avLst>
-            <a:gd name="adj" fmla="val 10000"/>
-          </a:avLst>
-        </a:prstGeom>
-        <a:solidFill>
-          <a:schemeClr val="bg1">
-            <a:lumMod val="95000"/>
-            <a:hueOff val="0"/>
-            <a:satOff val="0"/>
-            <a:lumOff val="0"/>
-            <a:alphaOff val="0"/>
-          </a:schemeClr>
-        </a:solidFill>
-        <a:ln>
-          <a:noFill/>
-        </a:ln>
-        <a:effectLst/>
-      </dsp:spPr>
-      <dsp:style>
-        <a:lnRef idx="0">
-          <a:scrgbClr r="0" g="0" b="0"/>
-        </a:lnRef>
-        <a:fillRef idx="1">
-          <a:scrgbClr r="0" g="0" b="0"/>
-        </a:fillRef>
-        <a:effectRef idx="0">
-          <a:scrgbClr r="0" g="0" b="0"/>
-        </a:effectRef>
-        <a:fontRef idx="minor"/>
-      </dsp:style>
-    </dsp:sp>
-    <dsp:sp modelId="{116A1B8A-3570-4AF8-BEF2-D24E956F0F97}">
-      <dsp:nvSpPr>
-        <dsp:cNvPr id="0" name=""/>
-        <dsp:cNvSpPr/>
-      </dsp:nvSpPr>
-      <dsp:spPr>
-        <a:xfrm>
-          <a:off x="281355" y="2538895"/>
-          <a:ext cx="511556" cy="511556"/>
-        </a:xfrm>
-        <a:prstGeom prst="rect">
-          <a:avLst/>
-        </a:prstGeom>
-        <a:blipFill>
-          <a:blip xmlns:r="http://schemas.openxmlformats.org/officeDocument/2006/relationships" r:embed="rId5">
-            <a:extLst>
-              <a:ext uri="{28A0092B-C50C-407E-A947-70E740481C1C}">
-                <a14:useLocalDpi xmlns:a14="http://schemas.microsoft.com/office/drawing/2010/main" val="0"/>
-              </a:ext>
-              <a:ext uri="{96DAC541-7B7A-43D3-8B79-37D633B846F1}">
-                <asvg:svgBlip xmlns:asvg="http://schemas.microsoft.com/office/drawing/2016/SVG/main" r:embed="rId6"/>
-              </a:ext>
-            </a:extLst>
-          </a:blip>
-          <a:stretch>
-            <a:fillRect/>
-          </a:stretch>
-        </a:blipFill>
-        <a:ln w="19050" cap="flat" cmpd="sng" algn="ctr">
-          <a:noFill/>
-          <a:prstDash val="solid"/>
-          <a:miter lim="800000"/>
-        </a:ln>
-        <a:effectLst/>
-      </dsp:spPr>
-      <dsp:style>
-        <a:lnRef idx="2">
-          <a:scrgbClr r="0" g="0" b="0"/>
-        </a:lnRef>
-        <a:fillRef idx="1">
-          <a:scrgbClr r="0" g="0" b="0"/>
-        </a:fillRef>
-        <a:effectRef idx="0">
-          <a:scrgbClr r="0" g="0" b="0"/>
-        </a:effectRef>
-        <a:fontRef idx="minor">
-          <a:schemeClr val="lt1"/>
-        </a:fontRef>
-      </dsp:style>
-    </dsp:sp>
-    <dsp:sp modelId="{CA1937E6-A1BC-4D71-9E9E-9F3F58AFC04E}">
-      <dsp:nvSpPr>
-        <dsp:cNvPr id="0" name=""/>
-        <dsp:cNvSpPr/>
-      </dsp:nvSpPr>
-      <dsp:spPr>
-        <a:xfrm>
-          <a:off x="1074268" y="2329622"/>
-          <a:ext cx="5170996" cy="930102"/>
-        </a:xfrm>
-        <a:prstGeom prst="rect">
-          <a:avLst/>
-        </a:prstGeom>
-        <a:noFill/>
-        <a:ln>
-          <a:noFill/>
-        </a:ln>
-        <a:effectLst/>
-      </dsp:spPr>
-      <dsp:style>
-        <a:lnRef idx="0">
-          <a:scrgbClr r="0" g="0" b="0"/>
-        </a:lnRef>
-        <a:fillRef idx="0">
-          <a:scrgbClr r="0" g="0" b="0"/>
-        </a:fillRef>
-        <a:effectRef idx="0">
-          <a:scrgbClr r="0" g="0" b="0"/>
-        </a:effectRef>
-        <a:fontRef idx="minor"/>
-      </dsp:style>
-      <dsp:txBody>
-        <a:bodyPr spcFirstLastPara="0" vert="horz" wrap="square" lIns="98436" tIns="98436" rIns="98436" bIns="98436" numCol="1" spcCol="1270" anchor="ctr" anchorCtr="0">
-          <a:noAutofit/>
-        </a:bodyPr>
-        <a:lstStyle/>
-        <a:p>
-          <a:pPr marL="0" lvl="0" indent="0" algn="l" defTabSz="844550">
-            <a:lnSpc>
-              <a:spcPct val="90000"/>
-            </a:lnSpc>
-            <a:spcBef>
-              <a:spcPct val="0"/>
-            </a:spcBef>
-            <a:spcAft>
-              <a:spcPct val="35000"/>
-            </a:spcAft>
-            <a:buNone/>
-          </a:pPr>
-          <a:r>
-            <a:rPr lang="en-US" sz="1900" kern="1200"/>
-            <a:t>Theoretical Analysis (web architecture, geospatial, routing) </a:t>
-          </a:r>
-        </a:p>
-      </dsp:txBody>
-      <dsp:txXfrm>
-        <a:off x="1074268" y="2329622"/>
-        <a:ext cx="5170996" cy="930102"/>
-      </dsp:txXfrm>
-    </dsp:sp>
-    <dsp:sp modelId="{2B17AC4C-DCDC-4270-8B05-A3D432CED932}">
-      <dsp:nvSpPr>
-        <dsp:cNvPr id="0" name=""/>
-        <dsp:cNvSpPr/>
-      </dsp:nvSpPr>
-      <dsp:spPr>
-        <a:xfrm>
-          <a:off x="0" y="3492250"/>
-          <a:ext cx="6245265" cy="930102"/>
-        </a:xfrm>
-        <a:prstGeom prst="roundRect">
-          <a:avLst>
-            <a:gd name="adj" fmla="val 10000"/>
-          </a:avLst>
-        </a:prstGeom>
-        <a:solidFill>
-          <a:schemeClr val="bg1">
-            <a:lumMod val="95000"/>
-            <a:hueOff val="0"/>
-            <a:satOff val="0"/>
-            <a:lumOff val="0"/>
-            <a:alphaOff val="0"/>
-          </a:schemeClr>
-        </a:solidFill>
-        <a:ln>
-          <a:noFill/>
-        </a:ln>
-        <a:effectLst/>
-      </dsp:spPr>
-      <dsp:style>
-        <a:lnRef idx="0">
-          <a:scrgbClr r="0" g="0" b="0"/>
-        </a:lnRef>
-        <a:fillRef idx="1">
-          <a:scrgbClr r="0" g="0" b="0"/>
-        </a:fillRef>
-        <a:effectRef idx="0">
-          <a:scrgbClr r="0" g="0" b="0"/>
-        </a:effectRef>
-        <a:fontRef idx="minor"/>
-      </dsp:style>
-    </dsp:sp>
-    <dsp:sp modelId="{03F17E6B-659E-438F-8E62-0D803B9BBDF6}">
-      <dsp:nvSpPr>
-        <dsp:cNvPr id="0" name=""/>
-        <dsp:cNvSpPr/>
-      </dsp:nvSpPr>
-      <dsp:spPr>
-        <a:xfrm>
-          <a:off x="281355" y="3701523"/>
-          <a:ext cx="511556" cy="511556"/>
-        </a:xfrm>
-        <a:prstGeom prst="rect">
-          <a:avLst/>
-        </a:prstGeom>
-        <a:blipFill>
-          <a:blip xmlns:r="http://schemas.openxmlformats.org/officeDocument/2006/relationships" r:embed="rId7">
-            <a:extLst>
-              <a:ext uri="{28A0092B-C50C-407E-A947-70E740481C1C}">
-                <a14:useLocalDpi xmlns:a14="http://schemas.microsoft.com/office/drawing/2010/main" val="0"/>
-              </a:ext>
-              <a:ext uri="{96DAC541-7B7A-43D3-8B79-37D633B846F1}">
-                <asvg:svgBlip xmlns:asvg="http://schemas.microsoft.com/office/drawing/2016/SVG/main" r:embed="rId8"/>
-              </a:ext>
-            </a:extLst>
-          </a:blip>
-          <a:stretch>
-            <a:fillRect/>
-          </a:stretch>
-        </a:blipFill>
-        <a:ln w="19050" cap="flat" cmpd="sng" algn="ctr">
-          <a:noFill/>
-          <a:prstDash val="solid"/>
-          <a:miter lim="800000"/>
-        </a:ln>
-        <a:effectLst/>
-      </dsp:spPr>
-      <dsp:style>
-        <a:lnRef idx="2">
-          <a:scrgbClr r="0" g="0" b="0"/>
-        </a:lnRef>
-        <a:fillRef idx="1">
-          <a:scrgbClr r="0" g="0" b="0"/>
-        </a:fillRef>
-        <a:effectRef idx="0">
-          <a:scrgbClr r="0" g="0" b="0"/>
-        </a:effectRef>
-        <a:fontRef idx="minor">
-          <a:schemeClr val="lt1"/>
-        </a:fontRef>
-      </dsp:style>
-    </dsp:sp>
-    <dsp:sp modelId="{ADA7763D-D93E-4B46-AED0-E0B90465EDD4}">
-      <dsp:nvSpPr>
-        <dsp:cNvPr id="0" name=""/>
-        <dsp:cNvSpPr/>
-      </dsp:nvSpPr>
-      <dsp:spPr>
-        <a:xfrm>
-          <a:off x="1074268" y="3492250"/>
-          <a:ext cx="5170996" cy="930102"/>
-        </a:xfrm>
-        <a:prstGeom prst="rect">
-          <a:avLst/>
-        </a:prstGeom>
-        <a:noFill/>
-        <a:ln>
-          <a:noFill/>
-        </a:ln>
-        <a:effectLst/>
-      </dsp:spPr>
-      <dsp:style>
-        <a:lnRef idx="0">
-          <a:scrgbClr r="0" g="0" b="0"/>
-        </a:lnRef>
-        <a:fillRef idx="0">
-          <a:scrgbClr r="0" g="0" b="0"/>
-        </a:fillRef>
-        <a:effectRef idx="0">
-          <a:scrgbClr r="0" g="0" b="0"/>
-        </a:effectRef>
-        <a:fontRef idx="minor"/>
-      </dsp:style>
-      <dsp:txBody>
-        <a:bodyPr spcFirstLastPara="0" vert="horz" wrap="square" lIns="98436" tIns="98436" rIns="98436" bIns="98436" numCol="1" spcCol="1270" anchor="ctr" anchorCtr="0">
-          <a:noAutofit/>
-        </a:bodyPr>
-        <a:lstStyle/>
-        <a:p>
-          <a:pPr marL="0" lvl="0" indent="0" algn="l" defTabSz="844550">
-            <a:lnSpc>
-              <a:spcPct val="90000"/>
-            </a:lnSpc>
-            <a:spcBef>
-              <a:spcPct val="0"/>
-            </a:spcBef>
-            <a:spcAft>
-              <a:spcPct val="35000"/>
-            </a:spcAft>
-            <a:buNone/>
-          </a:pPr>
-          <a:r>
-            <a:rPr lang="en-US" sz="1900" kern="1200"/>
-            <a:t>Geospatial Analysis </a:t>
-          </a:r>
-        </a:p>
-      </dsp:txBody>
-      <dsp:txXfrm>
-        <a:off x="1074268" y="3492250"/>
-        <a:ext cx="5170996" cy="930102"/>
-      </dsp:txXfrm>
-    </dsp:sp>
-    <dsp:sp modelId="{63511EE0-C3EF-4439-89F2-7B321D82DC51}">
-      <dsp:nvSpPr>
-        <dsp:cNvPr id="0" name=""/>
-        <dsp:cNvSpPr/>
-      </dsp:nvSpPr>
-      <dsp:spPr>
-        <a:xfrm>
-          <a:off x="0" y="4654878"/>
-          <a:ext cx="6245265" cy="930102"/>
-        </a:xfrm>
-        <a:prstGeom prst="roundRect">
-          <a:avLst>
-            <a:gd name="adj" fmla="val 10000"/>
-          </a:avLst>
-        </a:prstGeom>
-        <a:solidFill>
-          <a:schemeClr val="bg1">
-            <a:lumMod val="95000"/>
-            <a:hueOff val="0"/>
-            <a:satOff val="0"/>
-            <a:lumOff val="0"/>
-            <a:alphaOff val="0"/>
-          </a:schemeClr>
-        </a:solidFill>
-        <a:ln>
-          <a:noFill/>
-        </a:ln>
-        <a:effectLst/>
-      </dsp:spPr>
-      <dsp:style>
-        <a:lnRef idx="0">
-          <a:scrgbClr r="0" g="0" b="0"/>
-        </a:lnRef>
-        <a:fillRef idx="1">
-          <a:scrgbClr r="0" g="0" b="0"/>
-        </a:fillRef>
-        <a:effectRef idx="0">
-          <a:scrgbClr r="0" g="0" b="0"/>
-        </a:effectRef>
-        <a:fontRef idx="minor"/>
-      </dsp:style>
-    </dsp:sp>
-    <dsp:sp modelId="{79818F71-0FF1-435D-816A-D055982FE395}">
-      <dsp:nvSpPr>
-        <dsp:cNvPr id="0" name=""/>
-        <dsp:cNvSpPr/>
-      </dsp:nvSpPr>
-      <dsp:spPr>
-        <a:xfrm>
-          <a:off x="281355" y="4864151"/>
-          <a:ext cx="511556" cy="511556"/>
-        </a:xfrm>
-        <a:prstGeom prst="rect">
-          <a:avLst/>
-        </a:prstGeom>
-        <a:blipFill>
-          <a:blip xmlns:r="http://schemas.openxmlformats.org/officeDocument/2006/relationships" r:embed="rId9">
-            <a:extLst>
-              <a:ext uri="{28A0092B-C50C-407E-A947-70E740481C1C}">
-                <a14:useLocalDpi xmlns:a14="http://schemas.microsoft.com/office/drawing/2010/main" val="0"/>
-              </a:ext>
-              <a:ext uri="{96DAC541-7B7A-43D3-8B79-37D633B846F1}">
-                <asvg:svgBlip xmlns:asvg="http://schemas.microsoft.com/office/drawing/2016/SVG/main" r:embed="rId10"/>
-              </a:ext>
-            </a:extLst>
-          </a:blip>
-          <a:stretch>
-            <a:fillRect/>
-          </a:stretch>
-        </a:blipFill>
-        <a:ln w="19050" cap="flat" cmpd="sng" algn="ctr">
-          <a:noFill/>
-          <a:prstDash val="solid"/>
-          <a:miter lim="800000"/>
-        </a:ln>
-        <a:effectLst/>
-      </dsp:spPr>
-      <dsp:style>
-        <a:lnRef idx="2">
-          <a:scrgbClr r="0" g="0" b="0"/>
-        </a:lnRef>
-        <a:fillRef idx="1">
-          <a:scrgbClr r="0" g="0" b="0"/>
-        </a:fillRef>
-        <a:effectRef idx="0">
-          <a:scrgbClr r="0" g="0" b="0"/>
-        </a:effectRef>
-        <a:fontRef idx="minor">
-          <a:schemeClr val="lt1"/>
-        </a:fontRef>
-      </dsp:style>
-    </dsp:sp>
-    <dsp:sp modelId="{7DD0D187-AB93-4DCC-A767-DE78E72F8510}">
-      <dsp:nvSpPr>
-        <dsp:cNvPr id="0" name=""/>
-        <dsp:cNvSpPr/>
-      </dsp:nvSpPr>
-      <dsp:spPr>
-        <a:xfrm>
-          <a:off x="1074268" y="4654878"/>
-          <a:ext cx="5170996" cy="930102"/>
-        </a:xfrm>
-        <a:prstGeom prst="rect">
-          <a:avLst/>
-        </a:prstGeom>
-        <a:noFill/>
-        <a:ln>
-          <a:noFill/>
-        </a:ln>
-        <a:effectLst/>
-      </dsp:spPr>
-      <dsp:style>
-        <a:lnRef idx="0">
-          <a:scrgbClr r="0" g="0" b="0"/>
-        </a:lnRef>
-        <a:fillRef idx="0">
-          <a:scrgbClr r="0" g="0" b="0"/>
-        </a:fillRef>
-        <a:effectRef idx="0">
-          <a:scrgbClr r="0" g="0" b="0"/>
-        </a:effectRef>
-        <a:fontRef idx="minor"/>
-      </dsp:style>
-      <dsp:txBody>
-        <a:bodyPr spcFirstLastPara="0" vert="horz" wrap="square" lIns="98436" tIns="98436" rIns="98436" bIns="98436" numCol="1" spcCol="1270" anchor="ctr" anchorCtr="0">
-          <a:noAutofit/>
-        </a:bodyPr>
-        <a:lstStyle/>
-        <a:p>
-          <a:pPr marL="0" lvl="0" indent="0" algn="l" defTabSz="844550">
-            <a:lnSpc>
-              <a:spcPct val="90000"/>
-            </a:lnSpc>
-            <a:spcBef>
-              <a:spcPct val="0"/>
-            </a:spcBef>
-            <a:spcAft>
-              <a:spcPct val="35000"/>
-            </a:spcAft>
-            <a:buNone/>
-          </a:pPr>
-          <a:r>
-            <a:rPr lang="en-US" sz="1900" kern="1200"/>
-            <a:t>Testing (unit, integration, usability considerations)</a:t>
-          </a:r>
-        </a:p>
-      </dsp:txBody>
-      <dsp:txXfrm>
-        <a:off x="1074268" y="4654878"/>
-        <a:ext cx="5170996" cy="930102"/>
-      </dsp:txXfrm>
-    </dsp:sp>
-  </dsp:spTree>
-</dsp:drawing>
-</file>
-
-<file path=ppt/diagrams/layout1.xml><?xml version="1.0" encoding="utf-8"?>
-<dgm:layoutDef xmlns:dgm="http://schemas.openxmlformats.org/drawingml/2006/diagram" xmlns:a="http://schemas.openxmlformats.org/drawingml/2006/main" uniqueId="urn:microsoft.com/office/officeart/2018/2/layout/IconVerticalSolidList">
-  <dgm:title val="Icon Vertical Solid List"/>
-  <dgm:desc val="Use to show a series of visuals from top to bottom with Level 1 or Level 1 and Level 2 text grouped in a shape. Works best with icons or small pictures with lengthier descriptions."/>
-  <dgm:catLst>
-    <dgm:cat type="icon" pri="500"/>
-  </dgm:catLst>
-  <dgm:sampData useDef="1">
-    <dgm:dataModel>
-      <dgm:ptLst/>
-      <dgm:bg/>
-      <dgm:whole/>
-    </dgm:dataModel>
-  </dgm:sampData>
-  <dgm:styleData useDef="1">
-    <dgm:dataModel>
-      <dgm:ptLst/>
-      <dgm:bg/>
-      <dgm:whole/>
-    </dgm:dataModel>
-  </dgm:styleData>
-  <dgm:clrData useDef="1">
-    <dgm:dataModel>
-      <dgm:ptLst/>
-      <dgm:bg/>
-      <dgm:whole/>
-    </dgm:dataModel>
-  </dgm:clrData>
-  <dgm:layoutNode name="root">
-    <dgm:varLst>
-      <dgm:dir/>
-      <dgm:resizeHandles val="exact"/>
-    </dgm:varLst>
-    <dgm:choose name="Name0">
-      <dgm:if name="Name1" axis="self" func="var" arg="dir" op="equ" val="norm">
-        <dgm:alg type="lin">
-          <dgm:param type="linDir" val="fromT"/>
-          <dgm:param type="nodeHorzAlign" val="l"/>
-        </dgm:alg>
-      </dgm:if>
-      <dgm:else name="Name2">
-        <dgm:alg type="lin">
-          <dgm:param type="linDir" val="fromT"/>
-          <dgm:param type="nodeHorzAlign" val="r"/>
-        </dgm:alg>
-      </dgm:else>
-    </dgm:choose>
-    <dgm:shape xmlns:r="http://schemas.openxmlformats.org/officeDocument/2006/relationships" r:blip="">
-      <dgm:adjLst/>
-    </dgm:shape>
-    <dgm:presOf/>
-    <dgm:choose name="Name3">
-      <dgm:if name="Name4" axis="ch" ptType="node" func="cnt" op="lte" val="3">
-        <dgm:constrLst>
-          <dgm:constr type="h" for="ch" forName="compNode" refType="h" fact="0.3"/>
-          <dgm:constr type="w" for="ch" forName="compNode" refType="w"/>
-          <dgm:constr type="h" for="ch" forName="sibTrans" refType="h" refFor="ch" refForName="compNode" fact="0.25"/>
-          <dgm:constr type="primFontSz" for="des" forName="parTx" val="25"/>
-          <dgm:constr type="primFontSz" for="des" forName="desTx" refType="primFontSz" refFor="des" refForName="parTx" op="lte" fact="0.75"/>
-          <dgm:constr type="h" for="des" forName="compNode" op="equ"/>
-          <dgm:constr type="h" for="des" forName="bgRect" op="equ"/>
-          <dgm:constr type="h" for="des" forName="iconRect" op="equ"/>
-          <dgm:constr type="w" for="des" forName="iconRect" op="equ"/>
-          <dgm:constr type="h" for="des" forName="spaceRect" op="equ"/>
-          <dgm:constr type="h" for="des" forName="parTx" op="equ"/>
-          <dgm:constr type="h" for="des" forName="desTx" op="equ"/>
-        </dgm:constrLst>
-      </dgm:if>
-      <dgm:if name="Name5" axis="ch" ptType="node" func="cnt" op="lte" val="4">
-        <dgm:constrLst>
-          <dgm:constr type="h" for="ch" forName="compNode" refType="h" fact="0.3"/>
-          <dgm:constr type="w" for="ch" forName="compNode" refType="w"/>
-          <dgm:constr type="h" for="ch" forName="sibTrans" refType="h" refFor="ch" refForName="compNode" fact="0.25"/>
-          <dgm:constr type="primFontSz" for="des" forName="parTx" val="22"/>
-          <dgm:constr type="primFontSz" for="des" forName="desTx" refType="primFontSz" refFor="des" refForName="parTx" op="lte" fact="0.75"/>
-          <dgm:constr type="h" for="des" forName="compNode" op="equ"/>
-          <dgm:constr type="h" for="des" forName="bgRect" op="equ"/>
-          <dgm:constr type="h" for="des" forName="iconRect" op="equ"/>
-          <dgm:constr type="w" for="des" forName="iconRect" op="equ"/>
-          <dgm:constr type="h" for="des" forName="spaceRect" op="equ"/>
-          <dgm:constr type="h" for="des" forName="parTx" op="equ"/>
-          <dgm:constr type="h" for="des" forName="desTx" op="equ"/>
-        </dgm:constrLst>
-      </dgm:if>
-      <dgm:if name="Name6" axis="ch" ptType="node" func="cnt" op="lte" val="6">
-        <dgm:constrLst>
-          <dgm:constr type="h" for="ch" forName="compNode" refType="h" fact="0.3"/>
-          <dgm:constr type="w" for="ch" forName="compNode" refType="w"/>
-          <dgm:constr type="h" for="ch" forName="sibTrans" refType="h" refFor="ch" refForName="compNode" fact="0.25"/>
-          <dgm:constr type="primFontSz" for="des" forName="parTx" val="19"/>
-          <dgm:constr type="primFontSz" for="des" forName="desTx" refType="primFontSz" refFor="des" refForName="parTx" op="lte" fact="0.75"/>
-          <dgm:constr type="h" for="des" forName="compNode" op="equ"/>
-          <dgm:constr type="h" for="des" forName="bgRect" op="equ"/>
-          <dgm:constr type="h" for="des" forName="iconRect" op="equ"/>
-          <dgm:constr type="w" for="des" forName="iconRect" op="equ"/>
-          <dgm:constr type="h" for="des" forName="spaceRect" op="equ"/>
-          <dgm:constr type="h" for="des" forName="parTx" op="equ"/>
-          <dgm:constr type="h" for="des" forName="desTx" op="equ"/>
-        </dgm:constrLst>
-      </dgm:if>
-      <dgm:else name="Name7">
-        <dgm:constrLst>
-          <dgm:constr type="h" for="ch" forName="compNode" refType="h" fact="0.3"/>
-          <dgm:constr type="w" for="ch" forName="compNode" refType="w"/>
-          <dgm:constr type="h" for="ch" forName="sibTrans" refType="h" refFor="ch" refForName="compNode" fact="0.25"/>
-          <dgm:constr type="primFontSz" for="des" forName="parTx" val="16"/>
-          <dgm:constr type="primFontSz" for="des" forName="desTx" refType="primFontSz" refFor="des" refForName="parTx" op="lte" fact="0.75"/>
-          <dgm:constr type="h" for="des" forName="compNode" op="equ"/>
-          <dgm:constr type="h" for="des" forName="bgRect" op="equ"/>
-          <dgm:constr type="h" for="des" forName="iconRect" op="equ"/>
-          <dgm:constr type="w" for="des" forName="iconRect" op="equ"/>
-          <dgm:constr type="h" for="des" forName="spaceRect" op="equ"/>
-          <dgm:constr type="h" for="des" forName="parTx" op="equ"/>
-          <dgm:constr type="h" for="des" forName="desTx" op="equ"/>
-        </dgm:constrLst>
-      </dgm:else>
-    </dgm:choose>
-    <dgm:ruleLst>
-      <dgm:rule type="h" for="ch" forName="compNode" val="0" fact="NaN" max="NaN"/>
-    </dgm:ruleLst>
-    <dgm:forEach name="Name8" axis="ch" ptType="node">
-      <dgm:layoutNode name="compNode">
-        <dgm:alg type="composite"/>
-        <dgm:shape xmlns:r="http://schemas.openxmlformats.org/officeDocument/2006/relationships" r:blip="">
-          <dgm:adjLst/>
-        </dgm:shape>
-        <dgm:presOf axis="self"/>
-        <dgm:choose name="Name9">
-          <dgm:if name="Name10" axis="ch" ptType="node" func="cnt" op="gte" val="1">
-            <dgm:constrLst>
-              <dgm:constr type="w" for="ch" forName="bgRect" refType="w"/>
-              <dgm:constr type="h" for="ch" forName="bgRect" refType="h"/>
-              <dgm:constr type="l" for="ch" forName="bgRect"/>
-              <dgm:constr type="t" for="ch" forName="bgRect"/>
-              <dgm:constr type="h" for="ch" forName="iconRect" refType="h" fact="0.55"/>
-              <dgm:constr type="w" for="ch" forName="iconRect" refType="h" refFor="ch" refForName="iconRect"/>
-              <dgm:constr type="l" for="ch" forName="iconRect" refType="h" refFor="ch" refForName="iconRect" fact="0.55"/>
-              <dgm:constr type="ctrY" for="ch" forName="iconRect" refType="ctrY" refFor="ch" refForName="bgRect"/>
-              <dgm:constr type="w" for="ch" forName="spaceRect" refType="l" refFor="ch" refForName="iconRect"/>
-              <dgm:constr type="h" for="ch" forName="spaceRect" refType="h"/>
-              <dgm:constr type="l" for="ch" forName="spaceRect" refType="r" refFor="ch" refForName="iconRect"/>
-              <dgm:constr type="t" for="ch" forName="spaceRect"/>
-              <dgm:constr type="w" for="ch" forName="parTx" refType="w" fact="0.45"/>
-              <dgm:constr type="h" for="ch" forName="parTx" refType="h"/>
-              <dgm:constr type="l" for="ch" forName="parTx" refType="r" refFor="ch" refForName="spaceRect"/>
-              <dgm:constr type="t" for="ch" forName="parTx"/>
-              <dgm:constr type="h" for="ch" forName="desTx" refType="h"/>
-              <dgm:constr type="l" for="ch" forName="desTx" refType="r" refFor="ch" refForName="parTx"/>
-              <dgm:constr type="t" for="ch" forName="desTx"/>
-            </dgm:constrLst>
-          </dgm:if>
-          <dgm:else name="Name11">
-            <dgm:constrLst>
-              <dgm:constr type="w" for="ch" forName="bgRect" refType="w"/>
-              <dgm:constr type="h" for="ch" forName="bgRect" refType="h"/>
-              <dgm:constr type="l" for="ch" forName="bgRect"/>
-              <dgm:constr type="t" for="ch" forName="bgRect"/>
-              <dgm:constr type="h" for="ch" forName="iconRect" refType="h" fact="0.55"/>
-              <dgm:constr type="w" for="ch" forName="iconRect" refType="h" refFor="ch" refForName="iconRect"/>
-              <dgm:constr type="l" for="ch" forName="iconRect" refType="h" refFor="ch" refForName="iconRect" fact="0.55"/>
-              <dgm:constr type="ctrY" for="ch" forName="iconRect" refType="ctrY" refFor="ch" refForName="bgRect"/>
-              <dgm:constr type="w" for="ch" forName="spaceRect" refType="l" refFor="ch" refForName="iconRect"/>
-              <dgm:constr type="h" for="ch" forName="spaceRect" refType="h"/>
-              <dgm:constr type="l" for="ch" forName="spaceRect" refType="r" refFor="ch" refForName="iconRect"/>
-              <dgm:constr type="t" for="ch" forName="spaceRect"/>
-              <dgm:constr type="h" for="ch" forName="parTx" refType="h"/>
-              <dgm:constr type="l" for="ch" forName="parTx" refType="r" refFor="ch" refForName="spaceRect"/>
-              <dgm:constr type="t" for="ch" forName="parTx"/>
-            </dgm:constrLst>
-          </dgm:else>
-        </dgm:choose>
-        <dgm:ruleLst>
-          <dgm:rule type="h" val="INF" fact="NaN" max="NaN"/>
-        </dgm:ruleLst>
-        <dgm:layoutNode name="bgRect" styleLbl="bgShp">
-          <dgm:alg type="sp"/>
-          <dgm:shape xmlns:r="http://schemas.openxmlformats.org/officeDocument/2006/relationships" type="roundRect" r:blip="">
-            <dgm:adjLst>
-              <dgm:adj idx="1" val="0.1"/>
-            </dgm:adjLst>
-          </dgm:shape>
-          <dgm:presOf/>
-          <dgm:constrLst/>
-          <dgm:ruleLst/>
-        </dgm:layoutNode>
-        <dgm:layoutNode name="iconRect" styleLbl="node1">
-          <dgm:alg type="sp"/>
-          <dgm:shape xmlns:r="http://schemas.openxmlformats.org/officeDocument/2006/relationships" type="rect" r:blip="" blipPhldr="1">
-            <dgm:adjLst/>
-          </dgm:shape>
-          <dgm:presOf/>
-          <dgm:constrLst/>
-          <dgm:ruleLst/>
-        </dgm:layoutNode>
-        <dgm:layoutNode name="spaceRect">
-          <dgm:alg type="sp"/>
-          <dgm:shape xmlns:r="http://schemas.openxmlformats.org/officeDocument/2006/relationships" r:blip="">
-            <dgm:adjLst/>
-          </dgm:shape>
-          <dgm:presOf/>
-          <dgm:constrLst/>
-          <dgm:ruleLst/>
-        </dgm:layoutNode>
-        <dgm:layoutNode name="parTx" styleLbl="revTx">
-          <dgm:varLst>
-            <dgm:chMax val="0"/>
-            <dgm:chPref val="0"/>
-          </dgm:varLst>
-          <dgm:alg type="tx">
-            <dgm:param type="txAnchorVert" val="mid"/>
-            <dgm:param type="parTxLTRAlign" val="l"/>
-            <dgm:param type="shpTxLTRAlignCh" val="l"/>
-            <dgm:param type="parTxRTLAlign" val="r"/>
-            <dgm:param type="shpTxRTLAlignCh" val="r"/>
-          </dgm:alg>
-          <dgm:shape xmlns:r="http://schemas.openxmlformats.org/officeDocument/2006/relationships" type="rect" r:blip="">
-            <dgm:adjLst/>
-          </dgm:shape>
-          <dgm:presOf axis="self" ptType="node"/>
-          <dgm:constrLst>
-            <dgm:constr type="lMarg" refType="h" fact="0.3"/>
-            <dgm:constr type="rMarg" refType="h" fact="0.3"/>
-            <dgm:constr type="tMarg" refType="h" fact="0.3"/>
-            <dgm:constr type="bMarg" refType="h" fact="0.3"/>
-          </dgm:constrLst>
-          <dgm:ruleLst>
-            <dgm:rule type="primFontSz" val="14" fact="NaN" max="NaN"/>
-            <dgm:rule type="h" val="INF" fact="NaN" max="NaN"/>
-          </dgm:ruleLst>
-        </dgm:layoutNode>
-        <dgm:choose name="Name12">
-          <dgm:if name="Name13" axis="ch" ptType="node" func="cnt" op="gte" val="1">
-            <dgm:layoutNode name="desTx" styleLbl="revTx">
-              <dgm:varLst/>
-              <dgm:alg type="tx">
-                <dgm:param type="txAnchorVertCh" val="mid"/>
-                <dgm:param type="parTxLTRAlign" val="l"/>
-                <dgm:param type="shpTxLTRAlignCh" val="l"/>
-                <dgm:param type="parTxRTLAlign" val="r"/>
-                <dgm:param type="shpTxRTLAlignCh" val="r"/>
-                <dgm:param type="stBulletLvl" val="0"/>
-              </dgm:alg>
-              <dgm:shape xmlns:r="http://schemas.openxmlformats.org/officeDocument/2006/relationships" type="rect" r:blip="">
-                <dgm:adjLst/>
-              </dgm:shape>
-              <dgm:presOf axis="des" ptType="node"/>
-              <dgm:constrLst>
-                <dgm:constr type="primFontSz" val="18"/>
-                <dgm:constr type="secFontSz" refType="primFontSz"/>
-                <dgm:constr type="lMarg" refType="h" fact="0.3"/>
-                <dgm:constr type="rMarg" refType="h" fact="0.3"/>
-                <dgm:constr type="tMarg" refType="h" fact="0.3"/>
-                <dgm:constr type="bMarg" refType="h" fact="0.3"/>
-              </dgm:constrLst>
-              <dgm:ruleLst>
-                <dgm:rule type="primFontSz" val="11" fact="NaN" max="NaN"/>
-              </dgm:ruleLst>
-            </dgm:layoutNode>
-          </dgm:if>
-          <dgm:else name="Name14"/>
-        </dgm:choose>
-      </dgm:layoutNode>
-      <dgm:forEach name="Name15" axis="followSib" ptType="sibTrans" cnt="1">
-        <dgm:layoutNode name="sibTrans">
-          <dgm:alg type="sp"/>
-          <dgm:shape xmlns:r="http://schemas.openxmlformats.org/officeDocument/2006/relationships" r:blip="">
-            <dgm:adjLst/>
-          </dgm:shape>
-          <dgm:presOf axis="self"/>
-          <dgm:constrLst/>
-          <dgm:ruleLst/>
-        </dgm:layoutNode>
-      </dgm:forEach>
-    </dgm:forEach>
-  </dgm:layoutNode>
-  <dgm:extLst>
-    <a:ext uri="{68A01E43-0DF5-4B5B-8FA6-DAF915123BFB}">
-      <dgm1612:lstStyle xmlns:dgm1612="http://schemas.microsoft.com/office/drawing/2016/12/diagram">
-        <a:lvl1pPr>
-          <a:lnSpc>
-            <a:spcPct val="100000"/>
-          </a:lnSpc>
-        </a:lvl1pPr>
-        <a:lvl2pPr>
-          <a:lnSpc>
-            <a:spcPct val="100000"/>
-          </a:lnSpc>
-        </a:lvl2pPr>
-      </dgm1612:lstStyle>
-    </a:ext>
-  </dgm:extLst>
-</dgm:layoutDef>
-</file>
-
-<file path=ppt/diagrams/quickStyle1.xml><?xml version="1.0" encoding="utf-8"?>
-<dgm:styleDef xmlns:dgm="http://schemas.openxmlformats.org/drawingml/2006/diagram" xmlns:a="http://schemas.openxmlformats.org/drawingml/2006/main" uniqueId="urn:microsoft.com/office/officeart/2005/8/quickstyle/simple1">
-  <dgm:title val=""/>
-  <dgm:desc val=""/>
-  <dgm:catLst>
-    <dgm:cat type="simple" pri="10100"/>
-  </dgm:catLst>
-  <dgm:scene3d>
-    <a:camera prst="orthographicFront"/>
-    <a:lightRig rig="threePt" dir="t"/>
-  </dgm:scene3d>
-  <dgm:styleLbl name="node0">
-    <dgm:scene3d>
-      <a:camera prst="orthographicFront"/>
-      <a:lightRig rig="threePt" dir="t"/>
-    </dgm:scene3d>
-    <dgm:sp3d/>
-    <dgm:txPr/>
-    <dgm:style>
-      <a:lnRef idx="2">
-        <a:scrgbClr r="0" g="0" b="0"/>
-      </a:lnRef>
-      <a:fillRef idx="1">
-        <a:scrgbClr r="0" g="0" b="0"/>
-      </a:fillRef>
-      <a:effectRef idx="0">
-        <a:scrgbClr r="0" g="0" b="0"/>
-      </a:effectRef>
-      <a:fontRef idx="minor">
-        <a:schemeClr val="lt1"/>
-      </a:fontRef>
-    </dgm:style>
-  </dgm:styleLbl>
-  <dgm:styleLbl name="lnNode1">
-    <dgm:scene3d>
-      <a:camera prst="orthographicFront"/>
-      <a:lightRig rig="threePt" dir="t"/>
-    </dgm:scene3d>
-    <dgm:sp3d/>
-    <dgm:txPr/>
-    <dgm:style>
-      <a:lnRef idx="2">
-        <a:scrgbClr r="0" g="0" b="0"/>
-      </a:lnRef>
-      <a:fillRef idx="1">
-        <a:scrgbClr r="0" g="0" b="0"/>
-      </a:fillRef>
-      <a:effectRef idx="0">
-        <a:scrgbClr r="0" g="0" b="0"/>
-      </a:effectRef>
-      <a:fontRef idx="minor">
-        <a:schemeClr val="lt1"/>
-      </a:fontRef>
-    </dgm:style>
-  </dgm:styleLbl>
-  <dgm:styleLbl name="vennNode1">
-    <dgm:scene3d>
-      <a:camera prst="orthographicFront"/>
-      <a:lightRig rig="threePt" dir="t"/>
-    </dgm:scene3d>
-    <dgm:sp3d/>
-    <dgm:txPr/>
-    <dgm:style>
-      <a:lnRef idx="2">
-        <a:scrgbClr r="0" g="0" b="0"/>
-      </a:lnRef>
-      <a:fillRef idx="1">
-        <a:scrgbClr r="0" g="0" b="0"/>
-      </a:fillRef>
-      <a:effectRef idx="0">
-        <a:scrgbClr r="0" g="0" b="0"/>
-      </a:effectRef>
-      <a:fontRef idx="minor">
-        <a:schemeClr val="tx1"/>
-      </a:fontRef>
-    </dgm:style>
-  </dgm:styleLbl>
-  <dgm:styleLbl name="alignNode1">
-    <dgm:scene3d>
-      <a:camera prst="orthographicFront"/>
-      <a:lightRig rig="threePt" dir="t"/>
-    </dgm:scene3d>
-    <dgm:sp3d/>
-    <dgm:txPr/>
-    <dgm:style>
-      <a:lnRef idx="2">
-        <a:scrgbClr r="0" g="0" b="0"/>
-      </a:lnRef>
-      <a:fillRef idx="1">
-        <a:scrgbClr r="0" g="0" b="0"/>
-      </a:fillRef>
-      <a:effectRef idx="0">
-        <a:scrgbClr r="0" g="0" b="0"/>
-      </a:effectRef>
-      <a:fontRef idx="minor">
-        <a:schemeClr val="lt1"/>
-      </a:fontRef>
-    </dgm:style>
-  </dgm:styleLbl>
-  <dgm:styleLbl name="node1">
-    <dgm:scene3d>
-      <a:camera prst="orthographicFront"/>
-      <a:lightRig rig="threePt" dir="t"/>
-    </dgm:scene3d>
-    <dgm:sp3d/>
-    <dgm:txPr/>
-    <dgm:style>
-      <a:lnRef idx="2">
-        <a:scrgbClr r="0" g="0" b="0"/>
-      </a:lnRef>
-      <a:fillRef idx="1">
-        <a:scrgbClr r="0" g="0" b="0"/>
-      </a:fillRef>
-      <a:effectRef idx="0">
-        <a:scrgbClr r="0" g="0" b="0"/>
-      </a:effectRef>
-      <a:fontRef idx="minor">
-        <a:schemeClr val="lt1"/>
-      </a:fontRef>
-    </dgm:style>
-  </dgm:styleLbl>
-  <dgm:styleLbl name="node2">
-    <dgm:scene3d>
-      <a:camera prst="orthographicFront"/>
-      <a:lightRig rig="threePt" dir="t"/>
-    </dgm:scene3d>
-    <dgm:sp3d/>
-    <dgm:txPr/>
-    <dgm:style>
-      <a:lnRef idx="2">
-        <a:scrgbClr r="0" g="0" b="0"/>
-      </a:lnRef>
-      <a:fillRef idx="1">
-        <a:scrgbClr r="0" g="0" b="0"/>
-      </a:fillRef>
-      <a:effectRef idx="0">
-        <a:scrgbClr r="0" g="0" b="0"/>
-      </a:effectRef>
-      <a:fontRef idx="minor">
-        <a:schemeClr val="lt1"/>
-      </a:fontRef>
-    </dgm:style>
-  </dgm:styleLbl>
-  <dgm:styleLbl name="node3">
-    <dgm:scene3d>
-      <a:camera prst="orthographicFront"/>
-      <a:lightRig rig="threePt" dir="t"/>
-    </dgm:scene3d>
-    <dgm:sp3d/>
-    <dgm:txPr/>
-    <dgm:style>
-      <a:lnRef idx="2">
-        <a:scrgbClr r="0" g="0" b="0"/>
-      </a:lnRef>
-      <a:fillRef idx="1">
-        <a:scrgbClr r="0" g="0" b="0"/>
-      </a:fillRef>
-      <a:effectRef idx="0">
-        <a:scrgbClr r="0" g="0" b="0"/>
-      </a:effectRef>
-      <a:fontRef idx="minor">
-        <a:schemeClr val="lt1"/>
-      </a:fontRef>
-    </dgm:style>
-  </dgm:styleLbl>
-  <dgm:styleLbl name="node4">
-    <dgm:scene3d>
-      <a:camera prst="orthographicFront"/>
-      <a:lightRig rig="threePt" dir="t"/>
-    </dgm:scene3d>
-    <dgm:sp3d/>
-    <dgm:txPr/>
-    <dgm:style>
-      <a:lnRef idx="2">
-        <a:scrgbClr r="0" g="0" b="0"/>
-      </a:lnRef>
-      <a:fillRef idx="1">
-        <a:scrgbClr r="0" g="0" b="0"/>
-      </a:fillRef>
-      <a:effectRef idx="0">
-        <a:scrgbClr r="0" g="0" b="0"/>
-      </a:effectRef>
-      <a:fontRef idx="minor">
-        <a:schemeClr val="lt1"/>
-      </a:fontRef>
-    </dgm:style>
-  </dgm:styleLbl>
-  <dgm:styleLbl name="fgImgPlace1">
-    <dgm:scene3d>
-      <a:camera prst="orthographicFront"/>
-      <a:lightRig rig="threePt" dir="t"/>
-    </dgm:scene3d>
-    <dgm:sp3d/>
-    <dgm:txPr/>
-    <dgm:style>
-      <a:lnRef idx="2">
-        <a:scrgbClr r="0" g="0" b="0"/>
-      </a:lnRef>
-      <a:fillRef idx="1">
-        <a:scrgbClr r="0" g="0" b="0"/>
-      </a:fillRef>
-      <a:effectRef idx="0">
-        <a:scrgbClr r="0" g="0" b="0"/>
-      </a:effectRef>
-      <a:fontRef idx="minor"/>
-    </dgm:style>
-  </dgm:styleLbl>
-  <dgm:styleLbl name="alignImgPlace1">
-    <dgm:scene3d>
-      <a:camera prst="orthographicFront"/>
-      <a:lightRig rig="threePt" dir="t"/>
-    </dgm:scene3d>
-    <dgm:sp3d/>
-    <dgm:txPr/>
-    <dgm:style>
-      <a:lnRef idx="2">
-        <a:scrgbClr r="0" g="0" b="0"/>
-      </a:lnRef>
-      <a:fillRef idx="1">
-        <a:scrgbClr r="0" g="0" b="0"/>
-      </a:fillRef>
-      <a:effectRef idx="0">
-        <a:scrgbClr r="0" g="0" b="0"/>
-      </a:effectRef>
-      <a:fontRef idx="minor"/>
-    </dgm:style>
-  </dgm:styleLbl>
-  <dgm:styleLbl name="bgImgPlace1">
-    <dgm:scene3d>
-      <a:camera prst="orthographicFront"/>
-      <a:lightRig rig="threePt" dir="t"/>
-    </dgm:scene3d>
-    <dgm:sp3d/>
-    <dgm:txPr/>
-    <dgm:style>
-      <a:lnRef idx="2">
-        <a:scrgbClr r="0" g="0" b="0"/>
-      </a:lnRef>
-      <a:fillRef idx="1">
-        <a:scrgbClr r="0" g="0" b="0"/>
-      </a:fillRef>
-      <a:effectRef idx="0">
-        <a:scrgbClr r="0" g="0" b="0"/>
-      </a:effectRef>
-      <a:fontRef idx="minor"/>
-    </dgm:style>
-  </dgm:styleLbl>
-  <dgm:styleLbl name="sibTrans2D1">
-    <dgm:scene3d>
-      <a:camera prst="orthographicFront"/>
-      <a:lightRig rig="threePt" dir="t"/>
-    </dgm:scene3d>
-    <dgm:sp3d/>
-    <dgm:txPr/>
-    <dgm:style>
-      <a:lnRef idx="0">
-        <a:scrgbClr r="0" g="0" b="0"/>
-      </a:lnRef>
-      <a:fillRef idx="1">
-        <a:scrgbClr r="0" g="0" b="0"/>
-      </a:fillRef>
-      <a:effectRef idx="0">
-        <a:scrgbClr r="0" g="0" b="0"/>
-      </a:effectRef>
-      <a:fontRef idx="minor">
-        <a:schemeClr val="lt1"/>
-      </a:fontRef>
-    </dgm:style>
-  </dgm:styleLbl>
-  <dgm:styleLbl name="fgSibTrans2D1">
-    <dgm:scene3d>
-      <a:camera prst="orthographicFront"/>
-      <a:lightRig rig="threePt" dir="t"/>
-    </dgm:scene3d>
-    <dgm:sp3d/>
-    <dgm:txPr/>
-    <dgm:style>
-      <a:lnRef idx="0">
-        <a:scrgbClr r="0" g="0" b="0"/>
-      </a:lnRef>
-      <a:fillRef idx="1">
-        <a:scrgbClr r="0" g="0" b="0"/>
-      </a:fillRef>
-      <a:effectRef idx="0">
-        <a:scrgbClr r="0" g="0" b="0"/>
-      </a:effectRef>
-      <a:fontRef idx="minor">
-        <a:schemeClr val="lt1"/>
-      </a:fontRef>
-    </dgm:style>
-  </dgm:styleLbl>
-  <dgm:styleLbl name="bgSibTrans2D1">
-    <dgm:scene3d>
-      <a:camera prst="orthographicFront"/>
-      <a:lightRig rig="threePt" dir="t"/>
-    </dgm:scene3d>
-    <dgm:sp3d/>
-    <dgm:txPr/>
-    <dgm:style>
-      <a:lnRef idx="0">
-        <a:scrgbClr r="0" g="0" b="0"/>
-      </a:lnRef>
-      <a:fillRef idx="1">
-        <a:scrgbClr r="0" g="0" b="0"/>
-      </a:fillRef>
-      <a:effectRef idx="0">
-        <a:scrgbClr r="0" g="0" b="0"/>
-      </a:effectRef>
-      <a:fontRef idx="minor">
-        <a:schemeClr val="lt1"/>
-      </a:fontRef>
-    </dgm:style>
-  </dgm:styleLbl>
-  <dgm:styleLbl name="sibTrans1D1">
-    <dgm:scene3d>
-      <a:camera prst="orthographicFront"/>
-      <a:lightRig rig="threePt" dir="t"/>
-    </dgm:scene3d>
-    <dgm:sp3d/>
-    <dgm:txPr/>
-    <dgm:style>
-      <a:lnRef idx="1">
-        <a:scrgbClr r="0" g="0" b="0"/>
-      </a:lnRef>
-      <a:fillRef idx="0">
-        <a:scrgbClr r="0" g="0" b="0"/>
-      </a:fillRef>
-      <a:effectRef idx="0">
-        <a:scrgbClr r="0" g="0" b="0"/>
-      </a:effectRef>
-      <a:fontRef idx="minor"/>
-    </dgm:style>
-  </dgm:styleLbl>
-  <dgm:styleLbl name="callout">
-    <dgm:scene3d>
-      <a:camera prst="orthographicFront"/>
-      <a:lightRig rig="threePt" dir="t"/>
-    </dgm:scene3d>
-    <dgm:sp3d/>
-    <dgm:txPr/>
-    <dgm:style>
-      <a:lnRef idx="2">
-        <a:scrgbClr r="0" g="0" b="0"/>
-      </a:lnRef>
-      <a:fillRef idx="1">
-        <a:scrgbClr r="0" g="0" b="0"/>
-      </a:fillRef>
-      <a:effectRef idx="0">
-        <a:scrgbClr r="0" g="0" b="0"/>
-      </a:effectRef>
-      <a:fontRef idx="minor"/>
-    </dgm:style>
-  </dgm:styleLbl>
-  <dgm:styleLbl name="asst0">
-    <dgm:scene3d>
-      <a:camera prst="orthographicFront"/>
-      <a:lightRig rig="threePt" dir="t"/>
-    </dgm:scene3d>
-    <dgm:sp3d/>
-    <dgm:txPr/>
-    <dgm:style>
-      <a:lnRef idx="2">
-        <a:scrgbClr r="0" g="0" b="0"/>
-      </a:lnRef>
-      <a:fillRef idx="1">
-        <a:scrgbClr r="0" g="0" b="0"/>
-      </a:fillRef>
-      <a:effectRef idx="0">
-        <a:scrgbClr r="0" g="0" b="0"/>
-      </a:effectRef>
-      <a:fontRef idx="minor">
-        <a:schemeClr val="lt1"/>
-      </a:fontRef>
-    </dgm:style>
-  </dgm:styleLbl>
-  <dgm:styleLbl name="asst1">
-    <dgm:scene3d>
-      <a:camera prst="orthographicFront"/>
-      <a:lightRig rig="threePt" dir="t"/>
-    </dgm:scene3d>
-    <dgm:sp3d/>
-    <dgm:txPr/>
-    <dgm:style>
-      <a:lnRef idx="2">
-        <a:scrgbClr r="0" g="0" b="0"/>
-      </a:lnRef>
-      <a:fillRef idx="1">
-        <a:scrgbClr r="0" g="0" b="0"/>
-      </a:fillRef>
-      <a:effectRef idx="0">
-        <a:scrgbClr r="0" g="0" b="0"/>
-      </a:effectRef>
-      <a:fontRef idx="minor">
-        <a:schemeClr val="lt1"/>
-      </a:fontRef>
-    </dgm:style>
-  </dgm:styleLbl>
-  <dgm:styleLbl name="asst2">
-    <dgm:scene3d>
-      <a:camera prst="orthographicFront"/>
-      <a:lightRig rig="threePt" dir="t"/>
-    </dgm:scene3d>
-    <dgm:sp3d/>
-    <dgm:txPr/>
-    <dgm:style>
-      <a:lnRef idx="2">
-        <a:scrgbClr r="0" g="0" b="0"/>
-      </a:lnRef>
-      <a:fillRef idx="1">
-        <a:scrgbClr r="0" g="0" b="0"/>
-      </a:fillRef>
-      <a:effectRef idx="0">
-        <a:scrgbClr r="0" g="0" b="0"/>
-      </a:effectRef>
-      <a:fontRef idx="minor">
-        <a:schemeClr val="lt1"/>
-      </a:fontRef>
-    </dgm:style>
-  </dgm:styleLbl>
-  <dgm:styleLbl name="asst3">
-    <dgm:scene3d>
-      <a:camera prst="orthographicFront"/>
-      <a:lightRig rig="threePt" dir="t"/>
-    </dgm:scene3d>
-    <dgm:sp3d/>
-    <dgm:txPr/>
-    <dgm:style>
-      <a:lnRef idx="2">
-        <a:scrgbClr r="0" g="0" b="0"/>
-      </a:lnRef>
-      <a:fillRef idx="1">
-        <a:scrgbClr r="0" g="0" b="0"/>
-      </a:fillRef>
-      <a:effectRef idx="0">
-        <a:scrgbClr r="0" g="0" b="0"/>
-      </a:effectRef>
-      <a:fontRef idx="minor">
-        <a:schemeClr val="lt1"/>
-      </a:fontRef>
-    </dgm:style>
-  </dgm:styleLbl>
-  <dgm:styleLbl name="asst4">
-    <dgm:scene3d>
-      <a:camera prst="orthographicFront"/>
-      <a:lightRig rig="threePt" dir="t"/>
-    </dgm:scene3d>
-    <dgm:sp3d/>
-    <dgm:txPr/>
-    <dgm:style>
-      <a:lnRef idx="2">
-        <a:scrgbClr r="0" g="0" b="0"/>
-      </a:lnRef>
-      <a:fillRef idx="1">
-        <a:scrgbClr r="0" g="0" b="0"/>
-      </a:fillRef>
-      <a:effectRef idx="0">
-        <a:scrgbClr r="0" g="0" b="0"/>
-      </a:effectRef>
-      <a:fontRef idx="minor">
-        <a:schemeClr val="lt1"/>
-      </a:fontRef>
-    </dgm:style>
-  </dgm:styleLbl>
-  <dgm:styleLbl name="parChTrans2D1">
-    <dgm:scene3d>
-      <a:camera prst="orthographicFront"/>
-      <a:lightRig rig="threePt" dir="t"/>
-    </dgm:scene3d>
-    <dgm:sp3d/>
-    <dgm:txPr/>
-    <dgm:style>
-      <a:lnRef idx="2">
-        <a:scrgbClr r="0" g="0" b="0"/>
-      </a:lnRef>
-      <a:fillRef idx="1">
-        <a:scrgbClr r="0" g="0" b="0"/>
-      </a:fillRef>
-      <a:effectRef idx="0">
-        <a:scrgbClr r="0" g="0" b="0"/>
-      </a:effectRef>
-      <a:fontRef idx="minor">
-        <a:schemeClr val="lt1"/>
-      </a:fontRef>
-    </dgm:style>
-  </dgm:styleLbl>
-  <dgm:styleLbl name="parChTrans2D2">
-    <dgm:scene3d>
-      <a:camera prst="orthographicFront"/>
-      <a:lightRig rig="threePt" dir="t"/>
-    </dgm:scene3d>
-    <dgm:sp3d/>
-    <dgm:txPr/>
-    <dgm:style>
-      <a:lnRef idx="2">
-        <a:scrgbClr r="0" g="0" b="0"/>
-      </a:lnRef>
-      <a:fillRef idx="1">
-        <a:scrgbClr r="0" g="0" b="0"/>
-      </a:fillRef>
-      <a:effectRef idx="0">
-        <a:scrgbClr r="0" g="0" b="0"/>
-      </a:effectRef>
-      <a:fontRef idx="minor">
-        <a:schemeClr val="lt1"/>
-      </a:fontRef>
-    </dgm:style>
-  </dgm:styleLbl>
-  <dgm:styleLbl name="parChTrans2D3">
-    <dgm:scene3d>
-      <a:camera prst="orthographicFront"/>
-      <a:lightRig rig="threePt" dir="t"/>
-    </dgm:scene3d>
-    <dgm:sp3d/>
-    <dgm:txPr/>
-    <dgm:style>
-      <a:lnRef idx="2">
-        <a:scrgbClr r="0" g="0" b="0"/>
-      </a:lnRef>
-      <a:fillRef idx="1">
-        <a:scrgbClr r="0" g="0" b="0"/>
-      </a:fillRef>
-      <a:effectRef idx="0">
-        <a:scrgbClr r="0" g="0" b="0"/>
-      </a:effectRef>
-      <a:fontRef idx="minor">
-        <a:schemeClr val="lt1"/>
-      </a:fontRef>
-    </dgm:style>
-  </dgm:styleLbl>
-  <dgm:styleLbl name="parChTrans2D4">
-    <dgm:scene3d>
-      <a:camera prst="orthographicFront"/>
-      <a:lightRig rig="threePt" dir="t"/>
-    </dgm:scene3d>
-    <dgm:sp3d/>
-    <dgm:txPr/>
-    <dgm:style>
-      <a:lnRef idx="2">
-        <a:scrgbClr r="0" g="0" b="0"/>
-      </a:lnRef>
-      <a:fillRef idx="1">
-        <a:scrgbClr r="0" g="0" b="0"/>
-      </a:fillRef>
-      <a:effectRef idx="0">
-        <a:scrgbClr r="0" g="0" b="0"/>
-      </a:effectRef>
-      <a:fontRef idx="minor">
-        <a:schemeClr val="lt1"/>
-      </a:fontRef>
-    </dgm:style>
-  </dgm:styleLbl>
-  <dgm:styleLbl name="parChTrans1D1">
-    <dgm:scene3d>
-      <a:camera prst="orthographicFront"/>
-      <a:lightRig rig="threePt" dir="t"/>
-    </dgm:scene3d>
-    <dgm:sp3d/>
-    <dgm:txPr/>
-    <dgm:style>
-      <a:lnRef idx="2">
-        <a:scrgbClr r="0" g="0" b="0"/>
-      </a:lnRef>
-      <a:fillRef idx="0">
-        <a:scrgbClr r="0" g="0" b="0"/>
-      </a:fillRef>
-      <a:effectRef idx="0">
-        <a:scrgbClr r="0" g="0" b="0"/>
-      </a:effectRef>
-      <a:fontRef idx="minor"/>
-    </dgm:style>
-  </dgm:styleLbl>
-  <dgm:styleLbl name="parChTrans1D2">
-    <dgm:scene3d>
-      <a:camera prst="orthographicFront"/>
-      <a:lightRig rig="threePt" dir="t"/>
-    </dgm:scene3d>
-    <dgm:sp3d/>
-    <dgm:txPr/>
-    <dgm:style>
-      <a:lnRef idx="2">
-        <a:scrgbClr r="0" g="0" b="0"/>
-      </a:lnRef>
-      <a:fillRef idx="0">
-        <a:scrgbClr r="0" g="0" b="0"/>
-      </a:fillRef>
-      <a:effectRef idx="0">
-        <a:scrgbClr r="0" g="0" b="0"/>
-      </a:effectRef>
-      <a:fontRef idx="minor"/>
-    </dgm:style>
-  </dgm:styleLbl>
-  <dgm:styleLbl name="parChTrans1D3">
-    <dgm:scene3d>
-      <a:camera prst="orthographicFront"/>
-      <a:lightRig rig="threePt" dir="t"/>
-    </dgm:scene3d>
-    <dgm:sp3d/>
-    <dgm:txPr/>
-    <dgm:style>
-      <a:lnRef idx="2">
-        <a:scrgbClr r="0" g="0" b="0"/>
-      </a:lnRef>
-      <a:fillRef idx="0">
-        <a:scrgbClr r="0" g="0" b="0"/>
-      </a:fillRef>
-      <a:effectRef idx="0">
-        <a:scrgbClr r="0" g="0" b="0"/>
-      </a:effectRef>
-      <a:fontRef idx="minor"/>
-    </dgm:style>
-  </dgm:styleLbl>
-  <dgm:styleLbl name="parChTrans1D4">
-    <dgm:scene3d>
-      <a:camera prst="orthographicFront"/>
-      <a:lightRig rig="threePt" dir="t"/>
-    </dgm:scene3d>
-    <dgm:sp3d/>
-    <dgm:txPr/>
-    <dgm:style>
-      <a:lnRef idx="2">
-        <a:scrgbClr r="0" g="0" b="0"/>
-      </a:lnRef>
-      <a:fillRef idx="0">
-        <a:scrgbClr r="0" g="0" b="0"/>
-      </a:fillRef>
-      <a:effectRef idx="0">
-        <a:scrgbClr r="0" g="0" b="0"/>
-      </a:effectRef>
-      <a:fontRef idx="minor"/>
-    </dgm:style>
-  </dgm:styleLbl>
-  <dgm:styleLbl name="fgAcc1">
-    <dgm:scene3d>
-      <a:camera prst="orthographicFront"/>
-      <a:lightRig rig="threePt" dir="t"/>
-    </dgm:scene3d>
-    <dgm:sp3d/>
-    <dgm:txPr/>
-    <dgm:style>
-      <a:lnRef idx="2">
-        <a:scrgbClr r="0" g="0" b="0"/>
-      </a:lnRef>
-      <a:fillRef idx="1">
-        <a:scrgbClr r="0" g="0" b="0"/>
-      </a:fillRef>
-      <a:effectRef idx="0">
-        <a:scrgbClr r="0" g="0" b="0"/>
-      </a:effectRef>
-      <a:fontRef idx="minor"/>
-    </dgm:style>
-  </dgm:styleLbl>
-  <dgm:styleLbl name="conFgAcc1">
-    <dgm:scene3d>
-      <a:camera prst="orthographicFront"/>
-      <a:lightRig rig="threePt" dir="t"/>
-    </dgm:scene3d>
-    <dgm:sp3d/>
-    <dgm:txPr/>
-    <dgm:style>
-      <a:lnRef idx="2">
-        <a:scrgbClr r="0" g="0" b="0"/>
-      </a:lnRef>
-      <a:fillRef idx="1">
-        <a:scrgbClr r="0" g="0" b="0"/>
-      </a:fillRef>
-      <a:effectRef idx="0">
-        <a:scrgbClr r="0" g="0" b="0"/>
-      </a:effectRef>
-      <a:fontRef idx="minor"/>
-    </dgm:style>
-  </dgm:styleLbl>
-  <dgm:styleLbl name="alignAcc1">
-    <dgm:scene3d>
-      <a:camera prst="orthographicFront"/>
-      <a:lightRig rig="threePt" dir="t"/>
-    </dgm:scene3d>
-    <dgm:sp3d/>
-    <dgm:txPr/>
-    <dgm:style>
-      <a:lnRef idx="2">
-        <a:scrgbClr r="0" g="0" b="0"/>
-      </a:lnRef>
-      <a:fillRef idx="1">
-        <a:scrgbClr r="0" g="0" b="0"/>
-      </a:fillRef>
-      <a:effectRef idx="0">
-        <a:scrgbClr r="0" g="0" b="0"/>
-      </a:effectRef>
-      <a:fontRef idx="minor"/>
-    </dgm:style>
-  </dgm:styleLbl>
-  <dgm:styleLbl name="trAlignAcc1">
-    <dgm:scene3d>
-      <a:camera prst="orthographicFront"/>
-      <a:lightRig rig="threePt" dir="t"/>
-    </dgm:scene3d>
-    <dgm:sp3d/>
-    <dgm:txPr/>
-    <dgm:style>
-      <a:lnRef idx="1">
-        <a:scrgbClr r="0" g="0" b="0"/>
-      </a:lnRef>
-      <a:fillRef idx="1">
-        <a:scrgbClr r="0" g="0" b="0"/>
-      </a:fillRef>
-      <a:effectRef idx="0">
-        <a:scrgbClr r="0" g="0" b="0"/>
-      </a:effectRef>
-      <a:fontRef idx="minor"/>
-    </dgm:style>
-  </dgm:styleLbl>
-  <dgm:styleLbl name="bgAcc1">
-    <dgm:scene3d>
-      <a:camera prst="orthographicFront"/>
-      <a:lightRig rig="threePt" dir="t"/>
-    </dgm:scene3d>
-    <dgm:sp3d/>
-    <dgm:txPr/>
-    <dgm:style>
-      <a:lnRef idx="2">
-        <a:scrgbClr r="0" g="0" b="0"/>
-      </a:lnRef>
-      <a:fillRef idx="1">
-        <a:scrgbClr r="0" g="0" b="0"/>
-      </a:fillRef>
-      <a:effectRef idx="0">
-        <a:scrgbClr r="0" g="0" b="0"/>
-      </a:effectRef>
-      <a:fontRef idx="minor"/>
-    </dgm:style>
-  </dgm:styleLbl>
-  <dgm:styleLbl name="solidFgAcc1">
-    <dgm:scene3d>
-      <a:camera prst="orthographicFront"/>
-      <a:lightRig rig="threePt" dir="t"/>
-    </dgm:scene3d>
-    <dgm:sp3d/>
-    <dgm:txPr/>
-    <dgm:style>
-      <a:lnRef idx="2">
-        <a:scrgbClr r="0" g="0" b="0"/>
-      </a:lnRef>
-      <a:fillRef idx="1">
-        <a:scrgbClr r="0" g="0" b="0"/>
-      </a:fillRef>
-      <a:effectRef idx="0">
-        <a:scrgbClr r="0" g="0" b="0"/>
-      </a:effectRef>
-      <a:fontRef idx="minor"/>
-    </dgm:style>
-  </dgm:styleLbl>
-  <dgm:styleLbl name="solidAlignAcc1">
-    <dgm:scene3d>
-      <a:camera prst="orthographicFront"/>
-      <a:lightRig rig="threePt" dir="t"/>
-    </dgm:scene3d>
-    <dgm:sp3d/>
-    <dgm:txPr/>
-    <dgm:style>
-      <a:lnRef idx="2">
-        <a:scrgbClr r="0" g="0" b="0"/>
-      </a:lnRef>
-      <a:fillRef idx="1">
-        <a:scrgbClr r="0" g="0" b="0"/>
-      </a:fillRef>
-      <a:effectRef idx="0">
-        <a:scrgbClr r="0" g="0" b="0"/>
-      </a:effectRef>
-      <a:fontRef idx="minor"/>
-    </dgm:style>
-  </dgm:styleLbl>
-  <dgm:styleLbl name="solidBgAcc1">
-    <dgm:scene3d>
-      <a:camera prst="orthographicFront"/>
-      <a:lightRig rig="threePt" dir="t"/>
-    </dgm:scene3d>
-    <dgm:sp3d/>
-    <dgm:txPr/>
-    <dgm:style>
-      <a:lnRef idx="2">
-        <a:scrgbClr r="0" g="0" b="0"/>
-      </a:lnRef>
-      <a:fillRef idx="1">
-        <a:scrgbClr r="0" g="0" b="0"/>
-      </a:fillRef>
-      <a:effectRef idx="0">
-        <a:scrgbClr r="0" g="0" b="0"/>
-      </a:effectRef>
-      <a:fontRef idx="minor"/>
-    </dgm:style>
-  </dgm:styleLbl>
-  <dgm:styleLbl name="fgAccFollowNode1">
-    <dgm:scene3d>
-      <a:camera prst="orthographicFront"/>
-      <a:lightRig rig="threePt" dir="t"/>
-    </dgm:scene3d>
-    <dgm:sp3d/>
-    <dgm:txPr/>
-    <dgm:style>
-      <a:lnRef idx="2">
-        <a:scrgbClr r="0" g="0" b="0"/>
-      </a:lnRef>
-      <a:fillRef idx="1">
-        <a:scrgbClr r="0" g="0" b="0"/>
-      </a:fillRef>
-      <a:effectRef idx="0">
-        <a:scrgbClr r="0" g="0" b="0"/>
-      </a:effectRef>
-      <a:fontRef idx="minor"/>
-    </dgm:style>
-  </dgm:styleLbl>
-  <dgm:styleLbl name="alignAccFollowNode1">
-    <dgm:scene3d>
-      <a:camera prst="orthographicFront"/>
-      <a:lightRig rig="threePt" dir="t"/>
-    </dgm:scene3d>
-    <dgm:sp3d/>
-    <dgm:txPr/>
-    <dgm:style>
-      <a:lnRef idx="2">
-        <a:scrgbClr r="0" g="0" b="0"/>
-      </a:lnRef>
-      <a:fillRef idx="1">
-        <a:scrgbClr r="0" g="0" b="0"/>
-      </a:fillRef>
-      <a:effectRef idx="0">
-        <a:scrgbClr r="0" g="0" b="0"/>
-      </a:effectRef>
-      <a:fontRef idx="minor"/>
-    </dgm:style>
-  </dgm:styleLbl>
-  <dgm:styleLbl name="bgAccFollowNode1">
-    <dgm:scene3d>
-      <a:camera prst="orthographicFront"/>
-      <a:lightRig rig="threePt" dir="t"/>
-    </dgm:scene3d>
-    <dgm:sp3d/>
-    <dgm:txPr/>
-    <dgm:style>
-      <a:lnRef idx="2">
-        <a:scrgbClr r="0" g="0" b="0"/>
-      </a:lnRef>
-      <a:fillRef idx="1">
-        <a:scrgbClr r="0" g="0" b="0"/>
-      </a:fillRef>
-      <a:effectRef idx="0">
-        <a:scrgbClr r="0" g="0" b="0"/>
-      </a:effectRef>
-      <a:fontRef idx="minor"/>
-    </dgm:style>
-  </dgm:styleLbl>
-  <dgm:styleLbl name="fgAcc0">
-    <dgm:scene3d>
-      <a:camera prst="orthographicFront"/>
-      <a:lightRig rig="threePt" dir="t"/>
-    </dgm:scene3d>
-    <dgm:sp3d/>
-    <dgm:txPr/>
-    <dgm:style>
-      <a:lnRef idx="2">
-        <a:scrgbClr r="0" g="0" b="0"/>
-      </a:lnRef>
-      <a:fillRef idx="1">
-        <a:scrgbClr r="0" g="0" b="0"/>
-      </a:fillRef>
-      <a:effectRef idx="0">
-        <a:scrgbClr r="0" g="0" b="0"/>
-      </a:effectRef>
-      <a:fontRef idx="minor"/>
-    </dgm:style>
-  </dgm:styleLbl>
-  <dgm:styleLbl name="fgAcc2">
-    <dgm:scene3d>
-      <a:camera prst="orthographicFront"/>
-      <a:lightRig rig="threePt" dir="t"/>
-    </dgm:scene3d>
-    <dgm:sp3d/>
-    <dgm:txPr/>
-    <dgm:style>
-      <a:lnRef idx="2">
-        <a:scrgbClr r="0" g="0" b="0"/>
-      </a:lnRef>
-      <a:fillRef idx="1">
-        <a:scrgbClr r="0" g="0" b="0"/>
-      </a:fillRef>
-      <a:effectRef idx="0">
-        <a:scrgbClr r="0" g="0" b="0"/>
-      </a:effectRef>
-      <a:fontRef idx="minor"/>
-    </dgm:style>
-  </dgm:styleLbl>
-  <dgm:styleLbl name="fgAcc3">
-    <dgm:scene3d>
-      <a:camera prst="orthographicFront"/>
-      <a:lightRig rig="threePt" dir="t"/>
-    </dgm:scene3d>
-    <dgm:sp3d/>
-    <dgm:txPr/>
-    <dgm:style>
-      <a:lnRef idx="2">
-        <a:scrgbClr r="0" g="0" b="0"/>
-      </a:lnRef>
-      <a:fillRef idx="1">
-        <a:scrgbClr r="0" g="0" b="0"/>
-      </a:fillRef>
-      <a:effectRef idx="0">
-        <a:scrgbClr r="0" g="0" b="0"/>
-      </a:effectRef>
-      <a:fontRef idx="minor"/>
-    </dgm:style>
-  </dgm:styleLbl>
-  <dgm:styleLbl name="fgAcc4">
-    <dgm:scene3d>
-      <a:camera prst="orthographicFront"/>
-      <a:lightRig rig="threePt" dir="t"/>
-    </dgm:scene3d>
-    <dgm:sp3d/>
-    <dgm:txPr/>
-    <dgm:style>
-      <a:lnRef idx="2">
-        <a:scrgbClr r="0" g="0" b="0"/>
-      </a:lnRef>
-      <a:fillRef idx="1">
-        <a:scrgbClr r="0" g="0" b="0"/>
-      </a:fillRef>
-      <a:effectRef idx="0">
-        <a:scrgbClr r="0" g="0" b="0"/>
-      </a:effectRef>
-      <a:fontRef idx="minor"/>
-    </dgm:style>
-  </dgm:styleLbl>
-  <dgm:styleLbl name="bgShp">
-    <dgm:scene3d>
-      <a:camera prst="orthographicFront"/>
-      <a:lightRig rig="threePt" dir="t"/>
-    </dgm:scene3d>
-    <dgm:sp3d/>
-    <dgm:txPr/>
-    <dgm:style>
-      <a:lnRef idx="0">
-        <a:scrgbClr r="0" g="0" b="0"/>
-      </a:lnRef>
-      <a:fillRef idx="1">
-        <a:scrgbClr r="0" g="0" b="0"/>
-      </a:fillRef>
-      <a:effectRef idx="0">
-        <a:scrgbClr r="0" g="0" b="0"/>
-      </a:effectRef>
-      <a:fontRef idx="minor"/>
-    </dgm:style>
-  </dgm:styleLbl>
-  <dgm:styleLbl name="dkBgShp">
-    <dgm:scene3d>
-      <a:camera prst="orthographicFront"/>
-      <a:lightRig rig="threePt" dir="t"/>
-    </dgm:scene3d>
-    <dgm:sp3d/>
-    <dgm:txPr/>
-    <dgm:style>
-      <a:lnRef idx="0">
-        <a:scrgbClr r="0" g="0" b="0"/>
-      </a:lnRef>
-      <a:fillRef idx="1">
-        <a:scrgbClr r="0" g="0" b="0"/>
-      </a:fillRef>
-      <a:effectRef idx="0">
-        <a:scrgbClr r="0" g="0" b="0"/>
-      </a:effectRef>
-      <a:fontRef idx="minor"/>
-    </dgm:style>
-  </dgm:styleLbl>
-  <dgm:styleLbl name="trBgShp">
-    <dgm:scene3d>
-      <a:camera prst="orthographicFront"/>
-      <a:lightRig rig="threePt" dir="t"/>
-    </dgm:scene3d>
-    <dgm:sp3d/>
-    <dgm:txPr/>
-    <dgm:style>
-      <a:lnRef idx="0">
-        <a:scrgbClr r="0" g="0" b="0"/>
-      </a:lnRef>
-      <a:fillRef idx="1">
-        <a:scrgbClr r="0" g="0" b="0"/>
-      </a:fillRef>
-      <a:effectRef idx="0">
-        <a:scrgbClr r="0" g="0" b="0"/>
-      </a:effectRef>
-      <a:fontRef idx="minor"/>
-    </dgm:style>
-  </dgm:styleLbl>
-  <dgm:styleLbl name="fgShp">
-    <dgm:scene3d>
-      <a:camera prst="orthographicFront"/>
-      <a:lightRig rig="threePt" dir="t"/>
-    </dgm:scene3d>
-    <dgm:sp3d/>
-    <dgm:txPr/>
-    <dgm:style>
-      <a:lnRef idx="2">
-        <a:scrgbClr r="0" g="0" b="0"/>
-      </a:lnRef>
-      <a:fillRef idx="1">
-        <a:scrgbClr r="0" g="0" b="0"/>
-      </a:fillRef>
-      <a:effectRef idx="0">
-        <a:scrgbClr r="0" g="0" b="0"/>
-      </a:effectRef>
-      <a:fontRef idx="minor"/>
-    </dgm:style>
-  </dgm:styleLbl>
-  <dgm:styleLbl name="revTx">
-    <dgm:scene3d>
-      <a:camera prst="orthographicFront"/>
-      <a:lightRig rig="threePt" dir="t"/>
-    </dgm:scene3d>
-    <dgm:sp3d/>
-    <dgm:txPr/>
-    <dgm:style>
-      <a:lnRef idx="0">
-        <a:scrgbClr r="0" g="0" b="0"/>
-      </a:lnRef>
-      <a:fillRef idx="0">
-        <a:scrgbClr r="0" g="0" b="0"/>
-      </a:fillRef>
-      <a:effectRef idx="0">
-        <a:scrgbClr r="0" g="0" b="0"/>
-      </a:effectRef>
-      <a:fontRef idx="minor"/>
-    </dgm:style>
-  </dgm:styleLbl>
-</dgm:styleDef>
 </file>
 
 <file path=ppt/notesMasters/notesMaster1.xml><?xml version="1.0" encoding="utf-8"?>
@@ -3741,7 +206,7 @@
           <a:p>
             <a:fld id="{B3DB39CA-6D04-0949-A973-4E4BB437E208}" type="datetimeFigureOut">
               <a:rPr lang="en-US" smtClean="0"/>
-              <a:t>5/5/25</a:t>
+              <a:t>6/4/25</a:t>
             </a:fld>
             <a:endParaRPr lang="en-US"/>
           </a:p>
@@ -4052,6 +517,23 @@
           <a:bodyPr/>
           <a:lstStyle/>
           <a:p>
+            <a:pPr marL="0" marR="0" lvl="0" indent="0" algn="l" defTabSz="914400" rtl="0" eaLnBrk="1" fontAlgn="auto" latinLnBrk="0" hangingPunct="1">
+              <a:lnSpc>
+                <a:spcPct val="100000"/>
+              </a:lnSpc>
+              <a:spcBef>
+                <a:spcPts val="0"/>
+              </a:spcBef>
+              <a:spcAft>
+                <a:spcPts val="0"/>
+              </a:spcAft>
+              <a:buClrTx/>
+              <a:buSzTx/>
+              <a:buFontTx/>
+              <a:buNone/>
+              <a:tabLst/>
+              <a:defRPr/>
+            </a:pPr>
             <a:r>
               <a:rPr lang="en-US" dirty="0"/>
               <a:t>Anyone needing medical help in Vilnius faces a challenge: information is fragmented, and relying on general tools can be problematic. While we use map apps daily, they often lack the specific filters crucial for healthcare – like finding a cardiologist or verifying if a clinic </a:t>
@@ -4072,6 +554,43 @@
               <a:rPr lang="en-US" dirty="0"/>
               <a:t> care are most needed. Existing doctor directories or hospital websites don't solve this integration problem either</a:t>
             </a:r>
+            <a:br>
+              <a:rPr lang="en-US" dirty="0"/>
+            </a:br>
+            <a:br>
+              <a:rPr lang="en-US" dirty="0"/>
+            </a:br>
+            <a:r>
+              <a:rPr lang="en-US" dirty="0"/>
+              <a:t>My analysis looked closely at the tools already available in Vilnius. General mapping platforms like Google Maps are great for basic navigation but lack essential medical details and, as we saw, can even be misleading sometimes. Then there are local healthcare directories, like </a:t>
+            </a:r>
+            <a:r>
+              <a:rPr lang="en-US" dirty="0" err="1"/>
+              <a:t>manodaktaras.lt</a:t>
+            </a:r>
+            <a:r>
+              <a:rPr lang="en-US" dirty="0"/>
+              <a:t>, which are good for finding specific doctors or booking appointments, but they aren't really designed for finding the </a:t>
+            </a:r>
+            <a:r>
+              <a:rPr lang="en-US" i="1" dirty="0"/>
+              <a:t>most appropriate facility</a:t>
+            </a:r>
+            <a:r>
+              <a:rPr lang="en-US" dirty="0"/>
+              <a:t> based on its services or for integrated routing. Official hospital websites offer detailed info, but you need to know which specific institution to check, which isn't helpful for discovery. Even the newer national platforms like the E-Health app, while useful for booking, don't necessarily solve the problem of identifying the most </a:t>
+            </a:r>
+            <a:r>
+              <a:rPr lang="en-US" i="1" dirty="0"/>
+              <a:t>suitable</a:t>
+            </a:r>
+            <a:r>
+              <a:rPr lang="en-US" dirty="0"/>
+              <a:t> facility based on complex needs or providing easy navigation.</a:t>
+            </a:r>
+          </a:p>
+          <a:p>
+            <a:endParaRPr lang="en-US" dirty="0"/>
           </a:p>
         </p:txBody>
       </p:sp>
@@ -4102,101 +621,6 @@
     <p:extLst>
       <p:ext uri="{BB962C8B-B14F-4D97-AF65-F5344CB8AC3E}">
         <p14:creationId xmlns:p14="http://schemas.microsoft.com/office/powerpoint/2010/main" val="1845592201"/>
-      </p:ext>
-    </p:extLst>
-  </p:cSld>
-  <p:clrMapOvr>
-    <a:masterClrMapping/>
-  </p:clrMapOvr>
-</p:notes>
-</file>
-
-<file path=ppt/notesSlides/notesSlide10.xml><?xml version="1.0" encoding="utf-8"?>
-<p:notes xmlns:a="http://schemas.openxmlformats.org/drawingml/2006/main" xmlns:r="http://schemas.openxmlformats.org/officeDocument/2006/relationships" xmlns:p="http://schemas.openxmlformats.org/presentationml/2006/main">
-  <p:cSld>
-    <p:spTree>
-      <p:nvGrpSpPr>
-        <p:cNvPr id="1" name=""/>
-        <p:cNvGrpSpPr/>
-        <p:nvPr/>
-      </p:nvGrpSpPr>
-      <p:grpSpPr>
-        <a:xfrm>
-          <a:off x="0" y="0"/>
-          <a:ext cx="0" cy="0"/>
-          <a:chOff x="0" y="0"/>
-          <a:chExt cx="0" cy="0"/>
-        </a:xfrm>
-      </p:grpSpPr>
-      <p:sp>
-        <p:nvSpPr>
-          <p:cNvPr id="2" name="Slide Image Placeholder 1"/>
-          <p:cNvSpPr>
-            <a:spLocks noGrp="1" noRot="1" noChangeAspect="1"/>
-          </p:cNvSpPr>
-          <p:nvPr>
-            <p:ph type="sldImg"/>
-          </p:nvPr>
-        </p:nvSpPr>
-        <p:spPr/>
-      </p:sp>
-      <p:sp>
-        <p:nvSpPr>
-          <p:cNvPr id="3" name="Notes Placeholder 2"/>
-          <p:cNvSpPr>
-            <a:spLocks noGrp="1"/>
-          </p:cNvSpPr>
-          <p:nvPr>
-            <p:ph type="body" idx="1"/>
-          </p:nvPr>
-        </p:nvSpPr>
-        <p:spPr/>
-        <p:txBody>
-          <a:bodyPr/>
-          <a:lstStyle/>
-          <a:p>
-            <a:r>
-              <a:rPr lang="en-US" dirty="0"/>
-              <a:t>In conclusion, this thesis set out to address the healthcare navigation challenges in Vilnius, and it successfully delivered a functional web application. Its contribution and novelty lie in the targeted integration of technology to solve that specific local gap – providing a unified interface with granular medical filters and integrated routing focused on Vilnius. The project systematically achieved its objectives, completing the main tasks defined at the outset: </a:t>
-            </a:r>
-            <a:r>
-              <a:rPr lang="en-US" b="1" dirty="0"/>
-              <a:t>from analyzing requirements and existing systems, selecting appropriate technologies, and designing the architecture, through to implementing the full-stack application and testing its core components.</a:t>
-            </a:r>
-            <a:r>
-              <a:rPr lang="en-US" dirty="0"/>
-              <a:t> While acknowledging limitations, especially the crucial ongoing challenge of data accuracy, the result is a demonstrably useful tool providing value for residents and visitors in Vilnius.</a:t>
-            </a:r>
-          </a:p>
-        </p:txBody>
-      </p:sp>
-      <p:sp>
-        <p:nvSpPr>
-          <p:cNvPr id="4" name="Slide Number Placeholder 3"/>
-          <p:cNvSpPr>
-            <a:spLocks noGrp="1"/>
-          </p:cNvSpPr>
-          <p:nvPr>
-            <p:ph type="sldNum" sz="quarter" idx="5"/>
-          </p:nvPr>
-        </p:nvSpPr>
-        <p:spPr/>
-        <p:txBody>
-          <a:bodyPr/>
-          <a:lstStyle/>
-          <a:p>
-            <a:fld id="{942E63C4-8414-E249-95C0-E6812B6715EF}" type="slidenum">
-              <a:rPr lang="en-US" smtClean="0"/>
-              <a:t>12</a:t>
-            </a:fld>
-            <a:endParaRPr lang="en-US"/>
-          </a:p>
-        </p:txBody>
-      </p:sp>
-    </p:spTree>
-    <p:extLst>
-      <p:ext uri="{BB962C8B-B14F-4D97-AF65-F5344CB8AC3E}">
-        <p14:creationId xmlns:p14="http://schemas.microsoft.com/office/powerpoint/2010/main" val="1660855685"/>
       </p:ext>
     </p:extLst>
   </p:cSld>
@@ -4345,7 +769,10 @@
           <a:bodyPr/>
           <a:lstStyle/>
           <a:p>
-            <a:endParaRPr lang="en-US" dirty="0"/>
+            <a:r>
+              <a:rPr lang="en-US" dirty="0"/>
+              <a:t>The application scope focused on a web app for Vilnius, enabling users to find and get directions to medical facilities. Core functionalities include emergency search, detailed filtered search (by type, specialty, accessibility), mapping, routing, user feedback, and an admin interface. Things like appointment booking were kept out of scope</a:t>
+            </a:r>
           </a:p>
         </p:txBody>
       </p:sp>
@@ -4375,7 +802,7 @@
     </p:spTree>
     <p:extLst>
       <p:ext uri="{BB962C8B-B14F-4D97-AF65-F5344CB8AC3E}">
-        <p14:creationId xmlns:p14="http://schemas.microsoft.com/office/powerpoint/2010/main" val="3829493894"/>
+        <p14:creationId xmlns:p14="http://schemas.microsoft.com/office/powerpoint/2010/main" val="3657022004"/>
       </p:ext>
     </p:extLst>
   </p:cSld>
@@ -4431,31 +858,23 @@
           <a:p>
             <a:r>
               <a:rPr lang="en-US" dirty="0"/>
-              <a:t>My analysis looked closely at the tools already available in Vilnius. General mapping platforms like Google Maps are great for basic navigation but lack essential medical details and, as we saw, can even be misleading sometimes. Then there are local healthcare directories, like </a:t>
+              <a:t>The technologies were chosen carefully: Ruby on Rails for backend productivity, PostgreSQL with </a:t>
             </a:r>
             <a:r>
               <a:rPr lang="en-US" dirty="0" err="1"/>
-              <a:t>manodaktaras.lt</a:t>
+              <a:t>PostGIS</a:t>
             </a:r>
             <a:r>
               <a:rPr lang="en-US" dirty="0"/>
-              <a:t>, which are good for finding specific doctors or booking appointments, but they aren't really designed for finding the </a:t>
-            </a:r>
-            <a:r>
-              <a:rPr lang="en-US" i="1" dirty="0"/>
-              <a:t>most appropriate facility</a:t>
+              <a:t> for its powerful geospatial capabilities, </a:t>
+            </a:r>
+            <a:r>
+              <a:rPr lang="en-US" dirty="0" err="1"/>
+              <a:t>Vue.js</a:t>
             </a:r>
             <a:r>
               <a:rPr lang="en-US" dirty="0"/>
-              <a:t> based on its services or for integrated routing. Official hospital websites offer detailed info, but you need to know which specific institution to check, which isn't helpful for discovery. Even the newer national platforms like the E-Health app, while useful for booking, don't necessarily solve the problem of identifying the most </a:t>
-            </a:r>
-            <a:r>
-              <a:rPr lang="en-US" i="1" dirty="0"/>
-              <a:t>suitable</a:t>
-            </a:r>
-            <a:r>
-              <a:rPr lang="en-US" dirty="0"/>
-              <a:t> facility based on complex needs or providing easy navigation.</a:t>
+              <a:t> for a modern interactive frontend, the OSRM engine for high-performance open-source routing without external API costs, and Leaflet for efficient map display</a:t>
             </a:r>
           </a:p>
         </p:txBody>
@@ -4486,7 +905,7 @@
     </p:spTree>
     <p:extLst>
       <p:ext uri="{BB962C8B-B14F-4D97-AF65-F5344CB8AC3E}">
-        <p14:creationId xmlns:p14="http://schemas.microsoft.com/office/powerpoint/2010/main" val="68065748"/>
+        <p14:creationId xmlns:p14="http://schemas.microsoft.com/office/powerpoint/2010/main" val="1401333145"/>
       </p:ext>
     </p:extLst>
   </p:cSld>
@@ -4542,7 +961,23 @@
           <a:p>
             <a:r>
               <a:rPr lang="en-US" dirty="0"/>
-              <a:t>The application scope focused on a web app for Vilnius, enabling users to find and get directions to medical facilities. Core functionalities include emergency search, detailed filtered search (by type, specialty, accessibility), mapping, routing, user feedback, and an admin interface. Things like appointment booking were kept out of scope</a:t>
+              <a:t>The data model uses PostgreSQL with </a:t>
+            </a:r>
+            <a:r>
+              <a:rPr lang="en-US" dirty="0" err="1"/>
+              <a:t>PostGIS</a:t>
+            </a:r>
+            <a:r>
+              <a:rPr lang="en-US" dirty="0"/>
+              <a:t>, centered around the facilities table which stores geographic location. It manages data for 380 facilities across 91 specialties, linking them via join tables. The ER Diagram [See Fig \ref{</a:t>
+            </a:r>
+            <a:r>
+              <a:rPr lang="en-US" dirty="0" err="1"/>
+              <a:t>fig:er_diagram</a:t>
+            </a:r>
+            <a:r>
+              <a:rPr lang="en-US" dirty="0"/>
+              <a:t>}] shows the structure</a:t>
             </a:r>
           </a:p>
         </p:txBody>
@@ -4573,7 +1008,7 @@
     </p:spTree>
     <p:extLst>
       <p:ext uri="{BB962C8B-B14F-4D97-AF65-F5344CB8AC3E}">
-        <p14:creationId xmlns:p14="http://schemas.microsoft.com/office/powerpoint/2010/main" val="3657022004"/>
+        <p14:creationId xmlns:p14="http://schemas.microsoft.com/office/powerpoint/2010/main" val="3022001465"/>
       </p:ext>
     </p:extLst>
   </p:cSld>
@@ -4629,24 +1064,21 @@
           <a:p>
             <a:r>
               <a:rPr lang="en-US" dirty="0"/>
-              <a:t>The technologies were chosen carefully: Ruby on Rails for backend productivity, PostgreSQL with </a:t>
+              <a:t>Architecturally, the system follows a logical layered approach – Presentation, Application, Data, Integration – promoting modularity [See Fig \ref{</a:t>
             </a:r>
             <a:r>
               <a:rPr lang="en-US" dirty="0" err="1"/>
-              <a:t>PostGIS</a:t>
+              <a:t>fig:logical_architecture</a:t>
             </a:r>
             <a:r>
               <a:rPr lang="en-US" dirty="0"/>
-              <a:t> for its powerful geospatial capabilities, </a:t>
+              <a:t>}]. Physically, it's deployed across platforms best suited for each component: Render for the frontend, AWS for the backend and database, and Google Cloud Platform for the memory-intensive OSRM routing engine [See Fig \ref{</a:t>
             </a:r>
             <a:r>
               <a:rPr lang="en-US" dirty="0" err="1"/>
-              <a:t>Vue.js</a:t>
-            </a:r>
-            <a:r>
-              <a:rPr lang="en-US" dirty="0"/>
-              <a:t> for a modern interactive frontend, the OSRM engine for high-performance open-source routing without external API costs, and Leaflet for efficient map display</a:t>
-            </a:r>
+              <a:t>fig:deployment_diagram</a:t>
+            </a:r>
+            <a:endParaRPr lang="en-US" dirty="0"/>
           </a:p>
         </p:txBody>
       </p:sp>
@@ -4676,7 +1108,7 @@
     </p:spTree>
     <p:extLst>
       <p:ext uri="{BB962C8B-B14F-4D97-AF65-F5344CB8AC3E}">
-        <p14:creationId xmlns:p14="http://schemas.microsoft.com/office/powerpoint/2010/main" val="1401333145"/>
+        <p14:creationId xmlns:p14="http://schemas.microsoft.com/office/powerpoint/2010/main" val="3726366444"/>
       </p:ext>
     </p:extLst>
   </p:cSld>
@@ -4732,21 +1164,40 @@
           <a:p>
             <a:r>
               <a:rPr lang="en-US" dirty="0"/>
-              <a:t>Architecturally, the system follows a logical layered approach – Presentation, Application, Data, Integration – promoting modularity [See Fig \ref{</a:t>
+              <a:t>For testing, the backend has 58 automated </a:t>
             </a:r>
             <a:r>
               <a:rPr lang="en-US" dirty="0" err="1"/>
-              <a:t>fig:logical_architecture</a:t>
+              <a:t>RSpec</a:t>
             </a:r>
             <a:r>
               <a:rPr lang="en-US" dirty="0"/>
-              <a:t>}]. Physically, it's deployed across platforms best suited for each component: Render for the frontend, AWS for the backend and database, and Google Cloud Platform for the memory-intensive OSRM routing engine [See Fig \ref{</a:t>
+              <a:t> tests achieving over 82% code coverage [See Table \ref{</a:t>
             </a:r>
             <a:r>
               <a:rPr lang="en-US" dirty="0" err="1"/>
-              <a:t>fig:deployment_diagram</a:t>
-            </a:r>
-            <a:endParaRPr lang="en-US" dirty="0"/>
+              <a:t>tab:coverage_summary</a:t>
+            </a:r>
+            <a:r>
+              <a:rPr lang="en-US" dirty="0"/>
+              <a:t>}], ensuring core logic reliability. Informal user feedback during demos was positive, highlighting the intuitive interface and the practical value of features like specialty filtering – confirmed by a user's real-life anecdote. </a:t>
+            </a:r>
+            <a:r>
+              <a:rPr lang="en-US" b="1" dirty="0"/>
+              <a:t>Furthermore, a detailed task-based usability test plan was outlined in the thesis [See Section \ref{</a:t>
+            </a:r>
+            <a:r>
+              <a:rPr lang="en-US" b="1" dirty="0" err="1"/>
+              <a:t>sec:task_test_outline</a:t>
+            </a:r>
+            <a:r>
+              <a:rPr lang="en-US" b="1" dirty="0"/>
+              <a:t>}] to provide a clear path for more formal user validation in the future.</a:t>
+            </a:r>
+            <a:r>
+              <a:rPr lang="en-US" dirty="0"/>
+              <a:t>"</a:t>
+            </a:r>
           </a:p>
         </p:txBody>
       </p:sp>
@@ -4767,7 +1218,7 @@
           <a:p>
             <a:fld id="{942E63C4-8414-E249-95C0-E6812B6715EF}" type="slidenum">
               <a:rPr lang="en-US" smtClean="0"/>
-              <a:t>8</a:t>
+              <a:t>9</a:t>
             </a:fld>
             <a:endParaRPr lang="en-US"/>
           </a:p>
@@ -4776,7 +1227,7 @@
     </p:spTree>
     <p:extLst>
       <p:ext uri="{BB962C8B-B14F-4D97-AF65-F5344CB8AC3E}">
-        <p14:creationId xmlns:p14="http://schemas.microsoft.com/office/powerpoint/2010/main" val="3726366444"/>
+        <p14:creationId xmlns:p14="http://schemas.microsoft.com/office/powerpoint/2010/main" val="783418803"/>
       </p:ext>
     </p:extLst>
   </p:cSld>
@@ -4832,23 +1283,15 @@
           <a:p>
             <a:r>
               <a:rPr lang="en-US" dirty="0"/>
-              <a:t>The data model uses PostgreSQL with </a:t>
-            </a:r>
-            <a:r>
-              <a:rPr lang="en-US" dirty="0" err="1"/>
-              <a:t>PostGIS</a:t>
+              <a:t>In conclusion, this thesis set out to address the healthcare navigation challenges in Vilnius, and it successfully delivered a functional web application. Its contribution and novelty lie in the targeted integration of technology to solve that specific local gap – providing a unified interface with granular medical filters and integrated routing focused on Vilnius. The project systematically achieved its objectives, completing the main tasks defined at the outset: </a:t>
+            </a:r>
+            <a:r>
+              <a:rPr lang="en-US" b="1" dirty="0"/>
+              <a:t>from analyzing requirements and existing systems, selecting appropriate technologies, and designing the architecture, through to implementing the full-stack application and testing its core components.</a:t>
             </a:r>
             <a:r>
               <a:rPr lang="en-US" dirty="0"/>
-              <a:t>, centered around the facilities table which stores geographic location. It manages data for 380 facilities across 91 specialties, linking them via join tables. The ER Diagram [See Fig \ref{</a:t>
-            </a:r>
-            <a:r>
-              <a:rPr lang="en-US" dirty="0" err="1"/>
-              <a:t>fig:er_diagram</a:t>
-            </a:r>
-            <a:r>
-              <a:rPr lang="en-US" dirty="0"/>
-              <a:t>}] shows the structure</a:t>
+              <a:t> While acknowledging limitations, especially the crucial ongoing challenge of data accuracy, the result is a demonstrably useful tool providing value for residents and visitors in Vilnius.</a:t>
             </a:r>
           </a:p>
         </p:txBody>
@@ -4870,7 +1313,7 @@
           <a:p>
             <a:fld id="{942E63C4-8414-E249-95C0-E6812B6715EF}" type="slidenum">
               <a:rPr lang="en-US" smtClean="0"/>
-              <a:t>9</a:t>
+              <a:t>10</a:t>
             </a:fld>
             <a:endParaRPr lang="en-US"/>
           </a:p>
@@ -4879,126 +1322,7 @@
     </p:spTree>
     <p:extLst>
       <p:ext uri="{BB962C8B-B14F-4D97-AF65-F5344CB8AC3E}">
-        <p14:creationId xmlns:p14="http://schemas.microsoft.com/office/powerpoint/2010/main" val="3022001465"/>
-      </p:ext>
-    </p:extLst>
-  </p:cSld>
-  <p:clrMapOvr>
-    <a:masterClrMapping/>
-  </p:clrMapOvr>
-</p:notes>
-</file>
-
-<file path=ppt/notesSlides/notesSlide9.xml><?xml version="1.0" encoding="utf-8"?>
-<p:notes xmlns:a="http://schemas.openxmlformats.org/drawingml/2006/main" xmlns:r="http://schemas.openxmlformats.org/officeDocument/2006/relationships" xmlns:p="http://schemas.openxmlformats.org/presentationml/2006/main">
-  <p:cSld>
-    <p:spTree>
-      <p:nvGrpSpPr>
-        <p:cNvPr id="1" name=""/>
-        <p:cNvGrpSpPr/>
-        <p:nvPr/>
-      </p:nvGrpSpPr>
-      <p:grpSpPr>
-        <a:xfrm>
-          <a:off x="0" y="0"/>
-          <a:ext cx="0" cy="0"/>
-          <a:chOff x="0" y="0"/>
-          <a:chExt cx="0" cy="0"/>
-        </a:xfrm>
-      </p:grpSpPr>
-      <p:sp>
-        <p:nvSpPr>
-          <p:cNvPr id="2" name="Slide Image Placeholder 1"/>
-          <p:cNvSpPr>
-            <a:spLocks noGrp="1" noRot="1" noChangeAspect="1"/>
-          </p:cNvSpPr>
-          <p:nvPr>
-            <p:ph type="sldImg"/>
-          </p:nvPr>
-        </p:nvSpPr>
-        <p:spPr/>
-      </p:sp>
-      <p:sp>
-        <p:nvSpPr>
-          <p:cNvPr id="3" name="Notes Placeholder 2"/>
-          <p:cNvSpPr>
-            <a:spLocks noGrp="1"/>
-          </p:cNvSpPr>
-          <p:nvPr>
-            <p:ph type="body" idx="1"/>
-          </p:nvPr>
-        </p:nvSpPr>
-        <p:spPr/>
-        <p:txBody>
-          <a:bodyPr/>
-          <a:lstStyle/>
-          <a:p>
-            <a:r>
-              <a:rPr lang="en-US" dirty="0"/>
-              <a:t>For testing, the backend has 58 automated </a:t>
-            </a:r>
-            <a:r>
-              <a:rPr lang="en-US" dirty="0" err="1"/>
-              <a:t>RSpec</a:t>
-            </a:r>
-            <a:r>
-              <a:rPr lang="en-US" dirty="0"/>
-              <a:t> tests achieving over 82% code coverage [See Table \ref{</a:t>
-            </a:r>
-            <a:r>
-              <a:rPr lang="en-US" dirty="0" err="1"/>
-              <a:t>tab:coverage_summary</a:t>
-            </a:r>
-            <a:r>
-              <a:rPr lang="en-US" dirty="0"/>
-              <a:t>}], ensuring core logic reliability. Informal user feedback during demos was positive, highlighting the intuitive interface and the practical value of features like specialty filtering – confirmed by a user's real-life anecdote. </a:t>
-            </a:r>
-            <a:r>
-              <a:rPr lang="en-US" b="1" dirty="0"/>
-              <a:t>Furthermore, a detailed task-based usability test plan was outlined in the thesis [See Section \ref{</a:t>
-            </a:r>
-            <a:r>
-              <a:rPr lang="en-US" b="1" dirty="0" err="1"/>
-              <a:t>sec:task_test_outline</a:t>
-            </a:r>
-            <a:r>
-              <a:rPr lang="en-US" b="1" dirty="0"/>
-              <a:t>}] to provide a clear path for more formal user validation in the future.</a:t>
-            </a:r>
-            <a:r>
-              <a:rPr lang="en-US" dirty="0"/>
-              <a:t>"</a:t>
-            </a:r>
-          </a:p>
-        </p:txBody>
-      </p:sp>
-      <p:sp>
-        <p:nvSpPr>
-          <p:cNvPr id="4" name="Slide Number Placeholder 3"/>
-          <p:cNvSpPr>
-            <a:spLocks noGrp="1"/>
-          </p:cNvSpPr>
-          <p:nvPr>
-            <p:ph type="sldNum" sz="quarter" idx="5"/>
-          </p:nvPr>
-        </p:nvSpPr>
-        <p:spPr/>
-        <p:txBody>
-          <a:bodyPr/>
-          <a:lstStyle/>
-          <a:p>
-            <a:fld id="{942E63C4-8414-E249-95C0-E6812B6715EF}" type="slidenum">
-              <a:rPr lang="en-US" smtClean="0"/>
-              <a:t>11</a:t>
-            </a:fld>
-            <a:endParaRPr lang="en-US"/>
-          </a:p>
-        </p:txBody>
-      </p:sp>
-    </p:spTree>
-    <p:extLst>
-      <p:ext uri="{BB962C8B-B14F-4D97-AF65-F5344CB8AC3E}">
-        <p14:creationId xmlns:p14="http://schemas.microsoft.com/office/powerpoint/2010/main" val="783418803"/>
+        <p14:creationId xmlns:p14="http://schemas.microsoft.com/office/powerpoint/2010/main" val="1660855685"/>
       </p:ext>
     </p:extLst>
   </p:cSld>
@@ -5155,7 +1479,7 @@
           <a:p>
             <a:fld id="{64BE52CC-A5C4-4845-A5DA-01E5E1F85751}" type="datetimeFigureOut">
               <a:rPr lang="en-US" smtClean="0"/>
-              <a:t>5/5/25</a:t>
+              <a:t>6/4/25</a:t>
             </a:fld>
             <a:endParaRPr lang="en-US"/>
           </a:p>
@@ -5353,7 +1677,7 @@
           <a:p>
             <a:fld id="{64BE52CC-A5C4-4845-A5DA-01E5E1F85751}" type="datetimeFigureOut">
               <a:rPr lang="en-US" smtClean="0"/>
-              <a:t>5/5/25</a:t>
+              <a:t>6/4/25</a:t>
             </a:fld>
             <a:endParaRPr lang="en-US"/>
           </a:p>
@@ -5561,7 +1885,7 @@
           <a:p>
             <a:fld id="{64BE52CC-A5C4-4845-A5DA-01E5E1F85751}" type="datetimeFigureOut">
               <a:rPr lang="en-US" smtClean="0"/>
-              <a:t>5/5/25</a:t>
+              <a:t>6/4/25</a:t>
             </a:fld>
             <a:endParaRPr lang="en-US"/>
           </a:p>
@@ -5759,7 +2083,7 @@
           <a:p>
             <a:fld id="{64BE52CC-A5C4-4845-A5DA-01E5E1F85751}" type="datetimeFigureOut">
               <a:rPr lang="en-US" smtClean="0"/>
-              <a:t>5/5/25</a:t>
+              <a:t>6/4/25</a:t>
             </a:fld>
             <a:endParaRPr lang="en-US"/>
           </a:p>
@@ -6034,7 +2358,7 @@
           <a:p>
             <a:fld id="{64BE52CC-A5C4-4845-A5DA-01E5E1F85751}" type="datetimeFigureOut">
               <a:rPr lang="en-US" smtClean="0"/>
-              <a:t>5/5/25</a:t>
+              <a:t>6/4/25</a:t>
             </a:fld>
             <a:endParaRPr lang="en-US"/>
           </a:p>
@@ -6299,7 +2623,7 @@
           <a:p>
             <a:fld id="{64BE52CC-A5C4-4845-A5DA-01E5E1F85751}" type="datetimeFigureOut">
               <a:rPr lang="en-US" smtClean="0"/>
-              <a:t>5/5/25</a:t>
+              <a:t>6/4/25</a:t>
             </a:fld>
             <a:endParaRPr lang="en-US"/>
           </a:p>
@@ -6711,7 +3035,7 @@
           <a:p>
             <a:fld id="{64BE52CC-A5C4-4845-A5DA-01E5E1F85751}" type="datetimeFigureOut">
               <a:rPr lang="en-US" smtClean="0"/>
-              <a:t>5/5/25</a:t>
+              <a:t>6/4/25</a:t>
             </a:fld>
             <a:endParaRPr lang="en-US"/>
           </a:p>
@@ -6852,7 +3176,7 @@
           <a:p>
             <a:fld id="{64BE52CC-A5C4-4845-A5DA-01E5E1F85751}" type="datetimeFigureOut">
               <a:rPr lang="en-US" smtClean="0"/>
-              <a:t>5/5/25</a:t>
+              <a:t>6/4/25</a:t>
             </a:fld>
             <a:endParaRPr lang="en-US"/>
           </a:p>
@@ -6965,7 +3289,7 @@
           <a:p>
             <a:fld id="{64BE52CC-A5C4-4845-A5DA-01E5E1F85751}" type="datetimeFigureOut">
               <a:rPr lang="en-US" smtClean="0"/>
-              <a:t>5/5/25</a:t>
+              <a:t>6/4/25</a:t>
             </a:fld>
             <a:endParaRPr lang="en-US"/>
           </a:p>
@@ -7276,7 +3600,7 @@
           <a:p>
             <a:fld id="{64BE52CC-A5C4-4845-A5DA-01E5E1F85751}" type="datetimeFigureOut">
               <a:rPr lang="en-US" smtClean="0"/>
-              <a:t>5/5/25</a:t>
+              <a:t>6/4/25</a:t>
             </a:fld>
             <a:endParaRPr lang="en-US"/>
           </a:p>
@@ -7564,7 +3888,7 @@
           <a:p>
             <a:fld id="{64BE52CC-A5C4-4845-A5DA-01E5E1F85751}" type="datetimeFigureOut">
               <a:rPr lang="en-US" smtClean="0"/>
-              <a:t>5/5/25</a:t>
+              <a:t>6/4/25</a:t>
             </a:fld>
             <a:endParaRPr lang="en-US"/>
           </a:p>
@@ -7805,7 +4129,7 @@
           <a:p>
             <a:fld id="{64BE52CC-A5C4-4845-A5DA-01E5E1F85751}" type="datetimeFigureOut">
               <a:rPr lang="en-US" smtClean="0"/>
-              <a:t>5/5/25</a:t>
+              <a:t>6/4/25</a:t>
             </a:fld>
             <a:endParaRPr lang="en-US"/>
           </a:p>
@@ -10815,1191 +7139,6 @@
       </p:grpSpPr>
       <p:sp useBgFill="1">
         <p:nvSpPr>
-          <p:cNvPr id="30" name="Rectangle 29">
-            <a:extLst>
-              <a:ext uri="{FF2B5EF4-FFF2-40B4-BE49-F238E27FC236}">
-                <a16:creationId xmlns:a16="http://schemas.microsoft.com/office/drawing/2014/main" id="{94BFCCA4-109C-4B21-816E-144FE75C38EE}"/>
-              </a:ext>
-              <a:ext uri="{C183D7F6-B498-43B3-948B-1728B52AA6E4}">
-                <adec:decorative xmlns:adec="http://schemas.microsoft.com/office/drawing/2017/decorative" val="1"/>
-              </a:ext>
-            </a:extLst>
-          </p:cNvPr>
-          <p:cNvSpPr>
-            <a:spLocks noGrp="1" noRot="1" noChangeAspect="1" noMove="1" noResize="1" noEditPoints="1" noAdjustHandles="1" noChangeArrowheads="1" noChangeShapeType="1" noTextEdit="1"/>
-          </p:cNvSpPr>
-          <p:nvPr>
-            <p:extLst>
-              <p:ext uri="{386F3935-93C4-4BCD-93E2-E3B085C9AB24}">
-                <p16:designElem xmlns:p16="http://schemas.microsoft.com/office/powerpoint/2015/main" val="1"/>
-              </p:ext>
-            </p:extLst>
-          </p:nvPr>
-        </p:nvSpPr>
-        <p:spPr>
-          <a:xfrm>
-            <a:off x="0" y="0"/>
-            <a:ext cx="12188952" cy="6858000"/>
-          </a:xfrm>
-          <a:prstGeom prst="rect">
-            <a:avLst/>
-          </a:prstGeom>
-          <a:ln>
-            <a:noFill/>
-          </a:ln>
-        </p:spPr>
-        <p:style>
-          <a:lnRef idx="2">
-            <a:schemeClr val="accent1">
-              <a:shade val="50000"/>
-            </a:schemeClr>
-          </a:lnRef>
-          <a:fillRef idx="1">
-            <a:schemeClr val="accent1"/>
-          </a:fillRef>
-          <a:effectRef idx="0">
-            <a:schemeClr val="accent1"/>
-          </a:effectRef>
-          <a:fontRef idx="minor">
-            <a:schemeClr val="lt1"/>
-          </a:fontRef>
-        </p:style>
-        <p:txBody>
-          <a:bodyPr rtlCol="0" anchor="ctr"/>
-          <a:lstStyle/>
-          <a:p>
-            <a:pPr algn="ctr"/>
-            <a:endParaRPr lang="en-US"/>
-          </a:p>
-        </p:txBody>
-      </p:sp>
-      <p:sp>
-        <p:nvSpPr>
-          <p:cNvPr id="2" name="Title 1">
-            <a:extLst>
-              <a:ext uri="{FF2B5EF4-FFF2-40B4-BE49-F238E27FC236}">
-                <a16:creationId xmlns:a16="http://schemas.microsoft.com/office/drawing/2014/main" id="{1CA83CCB-8D09-8AF7-283C-93A870E646E0}"/>
-              </a:ext>
-            </a:extLst>
-          </p:cNvPr>
-          <p:cNvSpPr>
-            <a:spLocks noGrp="1"/>
-          </p:cNvSpPr>
-          <p:nvPr>
-            <p:ph type="title"/>
-          </p:nvPr>
-        </p:nvSpPr>
-        <p:spPr>
-          <a:xfrm>
-            <a:off x="630918" y="643465"/>
-            <a:ext cx="3895359" cy="1846615"/>
-          </a:xfrm>
-        </p:spPr>
-        <p:txBody>
-          <a:bodyPr vert="horz" lIns="91440" tIns="45720" rIns="91440" bIns="45720" rtlCol="0" anchor="b">
-            <a:normAutofit/>
-          </a:bodyPr>
-          <a:lstStyle/>
-          <a:p>
-            <a:r>
-              <a:rPr lang="en-US" sz="3000" dirty="0"/>
-              <a:t>System Development - Frontend User Interaction</a:t>
-            </a:r>
-          </a:p>
-        </p:txBody>
-      </p:sp>
-      <p:sp>
-        <p:nvSpPr>
-          <p:cNvPr id="35" name="sketch line">
-            <a:extLst>
-              <a:ext uri="{FF2B5EF4-FFF2-40B4-BE49-F238E27FC236}">
-                <a16:creationId xmlns:a16="http://schemas.microsoft.com/office/drawing/2014/main" id="{0059B5C0-FEC8-4370-AF45-02E3AEF6FA6D}"/>
-              </a:ext>
-              <a:ext uri="{C183D7F6-B498-43B3-948B-1728B52AA6E4}">
-                <adec:decorative xmlns:adec="http://schemas.microsoft.com/office/drawing/2017/decorative" val="1"/>
-              </a:ext>
-            </a:extLst>
-          </p:cNvPr>
-          <p:cNvSpPr>
-            <a:spLocks noGrp="1" noRot="1" noChangeAspect="1" noMove="1" noResize="1" noEditPoints="1" noAdjustHandles="1" noChangeArrowheads="1" noChangeShapeType="1" noTextEdit="1"/>
-          </p:cNvSpPr>
-          <p:nvPr>
-            <p:extLst>
-              <p:ext uri="{386F3935-93C4-4BCD-93E2-E3B085C9AB24}">
-                <p16:designElem xmlns:p16="http://schemas.microsoft.com/office/powerpoint/2015/main" val="1"/>
-              </p:ext>
-            </p:extLst>
-          </p:nvPr>
-        </p:nvSpPr>
-        <p:spPr>
-          <a:xfrm>
-            <a:off x="640080" y="2659144"/>
-            <a:ext cx="3566160" cy="18288"/>
-          </a:xfrm>
-          <a:custGeom>
-            <a:avLst/>
-            <a:gdLst>
-              <a:gd name="connsiteX0" fmla="*/ 0 w 3566160"/>
-              <a:gd name="connsiteY0" fmla="*/ 0 h 18288"/>
-              <a:gd name="connsiteX1" fmla="*/ 665683 w 3566160"/>
-              <a:gd name="connsiteY1" fmla="*/ 0 h 18288"/>
-              <a:gd name="connsiteX2" fmla="*/ 1331366 w 3566160"/>
-              <a:gd name="connsiteY2" fmla="*/ 0 h 18288"/>
-              <a:gd name="connsiteX3" fmla="*/ 1818742 w 3566160"/>
-              <a:gd name="connsiteY3" fmla="*/ 0 h 18288"/>
-              <a:gd name="connsiteX4" fmla="*/ 2413102 w 3566160"/>
-              <a:gd name="connsiteY4" fmla="*/ 0 h 18288"/>
-              <a:gd name="connsiteX5" fmla="*/ 2936138 w 3566160"/>
-              <a:gd name="connsiteY5" fmla="*/ 0 h 18288"/>
-              <a:gd name="connsiteX6" fmla="*/ 3566160 w 3566160"/>
-              <a:gd name="connsiteY6" fmla="*/ 0 h 18288"/>
-              <a:gd name="connsiteX7" fmla="*/ 3566160 w 3566160"/>
-              <a:gd name="connsiteY7" fmla="*/ 18288 h 18288"/>
-              <a:gd name="connsiteX8" fmla="*/ 2971800 w 3566160"/>
-              <a:gd name="connsiteY8" fmla="*/ 18288 h 18288"/>
-              <a:gd name="connsiteX9" fmla="*/ 2448763 w 3566160"/>
-              <a:gd name="connsiteY9" fmla="*/ 18288 h 18288"/>
-              <a:gd name="connsiteX10" fmla="*/ 1854403 w 3566160"/>
-              <a:gd name="connsiteY10" fmla="*/ 18288 h 18288"/>
-              <a:gd name="connsiteX11" fmla="*/ 1295705 w 3566160"/>
-              <a:gd name="connsiteY11" fmla="*/ 18288 h 18288"/>
-              <a:gd name="connsiteX12" fmla="*/ 772668 w 3566160"/>
-              <a:gd name="connsiteY12" fmla="*/ 18288 h 18288"/>
-              <a:gd name="connsiteX13" fmla="*/ 0 w 3566160"/>
-              <a:gd name="connsiteY13" fmla="*/ 18288 h 18288"/>
-              <a:gd name="connsiteX14" fmla="*/ 0 w 3566160"/>
-              <a:gd name="connsiteY14" fmla="*/ 0 h 18288"/>
-            </a:gdLst>
-            <a:ahLst/>
-            <a:cxnLst>
-              <a:cxn ang="0">
-                <a:pos x="connsiteX0" y="connsiteY0"/>
-              </a:cxn>
-              <a:cxn ang="0">
-                <a:pos x="connsiteX1" y="connsiteY1"/>
-              </a:cxn>
-              <a:cxn ang="0">
-                <a:pos x="connsiteX2" y="connsiteY2"/>
-              </a:cxn>
-              <a:cxn ang="0">
-                <a:pos x="connsiteX3" y="connsiteY3"/>
-              </a:cxn>
-              <a:cxn ang="0">
-                <a:pos x="connsiteX4" y="connsiteY4"/>
-              </a:cxn>
-              <a:cxn ang="0">
-                <a:pos x="connsiteX5" y="connsiteY5"/>
-              </a:cxn>
-              <a:cxn ang="0">
-                <a:pos x="connsiteX6" y="connsiteY6"/>
-              </a:cxn>
-              <a:cxn ang="0">
-                <a:pos x="connsiteX7" y="connsiteY7"/>
-              </a:cxn>
-              <a:cxn ang="0">
-                <a:pos x="connsiteX8" y="connsiteY8"/>
-              </a:cxn>
-              <a:cxn ang="0">
-                <a:pos x="connsiteX9" y="connsiteY9"/>
-              </a:cxn>
-              <a:cxn ang="0">
-                <a:pos x="connsiteX10" y="connsiteY10"/>
-              </a:cxn>
-              <a:cxn ang="0">
-                <a:pos x="connsiteX11" y="connsiteY11"/>
-              </a:cxn>
-              <a:cxn ang="0">
-                <a:pos x="connsiteX12" y="connsiteY12"/>
-              </a:cxn>
-              <a:cxn ang="0">
-                <a:pos x="connsiteX13" y="connsiteY13"/>
-              </a:cxn>
-              <a:cxn ang="0">
-                <a:pos x="connsiteX14" y="connsiteY14"/>
-              </a:cxn>
-            </a:cxnLst>
-            <a:rect l="l" t="t" r="r" b="b"/>
-            <a:pathLst>
-              <a:path w="3566160" h="18288" fill="none" extrusionOk="0">
-                <a:moveTo>
-                  <a:pt x="0" y="0"/>
-                </a:moveTo>
-                <a:cubicBezTo>
-                  <a:pt x="222644" y="15773"/>
-                  <a:pt x="447078" y="-30288"/>
-                  <a:pt x="665683" y="0"/>
-                </a:cubicBezTo>
-                <a:cubicBezTo>
-                  <a:pt x="884288" y="30288"/>
-                  <a:pt x="1132425" y="-6167"/>
-                  <a:pt x="1331366" y="0"/>
-                </a:cubicBezTo>
-                <a:cubicBezTo>
-                  <a:pt x="1530307" y="6167"/>
-                  <a:pt x="1680942" y="17562"/>
-                  <a:pt x="1818742" y="0"/>
-                </a:cubicBezTo>
-                <a:cubicBezTo>
-                  <a:pt x="1956542" y="-17562"/>
-                  <a:pt x="2130227" y="23032"/>
-                  <a:pt x="2413102" y="0"/>
-                </a:cubicBezTo>
-                <a:cubicBezTo>
-                  <a:pt x="2695977" y="-23032"/>
-                  <a:pt x="2679988" y="-13260"/>
-                  <a:pt x="2936138" y="0"/>
-                </a:cubicBezTo>
-                <a:cubicBezTo>
-                  <a:pt x="3192288" y="13260"/>
-                  <a:pt x="3378668" y="16268"/>
-                  <a:pt x="3566160" y="0"/>
-                </a:cubicBezTo>
-                <a:cubicBezTo>
-                  <a:pt x="3566199" y="7328"/>
-                  <a:pt x="3566779" y="9982"/>
-                  <a:pt x="3566160" y="18288"/>
-                </a:cubicBezTo>
-                <a:cubicBezTo>
-                  <a:pt x="3315478" y="45899"/>
-                  <a:pt x="3188272" y="-7574"/>
-                  <a:pt x="2971800" y="18288"/>
-                </a:cubicBezTo>
-                <a:cubicBezTo>
-                  <a:pt x="2755328" y="44150"/>
-                  <a:pt x="2598570" y="34692"/>
-                  <a:pt x="2448763" y="18288"/>
-                </a:cubicBezTo>
-                <a:cubicBezTo>
-                  <a:pt x="2298956" y="1884"/>
-                  <a:pt x="2011344" y="-7043"/>
-                  <a:pt x="1854403" y="18288"/>
-                </a:cubicBezTo>
-                <a:cubicBezTo>
-                  <a:pt x="1697462" y="43619"/>
-                  <a:pt x="1444994" y="618"/>
-                  <a:pt x="1295705" y="18288"/>
-                </a:cubicBezTo>
-                <a:cubicBezTo>
-                  <a:pt x="1146416" y="35958"/>
-                  <a:pt x="965401" y="42167"/>
-                  <a:pt x="772668" y="18288"/>
-                </a:cubicBezTo>
-                <a:cubicBezTo>
-                  <a:pt x="579935" y="-5591"/>
-                  <a:pt x="352420" y="-19381"/>
-                  <a:pt x="0" y="18288"/>
-                </a:cubicBezTo>
-                <a:cubicBezTo>
-                  <a:pt x="-593" y="9736"/>
-                  <a:pt x="244" y="6610"/>
-                  <a:pt x="0" y="0"/>
-                </a:cubicBezTo>
-                <a:close/>
-              </a:path>
-              <a:path w="3566160" h="18288" stroke="0" extrusionOk="0">
-                <a:moveTo>
-                  <a:pt x="0" y="0"/>
-                </a:moveTo>
-                <a:cubicBezTo>
-                  <a:pt x="169947" y="-5008"/>
-                  <a:pt x="340602" y="-17518"/>
-                  <a:pt x="594360" y="0"/>
-                </a:cubicBezTo>
-                <a:cubicBezTo>
-                  <a:pt x="848118" y="17518"/>
-                  <a:pt x="997921" y="8866"/>
-                  <a:pt x="1224382" y="0"/>
-                </a:cubicBezTo>
-                <a:cubicBezTo>
-                  <a:pt x="1450843" y="-8866"/>
-                  <a:pt x="1572343" y="8392"/>
-                  <a:pt x="1783080" y="0"/>
-                </a:cubicBezTo>
-                <a:cubicBezTo>
-                  <a:pt x="1993817" y="-8392"/>
-                  <a:pt x="2266728" y="2126"/>
-                  <a:pt x="2448763" y="0"/>
-                </a:cubicBezTo>
-                <a:cubicBezTo>
-                  <a:pt x="2630798" y="-2126"/>
-                  <a:pt x="2815508" y="-13843"/>
-                  <a:pt x="3043123" y="0"/>
-                </a:cubicBezTo>
-                <a:cubicBezTo>
-                  <a:pt x="3270738" y="13843"/>
-                  <a:pt x="3420568" y="2184"/>
-                  <a:pt x="3566160" y="0"/>
-                </a:cubicBezTo>
-                <a:cubicBezTo>
-                  <a:pt x="3566487" y="8595"/>
-                  <a:pt x="3566088" y="13110"/>
-                  <a:pt x="3566160" y="18288"/>
-                </a:cubicBezTo>
-                <a:cubicBezTo>
-                  <a:pt x="3421748" y="9323"/>
-                  <a:pt x="3176383" y="-3939"/>
-                  <a:pt x="2971800" y="18288"/>
-                </a:cubicBezTo>
-                <a:cubicBezTo>
-                  <a:pt x="2767217" y="40515"/>
-                  <a:pt x="2590769" y="4336"/>
-                  <a:pt x="2306117" y="18288"/>
-                </a:cubicBezTo>
-                <a:cubicBezTo>
-                  <a:pt x="2021465" y="32240"/>
-                  <a:pt x="1860727" y="-9280"/>
-                  <a:pt x="1676095" y="18288"/>
-                </a:cubicBezTo>
-                <a:cubicBezTo>
-                  <a:pt x="1491463" y="45856"/>
-                  <a:pt x="1329173" y="5765"/>
-                  <a:pt x="1153058" y="18288"/>
-                </a:cubicBezTo>
-                <a:cubicBezTo>
-                  <a:pt x="976943" y="30811"/>
-                  <a:pt x="895178" y="4751"/>
-                  <a:pt x="665683" y="18288"/>
-                </a:cubicBezTo>
-                <a:cubicBezTo>
-                  <a:pt x="436189" y="31825"/>
-                  <a:pt x="302924" y="2002"/>
-                  <a:pt x="0" y="18288"/>
-                </a:cubicBezTo>
-                <a:cubicBezTo>
-                  <a:pt x="822" y="10564"/>
-                  <a:pt x="-23" y="4571"/>
-                  <a:pt x="0" y="0"/>
-                </a:cubicBezTo>
-                <a:close/>
-              </a:path>
-            </a:pathLst>
-          </a:custGeom>
-          <a:solidFill>
-            <a:schemeClr val="accent2"/>
-          </a:solidFill>
-          <a:ln w="41275" cap="rnd">
-            <a:solidFill>
-              <a:schemeClr val="accent2"/>
-            </a:solidFill>
-            <a:round/>
-            <a:extLst>
-              <a:ext uri="{C807C97D-BFC1-408E-A445-0C87EB9F89A2}">
-                <ask:lineSketchStyleProps xmlns:ask="http://schemas.microsoft.com/office/drawing/2018/sketchyshapes" sd="2448976505">
-                  <a:prstGeom prst="rect">
-                    <a:avLst/>
-                  </a:prstGeom>
-                  <ask:type>
-                    <ask:lineSketchFreehand/>
-                  </ask:type>
-                </ask:lineSketchStyleProps>
-              </a:ext>
-            </a:extLst>
-          </a:ln>
-        </p:spPr>
-        <p:style>
-          <a:lnRef idx="2">
-            <a:schemeClr val="accent1">
-              <a:shade val="50000"/>
-            </a:schemeClr>
-          </a:lnRef>
-          <a:fillRef idx="1">
-            <a:schemeClr val="accent1"/>
-          </a:fillRef>
-          <a:effectRef idx="0">
-            <a:schemeClr val="accent1"/>
-          </a:effectRef>
-          <a:fontRef idx="minor">
-            <a:schemeClr val="lt1"/>
-          </a:fontRef>
-        </p:style>
-        <p:txBody>
-          <a:bodyPr rtlCol="0" anchor="ctr"/>
-          <a:lstStyle/>
-          <a:p>
-            <a:pPr algn="ctr"/>
-            <a:endParaRPr lang="en-US"/>
-          </a:p>
-        </p:txBody>
-      </p:sp>
-      <p:pic>
-        <p:nvPicPr>
-          <p:cNvPr id="7" name="Content Placeholder 6" descr="A screenshot of a medical finder&#10;&#10;Description automatically generated">
-            <a:extLst>
-              <a:ext uri="{FF2B5EF4-FFF2-40B4-BE49-F238E27FC236}">
-                <a16:creationId xmlns:a16="http://schemas.microsoft.com/office/drawing/2014/main" id="{E9696875-EB48-60D3-3124-B224994AB858}"/>
-              </a:ext>
-            </a:extLst>
-          </p:cNvPr>
-          <p:cNvPicPr>
-            <a:picLocks noChangeAspect="1"/>
-          </p:cNvPicPr>
-          <p:nvPr/>
-        </p:nvPicPr>
-        <p:blipFill>
-          <a:blip r:embed="rId2"/>
-          <a:stretch>
-            <a:fillRect/>
-          </a:stretch>
-        </p:blipFill>
-        <p:spPr>
-          <a:xfrm>
-            <a:off x="4992624" y="299072"/>
-            <a:ext cx="3099816" cy="3187471"/>
-          </a:xfrm>
-          <a:prstGeom prst="rect">
-            <a:avLst/>
-          </a:prstGeom>
-        </p:spPr>
-      </p:pic>
-      <p:pic>
-        <p:nvPicPr>
-          <p:cNvPr id="14" name="Picture 13" descr="A screenshot of a computer&#10;&#10;Description automatically generated">
-            <a:extLst>
-              <a:ext uri="{FF2B5EF4-FFF2-40B4-BE49-F238E27FC236}">
-                <a16:creationId xmlns:a16="http://schemas.microsoft.com/office/drawing/2014/main" id="{67A6F2AB-FE94-11BF-8AEA-86A7FE103563}"/>
-              </a:ext>
-            </a:extLst>
-          </p:cNvPr>
-          <p:cNvPicPr>
-            <a:picLocks noChangeAspect="1"/>
-          </p:cNvPicPr>
-          <p:nvPr/>
-        </p:nvPicPr>
-        <p:blipFill>
-          <a:blip r:embed="rId3"/>
-          <a:stretch>
-            <a:fillRect/>
-          </a:stretch>
-        </p:blipFill>
-        <p:spPr>
-          <a:xfrm>
-            <a:off x="8247888" y="468496"/>
-            <a:ext cx="3785616" cy="2034767"/>
-          </a:xfrm>
-          <a:prstGeom prst="rect">
-            <a:avLst/>
-          </a:prstGeom>
-        </p:spPr>
-      </p:pic>
-      <p:pic>
-        <p:nvPicPr>
-          <p:cNvPr id="12" name="Picture 11" descr="A screenshot of a medical search&#10;&#10;Description automatically generated">
-            <a:extLst>
-              <a:ext uri="{FF2B5EF4-FFF2-40B4-BE49-F238E27FC236}">
-                <a16:creationId xmlns:a16="http://schemas.microsoft.com/office/drawing/2014/main" id="{A88B5E25-DE40-1FF2-06F0-88856DC47999}"/>
-              </a:ext>
-            </a:extLst>
-          </p:cNvPr>
-          <p:cNvPicPr>
-            <a:picLocks noChangeAspect="1"/>
-          </p:cNvPicPr>
-          <p:nvPr/>
-        </p:nvPicPr>
-        <p:blipFill>
-          <a:blip r:embed="rId4"/>
-          <a:stretch>
-            <a:fillRect/>
-          </a:stretch>
-        </p:blipFill>
-        <p:spPr>
-          <a:xfrm>
-            <a:off x="5370488" y="3795522"/>
-            <a:ext cx="2344087" cy="2398044"/>
-          </a:xfrm>
-          <a:prstGeom prst="rect">
-            <a:avLst/>
-          </a:prstGeom>
-        </p:spPr>
-      </p:pic>
-      <p:pic>
-        <p:nvPicPr>
-          <p:cNvPr id="10" name="Picture 9" descr="A map of a city&#10;&#10;Description automatically generated">
-            <a:extLst>
-              <a:ext uri="{FF2B5EF4-FFF2-40B4-BE49-F238E27FC236}">
-                <a16:creationId xmlns:a16="http://schemas.microsoft.com/office/drawing/2014/main" id="{813E4A9C-8786-0E94-3417-E7DF8FAC8F3E}"/>
-              </a:ext>
-            </a:extLst>
-          </p:cNvPr>
-          <p:cNvPicPr>
-            <a:picLocks noChangeAspect="1"/>
-          </p:cNvPicPr>
-          <p:nvPr/>
-        </p:nvPicPr>
-        <p:blipFill>
-          <a:blip r:embed="rId5"/>
-          <a:stretch>
-            <a:fillRect/>
-          </a:stretch>
-        </p:blipFill>
-        <p:spPr>
-          <a:xfrm>
-            <a:off x="8570066" y="2971759"/>
-            <a:ext cx="3141260" cy="3221807"/>
-          </a:xfrm>
-          <a:prstGeom prst="rect">
-            <a:avLst/>
-          </a:prstGeom>
-        </p:spPr>
-      </p:pic>
-      <p:sp>
-        <p:nvSpPr>
-          <p:cNvPr id="17" name="Title 1">
-            <a:extLst>
-              <a:ext uri="{FF2B5EF4-FFF2-40B4-BE49-F238E27FC236}">
-                <a16:creationId xmlns:a16="http://schemas.microsoft.com/office/drawing/2014/main" id="{01EFECAA-F6C8-5FC9-18E1-14B1B0451B98}"/>
-              </a:ext>
-            </a:extLst>
-          </p:cNvPr>
-          <p:cNvSpPr txBox="1">
-            <a:spLocks/>
-          </p:cNvSpPr>
-          <p:nvPr/>
-        </p:nvSpPr>
-        <p:spPr>
-          <a:xfrm>
-            <a:off x="619638" y="3187512"/>
-            <a:ext cx="3895359" cy="1846615"/>
-          </a:xfrm>
-          <a:prstGeom prst="rect">
-            <a:avLst/>
-          </a:prstGeom>
-        </p:spPr>
-        <p:txBody>
-          <a:bodyPr vert="horz" lIns="91440" tIns="45720" rIns="91440" bIns="45720" rtlCol="0" anchor="b">
-            <a:normAutofit/>
-          </a:bodyPr>
-          <a:lstStyle>
-            <a:lvl1pPr algn="l" defTabSz="914400" rtl="0" eaLnBrk="1" latinLnBrk="0" hangingPunct="1">
-              <a:lnSpc>
-                <a:spcPct val="90000"/>
-              </a:lnSpc>
-              <a:spcBef>
-                <a:spcPct val="0"/>
-              </a:spcBef>
-              <a:buNone/>
-              <a:defRPr sz="3200" kern="1200">
-                <a:solidFill>
-                  <a:schemeClr val="tx1"/>
-                </a:solidFill>
-                <a:latin typeface="+mj-lt"/>
-                <a:ea typeface="+mj-ea"/>
-                <a:cs typeface="+mj-cs"/>
-              </a:defRPr>
-            </a:lvl1pPr>
-          </a:lstStyle>
-          <a:p>
-            <a:endParaRPr lang="en-US" sz="3000" dirty="0"/>
-          </a:p>
-        </p:txBody>
-      </p:sp>
-      <p:sp>
-        <p:nvSpPr>
-          <p:cNvPr id="19" name="Title 1">
-            <a:extLst>
-              <a:ext uri="{FF2B5EF4-FFF2-40B4-BE49-F238E27FC236}">
-                <a16:creationId xmlns:a16="http://schemas.microsoft.com/office/drawing/2014/main" id="{3F6287A4-058A-8345-FF1E-0E53D6D3D44A}"/>
-              </a:ext>
-            </a:extLst>
-          </p:cNvPr>
-          <p:cNvSpPr txBox="1">
-            <a:spLocks/>
-          </p:cNvSpPr>
-          <p:nvPr/>
-        </p:nvSpPr>
-        <p:spPr>
-          <a:xfrm>
-            <a:off x="630917" y="3147929"/>
-            <a:ext cx="3895359" cy="1846615"/>
-          </a:xfrm>
-          <a:prstGeom prst="rect">
-            <a:avLst/>
-          </a:prstGeom>
-        </p:spPr>
-        <p:txBody>
-          <a:bodyPr vert="horz" lIns="91440" tIns="45720" rIns="91440" bIns="45720" rtlCol="0" anchor="b">
-            <a:normAutofit/>
-          </a:bodyPr>
-          <a:lstStyle>
-            <a:lvl1pPr algn="l" defTabSz="914400" rtl="0" eaLnBrk="1" latinLnBrk="0" hangingPunct="1">
-              <a:lnSpc>
-                <a:spcPct val="90000"/>
-              </a:lnSpc>
-              <a:spcBef>
-                <a:spcPct val="0"/>
-              </a:spcBef>
-              <a:buNone/>
-              <a:defRPr sz="3200" kern="1200">
-                <a:solidFill>
-                  <a:schemeClr val="tx1"/>
-                </a:solidFill>
-                <a:latin typeface="+mj-lt"/>
-                <a:ea typeface="+mj-ea"/>
-                <a:cs typeface="+mj-cs"/>
-              </a:defRPr>
-            </a:lvl1pPr>
-          </a:lstStyle>
-          <a:p>
-            <a:r>
-              <a:rPr lang="en-US" sz="2000" dirty="0"/>
-              <a:t>https://emergency-facility-finder-</a:t>
-            </a:r>
-            <a:r>
-              <a:rPr lang="en-US" sz="2000" dirty="0" err="1"/>
-              <a:t>ui.onrender.com</a:t>
-            </a:r>
-            <a:endParaRPr lang="en-US" sz="2000" dirty="0"/>
-          </a:p>
-        </p:txBody>
-      </p:sp>
-    </p:spTree>
-    <p:extLst>
-      <p:ext uri="{BB962C8B-B14F-4D97-AF65-F5344CB8AC3E}">
-        <p14:creationId xmlns:p14="http://schemas.microsoft.com/office/powerpoint/2010/main" val="2664168184"/>
-      </p:ext>
-    </p:extLst>
-  </p:cSld>
-  <p:clrMapOvr>
-    <a:masterClrMapping/>
-  </p:clrMapOvr>
-</p:sld>
-</file>
-
-<file path=ppt/slides/slide11.xml><?xml version="1.0" encoding="utf-8"?>
-<p:sld xmlns:a="http://schemas.openxmlformats.org/drawingml/2006/main" xmlns:r="http://schemas.openxmlformats.org/officeDocument/2006/relationships" xmlns:p="http://schemas.openxmlformats.org/presentationml/2006/main">
-  <p:cSld>
-    <p:bg>
-      <p:bgPr>
-        <a:solidFill>
-          <a:schemeClr val="bg1"/>
-        </a:solidFill>
-        <a:effectLst/>
-      </p:bgPr>
-    </p:bg>
-    <p:spTree>
-      <p:nvGrpSpPr>
-        <p:cNvPr id="1" name=""/>
-        <p:cNvGrpSpPr/>
-        <p:nvPr/>
-      </p:nvGrpSpPr>
-      <p:grpSpPr>
-        <a:xfrm>
-          <a:off x="0" y="0"/>
-          <a:ext cx="0" cy="0"/>
-          <a:chOff x="0" y="0"/>
-          <a:chExt cx="0" cy="0"/>
-        </a:xfrm>
-      </p:grpSpPr>
-      <p:sp useBgFill="1">
-        <p:nvSpPr>
-          <p:cNvPr id="10" name="Rectangle 9">
-            <a:extLst>
-              <a:ext uri="{FF2B5EF4-FFF2-40B4-BE49-F238E27FC236}">
-                <a16:creationId xmlns:a16="http://schemas.microsoft.com/office/drawing/2014/main" id="{2B97F24A-32CE-4C1C-A50D-3016B394DCFB}"/>
-              </a:ext>
-              <a:ext uri="{C183D7F6-B498-43B3-948B-1728B52AA6E4}">
-                <adec:decorative xmlns:adec="http://schemas.microsoft.com/office/drawing/2017/decorative" val="1"/>
-              </a:ext>
-            </a:extLst>
-          </p:cNvPr>
-          <p:cNvSpPr>
-            <a:spLocks noGrp="1" noRot="1" noChangeAspect="1" noMove="1" noResize="1" noEditPoints="1" noAdjustHandles="1" noChangeArrowheads="1" noChangeShapeType="1" noTextEdit="1"/>
-          </p:cNvSpPr>
-          <p:nvPr>
-            <p:extLst>
-              <p:ext uri="{386F3935-93C4-4BCD-93E2-E3B085C9AB24}">
-                <p16:designElem xmlns:p16="http://schemas.microsoft.com/office/powerpoint/2015/main" val="1"/>
-              </p:ext>
-            </p:extLst>
-          </p:nvPr>
-        </p:nvSpPr>
-        <p:spPr>
-          <a:xfrm>
-            <a:off x="0" y="0"/>
-            <a:ext cx="12192000" cy="6858000"/>
-          </a:xfrm>
-          <a:prstGeom prst="rect">
-            <a:avLst/>
-          </a:prstGeom>
-          <a:ln>
-            <a:noFill/>
-          </a:ln>
-        </p:spPr>
-        <p:style>
-          <a:lnRef idx="2">
-            <a:schemeClr val="accent1">
-              <a:shade val="50000"/>
-            </a:schemeClr>
-          </a:lnRef>
-          <a:fillRef idx="1">
-            <a:schemeClr val="accent1"/>
-          </a:fillRef>
-          <a:effectRef idx="0">
-            <a:schemeClr val="accent1"/>
-          </a:effectRef>
-          <a:fontRef idx="minor">
-            <a:schemeClr val="lt1"/>
-          </a:fontRef>
-        </p:style>
-        <p:txBody>
-          <a:bodyPr rtlCol="0" anchor="ctr"/>
-          <a:lstStyle/>
-          <a:p>
-            <a:pPr algn="ctr"/>
-            <a:endParaRPr lang="en-US"/>
-          </a:p>
-        </p:txBody>
-      </p:sp>
-      <p:sp>
-        <p:nvSpPr>
-          <p:cNvPr id="2" name="Title 1">
-            <a:extLst>
-              <a:ext uri="{FF2B5EF4-FFF2-40B4-BE49-F238E27FC236}">
-                <a16:creationId xmlns:a16="http://schemas.microsoft.com/office/drawing/2014/main" id="{F5515DF3-7141-D465-B6A2-A70F48A65E7A}"/>
-              </a:ext>
-            </a:extLst>
-          </p:cNvPr>
-          <p:cNvSpPr>
-            <a:spLocks noGrp="1"/>
-          </p:cNvSpPr>
-          <p:nvPr>
-            <p:ph type="title"/>
-          </p:nvPr>
-        </p:nvSpPr>
-        <p:spPr>
-          <a:xfrm>
-            <a:off x="630936" y="639520"/>
-            <a:ext cx="3429000" cy="1719072"/>
-          </a:xfrm>
-        </p:spPr>
-        <p:txBody>
-          <a:bodyPr vert="horz" lIns="91440" tIns="45720" rIns="91440" bIns="45720" rtlCol="0" anchor="b">
-            <a:normAutofit/>
-          </a:bodyPr>
-          <a:lstStyle/>
-          <a:p>
-            <a:r>
-              <a:rPr lang="en-US" sz="4200" kern="1200">
-                <a:solidFill>
-                  <a:schemeClr val="tx1"/>
-                </a:solidFill>
-                <a:latin typeface="+mj-lt"/>
-                <a:ea typeface="+mj-ea"/>
-                <a:cs typeface="+mj-cs"/>
-              </a:rPr>
-              <a:t>System Testing &amp; Evaluation</a:t>
-            </a:r>
-          </a:p>
-        </p:txBody>
-      </p:sp>
-      <p:sp>
-        <p:nvSpPr>
-          <p:cNvPr id="12" name="sketch line">
-            <a:extLst>
-              <a:ext uri="{FF2B5EF4-FFF2-40B4-BE49-F238E27FC236}">
-                <a16:creationId xmlns:a16="http://schemas.microsoft.com/office/drawing/2014/main" id="{CD8B4F24-440B-49E9-B85D-733523DC064B}"/>
-              </a:ext>
-              <a:ext uri="{C183D7F6-B498-43B3-948B-1728B52AA6E4}">
-                <adec:decorative xmlns:adec="http://schemas.microsoft.com/office/drawing/2017/decorative" val="1"/>
-              </a:ext>
-            </a:extLst>
-          </p:cNvPr>
-          <p:cNvSpPr>
-            <a:spLocks noGrp="1" noRot="1" noChangeAspect="1" noMove="1" noResize="1" noEditPoints="1" noAdjustHandles="1" noChangeArrowheads="1" noChangeShapeType="1" noTextEdit="1"/>
-          </p:cNvSpPr>
-          <p:nvPr>
-            <p:extLst>
-              <p:ext uri="{386F3935-93C4-4BCD-93E2-E3B085C9AB24}">
-                <p16:designElem xmlns:p16="http://schemas.microsoft.com/office/powerpoint/2015/main" val="1"/>
-              </p:ext>
-            </p:extLst>
-          </p:nvPr>
-        </p:nvSpPr>
-        <p:spPr>
-          <a:xfrm>
-            <a:off x="643278" y="2573756"/>
-            <a:ext cx="3255095" cy="18288"/>
-          </a:xfrm>
-          <a:custGeom>
-            <a:avLst/>
-            <a:gdLst>
-              <a:gd name="connsiteX0" fmla="*/ 0 w 3255095"/>
-              <a:gd name="connsiteY0" fmla="*/ 0 h 18288"/>
-              <a:gd name="connsiteX1" fmla="*/ 618468 w 3255095"/>
-              <a:gd name="connsiteY1" fmla="*/ 0 h 18288"/>
-              <a:gd name="connsiteX2" fmla="*/ 1269487 w 3255095"/>
-              <a:gd name="connsiteY2" fmla="*/ 0 h 18288"/>
-              <a:gd name="connsiteX3" fmla="*/ 1953057 w 3255095"/>
-              <a:gd name="connsiteY3" fmla="*/ 0 h 18288"/>
-              <a:gd name="connsiteX4" fmla="*/ 2636627 w 3255095"/>
-              <a:gd name="connsiteY4" fmla="*/ 0 h 18288"/>
-              <a:gd name="connsiteX5" fmla="*/ 3255095 w 3255095"/>
-              <a:gd name="connsiteY5" fmla="*/ 0 h 18288"/>
-              <a:gd name="connsiteX6" fmla="*/ 3255095 w 3255095"/>
-              <a:gd name="connsiteY6" fmla="*/ 18288 h 18288"/>
-              <a:gd name="connsiteX7" fmla="*/ 2538974 w 3255095"/>
-              <a:gd name="connsiteY7" fmla="*/ 18288 h 18288"/>
-              <a:gd name="connsiteX8" fmla="*/ 1822853 w 3255095"/>
-              <a:gd name="connsiteY8" fmla="*/ 18288 h 18288"/>
-              <a:gd name="connsiteX9" fmla="*/ 1171834 w 3255095"/>
-              <a:gd name="connsiteY9" fmla="*/ 18288 h 18288"/>
-              <a:gd name="connsiteX10" fmla="*/ 0 w 3255095"/>
-              <a:gd name="connsiteY10" fmla="*/ 18288 h 18288"/>
-              <a:gd name="connsiteX11" fmla="*/ 0 w 3255095"/>
-              <a:gd name="connsiteY11" fmla="*/ 0 h 18288"/>
-            </a:gdLst>
-            <a:ahLst/>
-            <a:cxnLst>
-              <a:cxn ang="0">
-                <a:pos x="connsiteX0" y="connsiteY0"/>
-              </a:cxn>
-              <a:cxn ang="0">
-                <a:pos x="connsiteX1" y="connsiteY1"/>
-              </a:cxn>
-              <a:cxn ang="0">
-                <a:pos x="connsiteX2" y="connsiteY2"/>
-              </a:cxn>
-              <a:cxn ang="0">
-                <a:pos x="connsiteX3" y="connsiteY3"/>
-              </a:cxn>
-              <a:cxn ang="0">
-                <a:pos x="connsiteX4" y="connsiteY4"/>
-              </a:cxn>
-              <a:cxn ang="0">
-                <a:pos x="connsiteX5" y="connsiteY5"/>
-              </a:cxn>
-              <a:cxn ang="0">
-                <a:pos x="connsiteX6" y="connsiteY6"/>
-              </a:cxn>
-              <a:cxn ang="0">
-                <a:pos x="connsiteX7" y="connsiteY7"/>
-              </a:cxn>
-              <a:cxn ang="0">
-                <a:pos x="connsiteX8" y="connsiteY8"/>
-              </a:cxn>
-              <a:cxn ang="0">
-                <a:pos x="connsiteX9" y="connsiteY9"/>
-              </a:cxn>
-              <a:cxn ang="0">
-                <a:pos x="connsiteX10" y="connsiteY10"/>
-              </a:cxn>
-              <a:cxn ang="0">
-                <a:pos x="connsiteX11" y="connsiteY11"/>
-              </a:cxn>
-            </a:cxnLst>
-            <a:rect l="l" t="t" r="r" b="b"/>
-            <a:pathLst>
-              <a:path w="3255095" h="18288" fill="none" extrusionOk="0">
-                <a:moveTo>
-                  <a:pt x="0" y="0"/>
-                </a:moveTo>
-                <a:cubicBezTo>
-                  <a:pt x="240201" y="-22123"/>
-                  <a:pt x="462021" y="-19623"/>
-                  <a:pt x="618468" y="0"/>
-                </a:cubicBezTo>
-                <a:cubicBezTo>
-                  <a:pt x="774915" y="19623"/>
-                  <a:pt x="974734" y="2035"/>
-                  <a:pt x="1269487" y="0"/>
-                </a:cubicBezTo>
-                <a:cubicBezTo>
-                  <a:pt x="1564240" y="-2035"/>
-                  <a:pt x="1733579" y="10639"/>
-                  <a:pt x="1953057" y="0"/>
-                </a:cubicBezTo>
-                <a:cubicBezTo>
-                  <a:pt x="2172535" y="-10639"/>
-                  <a:pt x="2453962" y="14018"/>
-                  <a:pt x="2636627" y="0"/>
-                </a:cubicBezTo>
-                <a:cubicBezTo>
-                  <a:pt x="2819292" y="-14018"/>
-                  <a:pt x="3121375" y="5399"/>
-                  <a:pt x="3255095" y="0"/>
-                </a:cubicBezTo>
-                <a:cubicBezTo>
-                  <a:pt x="3254386" y="8157"/>
-                  <a:pt x="3254682" y="12125"/>
-                  <a:pt x="3255095" y="18288"/>
-                </a:cubicBezTo>
-                <a:cubicBezTo>
-                  <a:pt x="3088545" y="23203"/>
-                  <a:pt x="2687475" y="7419"/>
-                  <a:pt x="2538974" y="18288"/>
-                </a:cubicBezTo>
-                <a:cubicBezTo>
-                  <a:pt x="2390473" y="29157"/>
-                  <a:pt x="2137381" y="-8959"/>
-                  <a:pt x="1822853" y="18288"/>
-                </a:cubicBezTo>
-                <a:cubicBezTo>
-                  <a:pt x="1508325" y="45535"/>
-                  <a:pt x="1466437" y="20385"/>
-                  <a:pt x="1171834" y="18288"/>
-                </a:cubicBezTo>
-                <a:cubicBezTo>
-                  <a:pt x="877231" y="16191"/>
-                  <a:pt x="561097" y="37643"/>
-                  <a:pt x="0" y="18288"/>
-                </a:cubicBezTo>
-                <a:cubicBezTo>
-                  <a:pt x="-46" y="12483"/>
-                  <a:pt x="-203" y="6491"/>
-                  <a:pt x="0" y="0"/>
-                </a:cubicBezTo>
-                <a:close/>
-              </a:path>
-              <a:path w="3255095" h="18288" stroke="0" extrusionOk="0">
-                <a:moveTo>
-                  <a:pt x="0" y="0"/>
-                </a:moveTo>
-                <a:cubicBezTo>
-                  <a:pt x="291965" y="19429"/>
-                  <a:pt x="363155" y="8568"/>
-                  <a:pt x="618468" y="0"/>
-                </a:cubicBezTo>
-                <a:cubicBezTo>
-                  <a:pt x="873781" y="-8568"/>
-                  <a:pt x="904459" y="-19505"/>
-                  <a:pt x="1171834" y="0"/>
-                </a:cubicBezTo>
-                <a:cubicBezTo>
-                  <a:pt x="1439209" y="19505"/>
-                  <a:pt x="1744369" y="9790"/>
-                  <a:pt x="1887955" y="0"/>
-                </a:cubicBezTo>
-                <a:cubicBezTo>
-                  <a:pt x="2031541" y="-9790"/>
-                  <a:pt x="2346378" y="21240"/>
-                  <a:pt x="2506423" y="0"/>
-                </a:cubicBezTo>
-                <a:cubicBezTo>
-                  <a:pt x="2666468" y="-21240"/>
-                  <a:pt x="2990257" y="30414"/>
-                  <a:pt x="3255095" y="0"/>
-                </a:cubicBezTo>
-                <a:cubicBezTo>
-                  <a:pt x="3254831" y="4493"/>
-                  <a:pt x="3255479" y="9472"/>
-                  <a:pt x="3255095" y="18288"/>
-                </a:cubicBezTo>
-                <a:cubicBezTo>
-                  <a:pt x="3120743" y="16690"/>
-                  <a:pt x="2759628" y="42462"/>
-                  <a:pt x="2604076" y="18288"/>
-                </a:cubicBezTo>
-                <a:cubicBezTo>
-                  <a:pt x="2448524" y="-5886"/>
-                  <a:pt x="2184336" y="19599"/>
-                  <a:pt x="1887955" y="18288"/>
-                </a:cubicBezTo>
-                <a:cubicBezTo>
-                  <a:pt x="1591574" y="16977"/>
-                  <a:pt x="1548845" y="6870"/>
-                  <a:pt x="1334589" y="18288"/>
-                </a:cubicBezTo>
-                <a:cubicBezTo>
-                  <a:pt x="1120333" y="29706"/>
-                  <a:pt x="996014" y="9662"/>
-                  <a:pt x="683570" y="18288"/>
-                </a:cubicBezTo>
-                <a:cubicBezTo>
-                  <a:pt x="371126" y="26914"/>
-                  <a:pt x="198687" y="16167"/>
-                  <a:pt x="0" y="18288"/>
-                </a:cubicBezTo>
-                <a:cubicBezTo>
-                  <a:pt x="843" y="9577"/>
-                  <a:pt x="371" y="6900"/>
-                  <a:pt x="0" y="0"/>
-                </a:cubicBezTo>
-                <a:close/>
-              </a:path>
-            </a:pathLst>
-          </a:custGeom>
-          <a:solidFill>
-            <a:schemeClr val="accent2"/>
-          </a:solidFill>
-          <a:ln w="38100" cap="rnd">
-            <a:solidFill>
-              <a:schemeClr val="accent2"/>
-            </a:solidFill>
-            <a:round/>
-            <a:extLst>
-              <a:ext uri="{C807C97D-BFC1-408E-A445-0C87EB9F89A2}">
-                <ask:lineSketchStyleProps xmlns:ask="http://schemas.microsoft.com/office/drawing/2018/sketchyshapes" sd="1219033472">
-                  <a:prstGeom prst="rect">
-                    <a:avLst/>
-                  </a:prstGeom>
-                  <ask:type>
-                    <ask:lineSketchFreehand/>
-                  </ask:type>
-                </ask:lineSketchStyleProps>
-              </a:ext>
-            </a:extLst>
-          </a:ln>
-        </p:spPr>
-        <p:style>
-          <a:lnRef idx="2">
-            <a:schemeClr val="accent1">
-              <a:shade val="50000"/>
-            </a:schemeClr>
-          </a:lnRef>
-          <a:fillRef idx="1">
-            <a:schemeClr val="accent1"/>
-          </a:fillRef>
-          <a:effectRef idx="0">
-            <a:schemeClr val="accent1"/>
-          </a:effectRef>
-          <a:fontRef idx="minor">
-            <a:schemeClr val="lt1"/>
-          </a:fontRef>
-        </p:style>
-        <p:txBody>
-          <a:bodyPr rtlCol="0" anchor="ctr"/>
-          <a:lstStyle/>
-          <a:p>
-            <a:pPr algn="ctr"/>
-            <a:endParaRPr lang="en-US"/>
-          </a:p>
-        </p:txBody>
-      </p:sp>
-      <p:sp>
-        <p:nvSpPr>
-          <p:cNvPr id="4" name="Text Placeholder 3">
-            <a:extLst>
-              <a:ext uri="{FF2B5EF4-FFF2-40B4-BE49-F238E27FC236}">
-                <a16:creationId xmlns:a16="http://schemas.microsoft.com/office/drawing/2014/main" id="{E6C175ED-0349-D0AC-A4F6-1ECAEA9CA88D}"/>
-              </a:ext>
-            </a:extLst>
-          </p:cNvPr>
-          <p:cNvSpPr>
-            <a:spLocks noGrp="1"/>
-          </p:cNvSpPr>
-          <p:nvPr>
-            <p:ph type="body" sz="half" idx="2"/>
-          </p:nvPr>
-        </p:nvSpPr>
-        <p:spPr>
-          <a:xfrm>
-            <a:off x="630936" y="2807208"/>
-            <a:ext cx="3429000" cy="3410712"/>
-          </a:xfrm>
-        </p:spPr>
-        <p:txBody>
-          <a:bodyPr vert="horz" lIns="91440" tIns="45720" rIns="91440" bIns="45720" rtlCol="0" anchor="t">
-            <a:normAutofit/>
-          </a:bodyPr>
-          <a:lstStyle/>
-          <a:p>
-            <a:r>
-              <a:rPr lang="en-US" sz="2200" b="1" dirty="0"/>
-              <a:t>Backend Testing:</a:t>
-            </a:r>
-            <a:r>
-              <a:rPr lang="en-US" sz="2200" dirty="0"/>
-              <a:t> </a:t>
-            </a:r>
-            <a:r>
-              <a:rPr lang="en-US" sz="2200" dirty="0" err="1"/>
-              <a:t>RSpec</a:t>
-            </a:r>
-            <a:r>
-              <a:rPr lang="en-US" sz="2200" dirty="0"/>
-              <a:t>, 58 tests, 82.35% coverage </a:t>
-            </a:r>
-            <a:br>
-              <a:rPr lang="en-US" sz="2200" dirty="0"/>
-            </a:br>
-            <a:r>
-              <a:rPr lang="en-US" sz="2200" b="1" dirty="0"/>
-              <a:t>User Feedback (Informal):</a:t>
-            </a:r>
-            <a:r>
-              <a:rPr lang="en-US" sz="2200" dirty="0"/>
-              <a:t> Positive reception, intuitive. Rehab anecdote.</a:t>
-            </a:r>
-          </a:p>
-          <a:p>
-            <a:r>
-              <a:rPr lang="en-US" sz="2200" b="1" dirty="0"/>
-              <a:t>Proposed Formal Usability Testing</a:t>
-            </a:r>
-          </a:p>
-        </p:txBody>
-      </p:sp>
-      <p:pic>
-        <p:nvPicPr>
-          <p:cNvPr id="5" name="Content Placeholder 4">
-            <a:extLst>
-              <a:ext uri="{FF2B5EF4-FFF2-40B4-BE49-F238E27FC236}">
-                <a16:creationId xmlns:a16="http://schemas.microsoft.com/office/drawing/2014/main" id="{B8E4E544-C856-253E-5770-645A3F04AC95}"/>
-              </a:ext>
-            </a:extLst>
-          </p:cNvPr>
-          <p:cNvPicPr>
-            <a:picLocks noGrp="1" noChangeAspect="1"/>
-          </p:cNvPicPr>
-          <p:nvPr>
-            <p:ph idx="1"/>
-          </p:nvPr>
-        </p:nvPicPr>
-        <p:blipFill>
-          <a:blip r:embed="rId3"/>
-          <a:stretch>
-            <a:fillRect/>
-          </a:stretch>
-        </p:blipFill>
-        <p:spPr>
-          <a:xfrm>
-            <a:off x="4654296" y="1375143"/>
-            <a:ext cx="6903720" cy="4107713"/>
-          </a:xfrm>
-          <a:prstGeom prst="rect">
-            <a:avLst/>
-          </a:prstGeom>
-        </p:spPr>
-      </p:pic>
-    </p:spTree>
-    <p:extLst>
-      <p:ext uri="{BB962C8B-B14F-4D97-AF65-F5344CB8AC3E}">
-        <p14:creationId xmlns:p14="http://schemas.microsoft.com/office/powerpoint/2010/main" val="1572593086"/>
-      </p:ext>
-    </p:extLst>
-  </p:cSld>
-  <p:clrMapOvr>
-    <a:masterClrMapping/>
-  </p:clrMapOvr>
-</p:sld>
-</file>
-
-<file path=ppt/slides/slide12.xml><?xml version="1.0" encoding="utf-8"?>
-<p:sld xmlns:a="http://schemas.openxmlformats.org/drawingml/2006/main" xmlns:r="http://schemas.openxmlformats.org/officeDocument/2006/relationships" xmlns:p="http://schemas.openxmlformats.org/presentationml/2006/main">
-  <p:cSld>
-    <p:bg>
-      <p:bgPr>
-        <a:solidFill>
-          <a:schemeClr val="bg1"/>
-        </a:solidFill>
-        <a:effectLst/>
-      </p:bgPr>
-    </p:bg>
-    <p:spTree>
-      <p:nvGrpSpPr>
-        <p:cNvPr id="1" name=""/>
-        <p:cNvGrpSpPr/>
-        <p:nvPr/>
-      </p:nvGrpSpPr>
-      <p:grpSpPr>
-        <a:xfrm>
-          <a:off x="0" y="0"/>
-          <a:ext cx="0" cy="0"/>
-          <a:chOff x="0" y="0"/>
-          <a:chExt cx="0" cy="0"/>
-        </a:xfrm>
-      </p:grpSpPr>
-      <p:sp useBgFill="1">
-        <p:nvSpPr>
           <p:cNvPr id="9" name="Rectangle 8">
             <a:extLst>
               <a:ext uri="{FF2B5EF4-FFF2-40B4-BE49-F238E27FC236}">
@@ -12490,16 +7629,12 @@
               <a:buChar char="•"/>
             </a:pPr>
             <a:r>
+              <a:rPr lang="en-US" sz="2200" b="1" dirty="0"/>
+              <a:t>Tasks Achieved:</a:t>
+            </a:r>
+            <a:r>
               <a:rPr lang="en-US" sz="2200" dirty="0"/>
-              <a:t> </a:t>
-            </a:r>
-            <a:r>
-              <a:rPr lang="en-US" sz="2200" b="1" dirty="0"/>
-              <a:t>Contribution &amp; Novelty:</a:t>
-            </a:r>
-            <a:r>
-              <a:rPr lang="en-US" sz="2200" dirty="0"/>
-              <a:t> Targeted integration of web/GIS tech to fill a local gap (Unified interface, Granular medical filters, Integrated routing).</a:t>
+              <a:t> Systematically completed all project phases (Analysis -&gt; Tech Selection -&gt; Design -&gt; Implementation -&gt; Testing).</a:t>
             </a:r>
           </a:p>
           <a:p>
@@ -12508,20 +7643,6 @@
               <a:buChar char="•"/>
             </a:pPr>
             <a:r>
-              <a:rPr lang="en-US" sz="2200" b="1" dirty="0"/>
-              <a:t>Tasks Achieved:</a:t>
-            </a:r>
-            <a:r>
-              <a:rPr lang="en-US" sz="2200" dirty="0"/>
-              <a:t> Systematically completed all project phases (Analysis -&gt; Tech Selection -&gt; Design -&gt; Implementation -&gt; Testing).</a:t>
-            </a:r>
-          </a:p>
-          <a:p>
-            <a:pPr indent="-228600">
-              <a:buFont typeface="Arial" panose="020B0604020202020204" pitchFamily="34" charset="0"/>
-              <a:buChar char="•"/>
-            </a:pPr>
-            <a:r>
               <a:rPr lang="en-US" sz="2200" dirty="0"/>
               <a:t> </a:t>
             </a:r>
@@ -12531,7 +7652,7 @@
             </a:r>
             <a:r>
               <a:rPr lang="en-US" sz="2200" dirty="0"/>
-              <a:t> Data accuracy maintenance is crucial; defined scope (no booking, etc.). </a:t>
+              <a:t> Data accuracy maintenance is crucial</a:t>
             </a:r>
           </a:p>
           <a:p>
@@ -13862,245 +8983,10 @@
       </p:grpSpPr>
       <p:sp useBgFill="1">
         <p:nvSpPr>
-          <p:cNvPr id="10" name="Rectangle 9">
+          <p:cNvPr id="9" name="Rectangle 8">
             <a:extLst>
               <a:ext uri="{FF2B5EF4-FFF2-40B4-BE49-F238E27FC236}">
-                <a16:creationId xmlns:a16="http://schemas.microsoft.com/office/drawing/2014/main" id="{2659FDB4-FCBE-4A89-B46D-43D4FA54464D}"/>
-              </a:ext>
-              <a:ext uri="{C183D7F6-B498-43B3-948B-1728B52AA6E4}">
-                <adec:decorative xmlns:adec="http://schemas.microsoft.com/office/drawing/2017/decorative" val="1"/>
-              </a:ext>
-            </a:extLst>
-          </p:cNvPr>
-          <p:cNvSpPr>
-            <a:spLocks noGrp="1" noRot="1" noChangeAspect="1" noMove="1" noResize="1" noEditPoints="1" noAdjustHandles="1" noChangeArrowheads="1" noChangeShapeType="1" noTextEdit="1"/>
-          </p:cNvSpPr>
-          <p:nvPr>
-            <p:extLst>
-              <p:ext uri="{386F3935-93C4-4BCD-93E2-E3B085C9AB24}">
-                <p16:designElem xmlns:p16="http://schemas.microsoft.com/office/powerpoint/2015/main" val="1"/>
-              </p:ext>
-            </p:extLst>
-          </p:nvPr>
-        </p:nvSpPr>
-        <p:spPr>
-          <a:xfrm>
-            <a:off x="0" y="8313"/>
-            <a:ext cx="12192000" cy="6858000"/>
-          </a:xfrm>
-          <a:prstGeom prst="rect">
-            <a:avLst/>
-          </a:prstGeom>
-          <a:ln>
-            <a:noFill/>
-          </a:ln>
-        </p:spPr>
-        <p:style>
-          <a:lnRef idx="2">
-            <a:schemeClr val="accent1">
-              <a:shade val="50000"/>
-            </a:schemeClr>
-          </a:lnRef>
-          <a:fillRef idx="1">
-            <a:schemeClr val="accent1"/>
-          </a:fillRef>
-          <a:effectRef idx="0">
-            <a:schemeClr val="accent1"/>
-          </a:effectRef>
-          <a:fontRef idx="minor">
-            <a:schemeClr val="lt1"/>
-          </a:fontRef>
-        </p:style>
-        <p:txBody>
-          <a:bodyPr rtlCol="0" anchor="ctr"/>
-          <a:lstStyle/>
-          <a:p>
-            <a:pPr algn="ctr"/>
-            <a:endParaRPr lang="en-US">
-              <a:solidFill>
-                <a:schemeClr val="bg1"/>
-              </a:solidFill>
-            </a:endParaRPr>
-          </a:p>
-        </p:txBody>
-      </p:sp>
-      <p:sp>
-        <p:nvSpPr>
-          <p:cNvPr id="2" name="Title 1">
-            <a:extLst>
-              <a:ext uri="{FF2B5EF4-FFF2-40B4-BE49-F238E27FC236}">
-                <a16:creationId xmlns:a16="http://schemas.microsoft.com/office/drawing/2014/main" id="{26074A13-8BB6-7437-4D5A-FA43C43FAE18}"/>
-              </a:ext>
-            </a:extLst>
-          </p:cNvPr>
-          <p:cNvSpPr>
-            <a:spLocks noGrp="1"/>
-          </p:cNvSpPr>
-          <p:nvPr>
-            <p:ph type="title"/>
-          </p:nvPr>
-        </p:nvSpPr>
-        <p:spPr>
-          <a:xfrm>
-            <a:off x="479394" y="1070800"/>
-            <a:ext cx="3939688" cy="5583126"/>
-          </a:xfrm>
-        </p:spPr>
-        <p:txBody>
-          <a:bodyPr vert="horz" lIns="91440" tIns="45720" rIns="91440" bIns="45720" rtlCol="0" anchor="ctr">
-            <a:normAutofit/>
-          </a:bodyPr>
-          <a:lstStyle/>
-          <a:p>
-            <a:pPr algn="ctr"/>
-            <a:r>
-              <a:rPr lang="en-US" sz="5400" kern="1200" dirty="0">
-                <a:solidFill>
-                  <a:schemeClr val="tx1"/>
-                </a:solidFill>
-                <a:latin typeface="+mj-lt"/>
-                <a:ea typeface="+mj-ea"/>
-                <a:cs typeface="+mj-cs"/>
-              </a:rPr>
-              <a:t>Research Methods Used</a:t>
-            </a:r>
-          </a:p>
-        </p:txBody>
-      </p:sp>
-      <p:cxnSp>
-        <p:nvCxnSpPr>
-          <p:cNvPr id="12" name="Straight Connector 11">
-            <a:extLst>
-              <a:ext uri="{FF2B5EF4-FFF2-40B4-BE49-F238E27FC236}">
-                <a16:creationId xmlns:a16="http://schemas.microsoft.com/office/drawing/2014/main" id="{C8F51B3F-8331-4E4A-AE96-D47B1006EEAD}"/>
-              </a:ext>
-              <a:ext uri="{C183D7F6-B498-43B3-948B-1728B52AA6E4}">
-                <adec:decorative xmlns:adec="http://schemas.microsoft.com/office/drawing/2017/decorative" val="1"/>
-              </a:ext>
-            </a:extLst>
-          </p:cNvPr>
-          <p:cNvCxnSpPr>
-            <a:cxnSpLocks noGrp="1" noRot="1" noChangeAspect="1" noMove="1" noResize="1" noEditPoints="1" noAdjustHandles="1" noChangeArrowheads="1" noChangeShapeType="1"/>
-          </p:cNvCxnSpPr>
-          <p:nvPr>
-            <p:extLst>
-              <p:ext uri="{386F3935-93C4-4BCD-93E2-E3B085C9AB24}">
-                <p16:designElem xmlns:p16="http://schemas.microsoft.com/office/powerpoint/2015/main" val="1"/>
-              </p:ext>
-            </p:extLst>
-          </p:nvPr>
-        </p:nvCxnSpPr>
-        <p:spPr>
-          <a:xfrm>
-            <a:off x="4728053" y="1132114"/>
-            <a:ext cx="0" cy="5717573"/>
-          </a:xfrm>
-          <a:prstGeom prst="line">
-            <a:avLst/>
-          </a:prstGeom>
-          <a:ln w="25400" cap="sq">
-            <a:gradFill flip="none" rotWithShape="1">
-              <a:gsLst>
-                <a:gs pos="0">
-                  <a:schemeClr val="accent1"/>
-                </a:gs>
-                <a:gs pos="100000">
-                  <a:schemeClr val="accent2"/>
-                </a:gs>
-              </a:gsLst>
-              <a:lin ang="16200000" scaled="1"/>
-              <a:tileRect/>
-            </a:gradFill>
-            <a:bevel/>
-          </a:ln>
-        </p:spPr>
-        <p:style>
-          <a:lnRef idx="1">
-            <a:schemeClr val="accent1"/>
-          </a:lnRef>
-          <a:fillRef idx="0">
-            <a:schemeClr val="accent1"/>
-          </a:fillRef>
-          <a:effectRef idx="0">
-            <a:schemeClr val="accent1"/>
-          </a:effectRef>
-          <a:fontRef idx="minor">
-            <a:schemeClr val="tx1"/>
-          </a:fontRef>
-        </p:style>
-      </p:cxnSp>
-      <p:graphicFrame>
-        <p:nvGraphicFramePr>
-          <p:cNvPr id="6" name="Text Placeholder 3">
-            <a:extLst>
-              <a:ext uri="{FF2B5EF4-FFF2-40B4-BE49-F238E27FC236}">
-                <a16:creationId xmlns:a16="http://schemas.microsoft.com/office/drawing/2014/main" id="{F0B3B3B0-9166-AEA0-B1DB-CDCB5EE3BB79}"/>
-              </a:ext>
-            </a:extLst>
-          </p:cNvPr>
-          <p:cNvGraphicFramePr/>
-          <p:nvPr>
-            <p:extLst>
-              <p:ext uri="{D42A27DB-BD31-4B8C-83A1-F6EECF244321}">
-                <p14:modId xmlns:p14="http://schemas.microsoft.com/office/powerpoint/2010/main" val="3389229270"/>
-              </p:ext>
-            </p:extLst>
-          </p:nvPr>
-        </p:nvGraphicFramePr>
-        <p:xfrm>
-          <a:off x="5182908" y="838980"/>
-          <a:ext cx="6245265" cy="5589347"/>
-        </p:xfrm>
-        <a:graphic>
-          <a:graphicData uri="http://schemas.openxmlformats.org/drawingml/2006/diagram">
-            <dgm:relIds xmlns:dgm="http://schemas.openxmlformats.org/drawingml/2006/diagram" xmlns:r="http://schemas.openxmlformats.org/officeDocument/2006/relationships" r:dm="rId3" r:lo="rId4" r:qs="rId5" r:cs="rId6"/>
-          </a:graphicData>
-        </a:graphic>
-      </p:graphicFrame>
-    </p:spTree>
-    <p:extLst>
-      <p:ext uri="{BB962C8B-B14F-4D97-AF65-F5344CB8AC3E}">
-        <p14:creationId xmlns:p14="http://schemas.microsoft.com/office/powerpoint/2010/main" val="3514742179"/>
-      </p:ext>
-    </p:extLst>
-  </p:cSld>
-  <p:clrMapOvr>
-    <a:masterClrMapping/>
-  </p:clrMapOvr>
-</p:sld>
-</file>
-
-<file path=ppt/slides/slide5.xml><?xml version="1.0" encoding="utf-8"?>
-<p:sld xmlns:a="http://schemas.openxmlformats.org/drawingml/2006/main" xmlns:r="http://schemas.openxmlformats.org/officeDocument/2006/relationships" xmlns:p="http://schemas.openxmlformats.org/presentationml/2006/main">
-  <p:cSld>
-    <p:bg>
-      <p:bgPr>
-        <a:solidFill>
-          <a:schemeClr val="bg1"/>
-        </a:solidFill>
-        <a:effectLst/>
-      </p:bgPr>
-    </p:bg>
-    <p:spTree>
-      <p:nvGrpSpPr>
-        <p:cNvPr id="1" name=""/>
-        <p:cNvGrpSpPr/>
-        <p:nvPr/>
-      </p:nvGrpSpPr>
-      <p:grpSpPr>
-        <a:xfrm>
-          <a:off x="0" y="0"/>
-          <a:ext cx="0" cy="0"/>
-          <a:chOff x="0" y="0"/>
-          <a:chExt cx="0" cy="0"/>
-        </a:xfrm>
-      </p:grpSpPr>
-      <p:sp useBgFill="1">
-        <p:nvSpPr>
-          <p:cNvPr id="2068" name="Rectangle 2067">
-            <a:extLst>
-              <a:ext uri="{FF2B5EF4-FFF2-40B4-BE49-F238E27FC236}">
-                <a16:creationId xmlns:a16="http://schemas.microsoft.com/office/drawing/2014/main" id="{53B475F8-50AE-46A0-9943-B2B63183D50C}"/>
+                <a16:creationId xmlns:a16="http://schemas.microsoft.com/office/drawing/2014/main" id="{777A147A-9ED8-46B4-8660-1B3C2AA880B5}"/>
               </a:ext>
               <a:ext uri="{C183D7F6-B498-43B3-948B-1728B52AA6E4}">
                 <adec:decorative xmlns:adec="http://schemas.microsoft.com/office/drawing/2017/decorative" val="1"/>
@@ -14160,717 +9046,6 @@
           <p:cNvPr id="2" name="Title 1">
             <a:extLst>
               <a:ext uri="{FF2B5EF4-FFF2-40B4-BE49-F238E27FC236}">
-                <a16:creationId xmlns:a16="http://schemas.microsoft.com/office/drawing/2014/main" id="{4E006AF2-1CE1-8982-A12F-A0E37B7D78D0}"/>
-              </a:ext>
-            </a:extLst>
-          </p:cNvPr>
-          <p:cNvSpPr>
-            <a:spLocks noGrp="1"/>
-          </p:cNvSpPr>
-          <p:nvPr>
-            <p:ph type="title"/>
-          </p:nvPr>
-        </p:nvSpPr>
-        <p:spPr>
-          <a:xfrm>
-            <a:off x="612648" y="365125"/>
-            <a:ext cx="6986015" cy="1776484"/>
-          </a:xfrm>
-        </p:spPr>
-        <p:txBody>
-          <a:bodyPr vert="horz" lIns="91440" tIns="45720" rIns="91440" bIns="45720" rtlCol="0" anchor="b">
-            <a:normAutofit/>
-          </a:bodyPr>
-          <a:lstStyle/>
-          <a:p>
-            <a:r>
-              <a:rPr lang="en-US" sz="5400"/>
-              <a:t>Review of Similar Systems in Vilnius</a:t>
-            </a:r>
-          </a:p>
-        </p:txBody>
-      </p:sp>
-      <p:pic>
-        <p:nvPicPr>
-          <p:cNvPr id="5" name="Picture 4" descr="GovTech Lab Lithuania">
-            <a:extLst>
-              <a:ext uri="{FF2B5EF4-FFF2-40B4-BE49-F238E27FC236}">
-                <a16:creationId xmlns:a16="http://schemas.microsoft.com/office/drawing/2014/main" id="{22A6422D-CDFB-47C3-7462-9B3FE13B52D6}"/>
-              </a:ext>
-            </a:extLst>
-          </p:cNvPr>
-          <p:cNvPicPr>
-            <a:picLocks noChangeAspect="1" noChangeArrowheads="1"/>
-          </p:cNvPicPr>
-          <p:nvPr/>
-        </p:nvPicPr>
-        <p:blipFill>
-          <a:blip r:embed="rId3">
-            <a:extLst>
-              <a:ext uri="{28A0092B-C50C-407E-A947-70E740481C1C}">
-                <a14:useLocalDpi xmlns:a14="http://schemas.microsoft.com/office/drawing/2010/main" val="0"/>
-              </a:ext>
-            </a:extLst>
-          </a:blip>
-          <a:stretch>
-            <a:fillRect/>
-          </a:stretch>
-        </p:blipFill>
-        <p:spPr bwMode="auto">
-          <a:xfrm>
-            <a:off x="8379409" y="756767"/>
-            <a:ext cx="3532036" cy="900668"/>
-          </a:xfrm>
-          <a:prstGeom prst="rect">
-            <a:avLst/>
-          </a:prstGeom>
-          <a:noFill/>
-          <a:extLst>
-            <a:ext uri="{909E8E84-426E-40DD-AFC4-6F175D3DCCD1}">
-              <a14:hiddenFill xmlns:a14="http://schemas.microsoft.com/office/drawing/2010/main">
-                <a:solidFill>
-                  <a:srgbClr val="FFFFFF"/>
-                </a:solidFill>
-              </a14:hiddenFill>
-            </a:ext>
-          </a:extLst>
-        </p:spPr>
-      </p:pic>
-      <p:sp>
-        <p:nvSpPr>
-          <p:cNvPr id="2069" name="sketch line">
-            <a:extLst>
-              <a:ext uri="{FF2B5EF4-FFF2-40B4-BE49-F238E27FC236}">
-                <a16:creationId xmlns:a16="http://schemas.microsoft.com/office/drawing/2014/main" id="{75F6FDB4-2351-48C2-A863-2364A02343C0}"/>
-              </a:ext>
-              <a:ext uri="{C183D7F6-B498-43B3-948B-1728B52AA6E4}">
-                <adec:decorative xmlns:adec="http://schemas.microsoft.com/office/drawing/2017/decorative" val="1"/>
-              </a:ext>
-            </a:extLst>
-          </p:cNvPr>
-          <p:cNvSpPr>
-            <a:spLocks noGrp="1" noRot="1" noChangeAspect="1" noMove="1" noResize="1" noEditPoints="1" noAdjustHandles="1" noChangeArrowheads="1" noChangeShapeType="1" noTextEdit="1"/>
-          </p:cNvSpPr>
-          <p:nvPr>
-            <p:extLst>
-              <p:ext uri="{386F3935-93C4-4BCD-93E2-E3B085C9AB24}">
-                <p16:designElem xmlns:p16="http://schemas.microsoft.com/office/powerpoint/2015/main" val="1"/>
-              </p:ext>
-            </p:extLst>
-          </p:nvPr>
-        </p:nvSpPr>
-        <p:spPr>
-          <a:xfrm>
-            <a:off x="838200" y="2315691"/>
-            <a:ext cx="4343400" cy="18288"/>
-          </a:xfrm>
-          <a:custGeom>
-            <a:avLst/>
-            <a:gdLst>
-              <a:gd name="connsiteX0" fmla="*/ 0 w 4343400"/>
-              <a:gd name="connsiteY0" fmla="*/ 0 h 18288"/>
-              <a:gd name="connsiteX1" fmla="*/ 577052 w 4343400"/>
-              <a:gd name="connsiteY1" fmla="*/ 0 h 18288"/>
-              <a:gd name="connsiteX2" fmla="*/ 1067235 w 4343400"/>
-              <a:gd name="connsiteY2" fmla="*/ 0 h 18288"/>
-              <a:gd name="connsiteX3" fmla="*/ 1600853 w 4343400"/>
-              <a:gd name="connsiteY3" fmla="*/ 0 h 18288"/>
-              <a:gd name="connsiteX4" fmla="*/ 2264773 w 4343400"/>
-              <a:gd name="connsiteY4" fmla="*/ 0 h 18288"/>
-              <a:gd name="connsiteX5" fmla="*/ 2841825 w 4343400"/>
-              <a:gd name="connsiteY5" fmla="*/ 0 h 18288"/>
-              <a:gd name="connsiteX6" fmla="*/ 3375442 w 4343400"/>
-              <a:gd name="connsiteY6" fmla="*/ 0 h 18288"/>
-              <a:gd name="connsiteX7" fmla="*/ 4343400 w 4343400"/>
-              <a:gd name="connsiteY7" fmla="*/ 0 h 18288"/>
-              <a:gd name="connsiteX8" fmla="*/ 4343400 w 4343400"/>
-              <a:gd name="connsiteY8" fmla="*/ 18288 h 18288"/>
-              <a:gd name="connsiteX9" fmla="*/ 3722914 w 4343400"/>
-              <a:gd name="connsiteY9" fmla="*/ 18288 h 18288"/>
-              <a:gd name="connsiteX10" fmla="*/ 3189297 w 4343400"/>
-              <a:gd name="connsiteY10" fmla="*/ 18288 h 18288"/>
-              <a:gd name="connsiteX11" fmla="*/ 2481943 w 4343400"/>
-              <a:gd name="connsiteY11" fmla="*/ 18288 h 18288"/>
-              <a:gd name="connsiteX12" fmla="*/ 1904891 w 4343400"/>
-              <a:gd name="connsiteY12" fmla="*/ 18288 h 18288"/>
-              <a:gd name="connsiteX13" fmla="*/ 1414707 w 4343400"/>
-              <a:gd name="connsiteY13" fmla="*/ 18288 h 18288"/>
-              <a:gd name="connsiteX14" fmla="*/ 750788 w 4343400"/>
-              <a:gd name="connsiteY14" fmla="*/ 18288 h 18288"/>
-              <a:gd name="connsiteX15" fmla="*/ 0 w 4343400"/>
-              <a:gd name="connsiteY15" fmla="*/ 18288 h 18288"/>
-              <a:gd name="connsiteX16" fmla="*/ 0 w 4343400"/>
-              <a:gd name="connsiteY16" fmla="*/ 0 h 18288"/>
-            </a:gdLst>
-            <a:ahLst/>
-            <a:cxnLst>
-              <a:cxn ang="0">
-                <a:pos x="connsiteX0" y="connsiteY0"/>
-              </a:cxn>
-              <a:cxn ang="0">
-                <a:pos x="connsiteX1" y="connsiteY1"/>
-              </a:cxn>
-              <a:cxn ang="0">
-                <a:pos x="connsiteX2" y="connsiteY2"/>
-              </a:cxn>
-              <a:cxn ang="0">
-                <a:pos x="connsiteX3" y="connsiteY3"/>
-              </a:cxn>
-              <a:cxn ang="0">
-                <a:pos x="connsiteX4" y="connsiteY4"/>
-              </a:cxn>
-              <a:cxn ang="0">
-                <a:pos x="connsiteX5" y="connsiteY5"/>
-              </a:cxn>
-              <a:cxn ang="0">
-                <a:pos x="connsiteX6" y="connsiteY6"/>
-              </a:cxn>
-              <a:cxn ang="0">
-                <a:pos x="connsiteX7" y="connsiteY7"/>
-              </a:cxn>
-              <a:cxn ang="0">
-                <a:pos x="connsiteX8" y="connsiteY8"/>
-              </a:cxn>
-              <a:cxn ang="0">
-                <a:pos x="connsiteX9" y="connsiteY9"/>
-              </a:cxn>
-              <a:cxn ang="0">
-                <a:pos x="connsiteX10" y="connsiteY10"/>
-              </a:cxn>
-              <a:cxn ang="0">
-                <a:pos x="connsiteX11" y="connsiteY11"/>
-              </a:cxn>
-              <a:cxn ang="0">
-                <a:pos x="connsiteX12" y="connsiteY12"/>
-              </a:cxn>
-              <a:cxn ang="0">
-                <a:pos x="connsiteX13" y="connsiteY13"/>
-              </a:cxn>
-              <a:cxn ang="0">
-                <a:pos x="connsiteX14" y="connsiteY14"/>
-              </a:cxn>
-              <a:cxn ang="0">
-                <a:pos x="connsiteX15" y="connsiteY15"/>
-              </a:cxn>
-              <a:cxn ang="0">
-                <a:pos x="connsiteX16" y="connsiteY16"/>
-              </a:cxn>
-            </a:cxnLst>
-            <a:rect l="l" t="t" r="r" b="b"/>
-            <a:pathLst>
-              <a:path w="4343400" h="18288" fill="none" extrusionOk="0">
-                <a:moveTo>
-                  <a:pt x="0" y="0"/>
-                </a:moveTo>
-                <a:cubicBezTo>
-                  <a:pt x="233209" y="-19550"/>
-                  <a:pt x="330816" y="19068"/>
-                  <a:pt x="577052" y="0"/>
-                </a:cubicBezTo>
-                <a:cubicBezTo>
-                  <a:pt x="823288" y="-19068"/>
-                  <a:pt x="875077" y="10360"/>
-                  <a:pt x="1067235" y="0"/>
-                </a:cubicBezTo>
-                <a:cubicBezTo>
-                  <a:pt x="1259393" y="-10360"/>
-                  <a:pt x="1410699" y="2939"/>
-                  <a:pt x="1600853" y="0"/>
-                </a:cubicBezTo>
-                <a:cubicBezTo>
-                  <a:pt x="1791007" y="-2939"/>
-                  <a:pt x="2101644" y="-26225"/>
-                  <a:pt x="2264773" y="0"/>
-                </a:cubicBezTo>
-                <a:cubicBezTo>
-                  <a:pt x="2427902" y="26225"/>
-                  <a:pt x="2690426" y="-27726"/>
-                  <a:pt x="2841825" y="0"/>
-                </a:cubicBezTo>
-                <a:cubicBezTo>
-                  <a:pt x="2993224" y="27726"/>
-                  <a:pt x="3172320" y="-18569"/>
-                  <a:pt x="3375442" y="0"/>
-                </a:cubicBezTo>
-                <a:cubicBezTo>
-                  <a:pt x="3578564" y="18569"/>
-                  <a:pt x="4003119" y="21909"/>
-                  <a:pt x="4343400" y="0"/>
-                </a:cubicBezTo>
-                <a:cubicBezTo>
-                  <a:pt x="4343798" y="7429"/>
-                  <a:pt x="4343380" y="10822"/>
-                  <a:pt x="4343400" y="18288"/>
-                </a:cubicBezTo>
-                <a:cubicBezTo>
-                  <a:pt x="4109047" y="14709"/>
-                  <a:pt x="3996986" y="7919"/>
-                  <a:pt x="3722914" y="18288"/>
-                </a:cubicBezTo>
-                <a:cubicBezTo>
-                  <a:pt x="3448842" y="28657"/>
-                  <a:pt x="3340973" y="29252"/>
-                  <a:pt x="3189297" y="18288"/>
-                </a:cubicBezTo>
-                <a:cubicBezTo>
-                  <a:pt x="3037621" y="7324"/>
-                  <a:pt x="2636891" y="-9539"/>
-                  <a:pt x="2481943" y="18288"/>
-                </a:cubicBezTo>
-                <a:cubicBezTo>
-                  <a:pt x="2326995" y="46115"/>
-                  <a:pt x="2131632" y="740"/>
-                  <a:pt x="1904891" y="18288"/>
-                </a:cubicBezTo>
-                <a:cubicBezTo>
-                  <a:pt x="1678150" y="35836"/>
-                  <a:pt x="1575362" y="-3381"/>
-                  <a:pt x="1414707" y="18288"/>
-                </a:cubicBezTo>
-                <a:cubicBezTo>
-                  <a:pt x="1254052" y="39957"/>
-                  <a:pt x="1051093" y="-335"/>
-                  <a:pt x="750788" y="18288"/>
-                </a:cubicBezTo>
-                <a:cubicBezTo>
-                  <a:pt x="450483" y="36911"/>
-                  <a:pt x="293781" y="22900"/>
-                  <a:pt x="0" y="18288"/>
-                </a:cubicBezTo>
-                <a:cubicBezTo>
-                  <a:pt x="-591" y="13205"/>
-                  <a:pt x="-663" y="6329"/>
-                  <a:pt x="0" y="0"/>
-                </a:cubicBezTo>
-                <a:close/>
-              </a:path>
-              <a:path w="4343400" h="18288" stroke="0" extrusionOk="0">
-                <a:moveTo>
-                  <a:pt x="0" y="0"/>
-                </a:moveTo>
-                <a:cubicBezTo>
-                  <a:pt x="212719" y="-28531"/>
-                  <a:pt x="340561" y="-1164"/>
-                  <a:pt x="577052" y="0"/>
-                </a:cubicBezTo>
-                <a:cubicBezTo>
-                  <a:pt x="813543" y="1164"/>
-                  <a:pt x="866967" y="-9376"/>
-                  <a:pt x="1067235" y="0"/>
-                </a:cubicBezTo>
-                <a:cubicBezTo>
-                  <a:pt x="1267503" y="9376"/>
-                  <a:pt x="1485778" y="-20470"/>
-                  <a:pt x="1774589" y="0"/>
-                </a:cubicBezTo>
-                <a:cubicBezTo>
-                  <a:pt x="2063400" y="20470"/>
-                  <a:pt x="2090152" y="-14502"/>
-                  <a:pt x="2351641" y="0"/>
-                </a:cubicBezTo>
-                <a:cubicBezTo>
-                  <a:pt x="2613130" y="14502"/>
-                  <a:pt x="2802864" y="19125"/>
-                  <a:pt x="2928693" y="0"/>
-                </a:cubicBezTo>
-                <a:cubicBezTo>
-                  <a:pt x="3054522" y="-19125"/>
-                  <a:pt x="3482611" y="-2038"/>
-                  <a:pt x="3636046" y="0"/>
-                </a:cubicBezTo>
-                <a:cubicBezTo>
-                  <a:pt x="3789481" y="2038"/>
-                  <a:pt x="4012363" y="973"/>
-                  <a:pt x="4343400" y="0"/>
-                </a:cubicBezTo>
-                <a:cubicBezTo>
-                  <a:pt x="4342514" y="5429"/>
-                  <a:pt x="4344221" y="14046"/>
-                  <a:pt x="4343400" y="18288"/>
-                </a:cubicBezTo>
-                <a:cubicBezTo>
-                  <a:pt x="4078870" y="-6138"/>
-                  <a:pt x="4015967" y="29658"/>
-                  <a:pt x="3809782" y="18288"/>
-                </a:cubicBezTo>
-                <a:cubicBezTo>
-                  <a:pt x="3603597" y="6918"/>
-                  <a:pt x="3495552" y="24439"/>
-                  <a:pt x="3189297" y="18288"/>
-                </a:cubicBezTo>
-                <a:cubicBezTo>
-                  <a:pt x="2883042" y="12137"/>
-                  <a:pt x="2850610" y="32583"/>
-                  <a:pt x="2568811" y="18288"/>
-                </a:cubicBezTo>
-                <a:cubicBezTo>
-                  <a:pt x="2287012" y="3993"/>
-                  <a:pt x="2279820" y="23580"/>
-                  <a:pt x="1991759" y="18288"/>
-                </a:cubicBezTo>
-                <a:cubicBezTo>
-                  <a:pt x="1703698" y="12996"/>
-                  <a:pt x="1616455" y="23157"/>
-                  <a:pt x="1284405" y="18288"/>
-                </a:cubicBezTo>
-                <a:cubicBezTo>
-                  <a:pt x="952355" y="13419"/>
-                  <a:pt x="783530" y="16053"/>
-                  <a:pt x="577052" y="18288"/>
-                </a:cubicBezTo>
-                <a:cubicBezTo>
-                  <a:pt x="370574" y="20523"/>
-                  <a:pt x="173929" y="5195"/>
-                  <a:pt x="0" y="18288"/>
-                </a:cubicBezTo>
-                <a:cubicBezTo>
-                  <a:pt x="668" y="13665"/>
-                  <a:pt x="578" y="5675"/>
-                  <a:pt x="0" y="0"/>
-                </a:cubicBezTo>
-                <a:close/>
-              </a:path>
-            </a:pathLst>
-          </a:custGeom>
-          <a:solidFill>
-            <a:schemeClr val="accent2"/>
-          </a:solidFill>
-          <a:ln w="41275" cap="rnd">
-            <a:solidFill>
-              <a:schemeClr val="accent2"/>
-            </a:solidFill>
-            <a:round/>
-            <a:extLst>
-              <a:ext uri="{C807C97D-BFC1-408E-A445-0C87EB9F89A2}">
-                <ask:lineSketchStyleProps xmlns:ask="http://schemas.microsoft.com/office/drawing/2018/sketchyshapes" sd="1219033472">
-                  <a:prstGeom prst="rect">
-                    <a:avLst/>
-                  </a:prstGeom>
-                  <ask:type>
-                    <ask:lineSketchFreehand/>
-                  </ask:type>
-                </ask:lineSketchStyleProps>
-              </a:ext>
-            </a:extLst>
-          </a:ln>
-        </p:spPr>
-        <p:style>
-          <a:lnRef idx="2">
-            <a:schemeClr val="accent1">
-              <a:shade val="50000"/>
-            </a:schemeClr>
-          </a:lnRef>
-          <a:fillRef idx="1">
-            <a:schemeClr val="accent1"/>
-          </a:fillRef>
-          <a:effectRef idx="0">
-            <a:schemeClr val="accent1"/>
-          </a:effectRef>
-          <a:fontRef idx="minor">
-            <a:schemeClr val="lt1"/>
-          </a:fontRef>
-        </p:style>
-        <p:txBody>
-          <a:bodyPr rtlCol="0" anchor="ctr"/>
-          <a:lstStyle/>
-          <a:p>
-            <a:pPr algn="ctr"/>
-            <a:endParaRPr lang="en-US"/>
-          </a:p>
-        </p:txBody>
-      </p:sp>
-      <p:sp>
-        <p:nvSpPr>
-          <p:cNvPr id="4" name="Text Placeholder 3">
-            <a:extLst>
-              <a:ext uri="{FF2B5EF4-FFF2-40B4-BE49-F238E27FC236}">
-                <a16:creationId xmlns:a16="http://schemas.microsoft.com/office/drawing/2014/main" id="{DE9AC85A-B32C-9351-D95F-2C3659D95410}"/>
-              </a:ext>
-            </a:extLst>
-          </p:cNvPr>
-          <p:cNvSpPr>
-            <a:spLocks noGrp="1"/>
-          </p:cNvSpPr>
-          <p:nvPr>
-            <p:ph type="body" sz="half" idx="2"/>
-          </p:nvPr>
-        </p:nvSpPr>
-        <p:spPr>
-          <a:xfrm>
-            <a:off x="612648" y="2504819"/>
-            <a:ext cx="6986016" cy="3672144"/>
-          </a:xfrm>
-        </p:spPr>
-        <p:txBody>
-          <a:bodyPr vert="horz" lIns="91440" tIns="45720" rIns="91440" bIns="45720" rtlCol="0">
-            <a:normAutofit/>
-          </a:bodyPr>
-          <a:lstStyle/>
-          <a:p>
-            <a:pPr marL="285750" indent="-228600">
-              <a:buFont typeface="Arial" panose="020B0604020202020204" pitchFamily="34" charset="0"/>
-              <a:buChar char="•"/>
-            </a:pPr>
-            <a:r>
-              <a:rPr lang="en-US" sz="2000" dirty="0"/>
-              <a:t>General Purpose Mapping Platforms (e.g., Google Maps): Strengths (routing), Weaknesses (lack medical detail, misleading results).</a:t>
-            </a:r>
-          </a:p>
-          <a:p>
-            <a:pPr marL="285750" indent="-228600">
-              <a:buFont typeface="Arial" panose="020B0604020202020204" pitchFamily="34" charset="0"/>
-              <a:buChar char="•"/>
-            </a:pPr>
-            <a:endParaRPr lang="en-US" sz="2000" dirty="0"/>
-          </a:p>
-          <a:p>
-            <a:pPr marL="285750" indent="-228600">
-              <a:buFont typeface="Arial" panose="020B0604020202020204" pitchFamily="34" charset="0"/>
-              <a:buChar char="•"/>
-            </a:pPr>
-            <a:r>
-              <a:rPr lang="en-US" sz="2000" dirty="0"/>
-              <a:t>Local Healthcare Directories (e.g., </a:t>
-            </a:r>
-            <a:r>
-              <a:rPr lang="en-US" sz="2000" dirty="0" err="1"/>
-              <a:t>manodaktaras.lt</a:t>
-            </a:r>
-            <a:r>
-              <a:rPr lang="en-US" sz="2000" dirty="0"/>
-              <a:t>): Strengths (doctor-centric), Weaknesses (facility/routing weak).</a:t>
-            </a:r>
-          </a:p>
-          <a:p>
-            <a:pPr marL="285750" indent="-228600">
-              <a:buFont typeface="Arial" panose="020B0604020202020204" pitchFamily="34" charset="0"/>
-              <a:buChar char="•"/>
-            </a:pPr>
-            <a:endParaRPr lang="en-US" sz="2000" dirty="0"/>
-          </a:p>
-          <a:p>
-            <a:pPr marL="285750" indent="-228600">
-              <a:buFont typeface="Arial" panose="020B0604020202020204" pitchFamily="34" charset="0"/>
-              <a:buChar char="•"/>
-            </a:pPr>
-            <a:r>
-              <a:rPr lang="en-US" sz="2000" dirty="0"/>
-              <a:t>Official Portals/National Platforms (e.g., E-Health app): Strengths (centralized access), Weaknesses (may not be for discovery/suitability, past system issues).</a:t>
-            </a:r>
-          </a:p>
-          <a:p>
-            <a:pPr marL="285750" indent="-228600">
-              <a:buFont typeface="Arial" panose="020B0604020202020204" pitchFamily="34" charset="0"/>
-              <a:buChar char="•"/>
-            </a:pPr>
-            <a:endParaRPr lang="en-US" sz="2000" dirty="0"/>
-          </a:p>
-          <a:p>
-            <a:pPr indent="-228600">
-              <a:buFont typeface="Arial" panose="020B0604020202020204" pitchFamily="34" charset="0"/>
-              <a:buChar char="•"/>
-            </a:pPr>
-            <a:endParaRPr lang="en-US" sz="2000" dirty="0"/>
-          </a:p>
-        </p:txBody>
-      </p:sp>
-      <p:pic>
-        <p:nvPicPr>
-          <p:cNvPr id="2050" name="Picture 2" descr="My Maps – About – Google Maps">
-            <a:extLst>
-              <a:ext uri="{FF2B5EF4-FFF2-40B4-BE49-F238E27FC236}">
-                <a16:creationId xmlns:a16="http://schemas.microsoft.com/office/drawing/2014/main" id="{0DD35F72-EABC-ABE1-2727-1D98A1C93AA8}"/>
-              </a:ext>
-            </a:extLst>
-          </p:cNvPr>
-          <p:cNvPicPr>
-            <a:picLocks noGrp="1" noChangeAspect="1" noChangeArrowheads="1"/>
-          </p:cNvPicPr>
-          <p:nvPr>
-            <p:ph idx="1"/>
-          </p:nvPr>
-        </p:nvPicPr>
-        <p:blipFill>
-          <a:blip r:embed="rId4">
-            <a:extLst>
-              <a:ext uri="{28A0092B-C50C-407E-A947-70E740481C1C}">
-                <a14:useLocalDpi xmlns:a14="http://schemas.microsoft.com/office/drawing/2010/main" val="0"/>
-              </a:ext>
-            </a:extLst>
-          </a:blip>
-          <a:stretch>
-            <a:fillRect/>
-          </a:stretch>
-        </p:blipFill>
-        <p:spPr bwMode="auto">
-          <a:xfrm>
-            <a:off x="9201180" y="2310086"/>
-            <a:ext cx="1890220" cy="1890220"/>
-          </a:xfrm>
-          <a:prstGeom prst="rect">
-            <a:avLst/>
-          </a:prstGeom>
-          <a:noFill/>
-          <a:extLst>
-            <a:ext uri="{909E8E84-426E-40DD-AFC4-6F175D3DCCD1}">
-              <a14:hiddenFill xmlns:a14="http://schemas.microsoft.com/office/drawing/2010/main">
-                <a:solidFill>
-                  <a:srgbClr val="FFFFFF"/>
-                </a:solidFill>
-              </a14:hiddenFill>
-            </a:ext>
-          </a:extLst>
-        </p:spPr>
-      </p:pic>
-      <p:pic>
-        <p:nvPicPr>
-          <p:cNvPr id="2052" name="Picture 4" descr="esveikata.lt">
-            <a:extLst>
-              <a:ext uri="{FF2B5EF4-FFF2-40B4-BE49-F238E27FC236}">
-                <a16:creationId xmlns:a16="http://schemas.microsoft.com/office/drawing/2014/main" id="{9E0217A2-A344-12AD-30C1-D2DDE16E3D76}"/>
-              </a:ext>
-            </a:extLst>
-          </p:cNvPr>
-          <p:cNvPicPr>
-            <a:picLocks noChangeAspect="1" noChangeArrowheads="1"/>
-          </p:cNvPicPr>
-          <p:nvPr/>
-        </p:nvPicPr>
-        <p:blipFill>
-          <a:blip r:embed="rId5">
-            <a:extLst>
-              <a:ext uri="{28A0092B-C50C-407E-A947-70E740481C1C}">
-                <a14:useLocalDpi xmlns:a14="http://schemas.microsoft.com/office/drawing/2010/main" val="0"/>
-              </a:ext>
-            </a:extLst>
-          </a:blip>
-          <a:stretch>
-            <a:fillRect/>
-          </a:stretch>
-        </p:blipFill>
-        <p:spPr bwMode="auto">
-          <a:xfrm>
-            <a:off x="8466095" y="4358181"/>
-            <a:ext cx="3360391" cy="1890220"/>
-          </a:xfrm>
-          <a:prstGeom prst="rect">
-            <a:avLst/>
-          </a:prstGeom>
-          <a:noFill/>
-          <a:extLst>
-            <a:ext uri="{909E8E84-426E-40DD-AFC4-6F175D3DCCD1}">
-              <a14:hiddenFill xmlns:a14="http://schemas.microsoft.com/office/drawing/2010/main">
-                <a:solidFill>
-                  <a:srgbClr val="FFFFFF"/>
-                </a:solidFill>
-              </a14:hiddenFill>
-            </a:ext>
-          </a:extLst>
-        </p:spPr>
-      </p:pic>
-    </p:spTree>
-    <p:extLst>
-      <p:ext uri="{BB962C8B-B14F-4D97-AF65-F5344CB8AC3E}">
-        <p14:creationId xmlns:p14="http://schemas.microsoft.com/office/powerpoint/2010/main" val="3954250393"/>
-      </p:ext>
-    </p:extLst>
-  </p:cSld>
-  <p:clrMapOvr>
-    <a:masterClrMapping/>
-  </p:clrMapOvr>
-</p:sld>
-</file>
-
-<file path=ppt/slides/slide6.xml><?xml version="1.0" encoding="utf-8"?>
-<p:sld xmlns:a="http://schemas.openxmlformats.org/drawingml/2006/main" xmlns:r="http://schemas.openxmlformats.org/officeDocument/2006/relationships" xmlns:p="http://schemas.openxmlformats.org/presentationml/2006/main">
-  <p:cSld>
-    <p:bg>
-      <p:bgPr>
-        <a:solidFill>
-          <a:schemeClr val="bg1"/>
-        </a:solidFill>
-        <a:effectLst/>
-      </p:bgPr>
-    </p:bg>
-    <p:spTree>
-      <p:nvGrpSpPr>
-        <p:cNvPr id="1" name=""/>
-        <p:cNvGrpSpPr/>
-        <p:nvPr/>
-      </p:nvGrpSpPr>
-      <p:grpSpPr>
-        <a:xfrm>
-          <a:off x="0" y="0"/>
-          <a:ext cx="0" cy="0"/>
-          <a:chOff x="0" y="0"/>
-          <a:chExt cx="0" cy="0"/>
-        </a:xfrm>
-      </p:grpSpPr>
-      <p:sp useBgFill="1">
-        <p:nvSpPr>
-          <p:cNvPr id="9" name="Rectangle 8">
-            <a:extLst>
-              <a:ext uri="{FF2B5EF4-FFF2-40B4-BE49-F238E27FC236}">
-                <a16:creationId xmlns:a16="http://schemas.microsoft.com/office/drawing/2014/main" id="{777A147A-9ED8-46B4-8660-1B3C2AA880B5}"/>
-              </a:ext>
-              <a:ext uri="{C183D7F6-B498-43B3-948B-1728B52AA6E4}">
-                <adec:decorative xmlns:adec="http://schemas.microsoft.com/office/drawing/2017/decorative" val="1"/>
-              </a:ext>
-            </a:extLst>
-          </p:cNvPr>
-          <p:cNvSpPr>
-            <a:spLocks noGrp="1" noRot="1" noChangeAspect="1" noMove="1" noResize="1" noEditPoints="1" noAdjustHandles="1" noChangeArrowheads="1" noChangeShapeType="1" noTextEdit="1"/>
-          </p:cNvSpPr>
-          <p:nvPr>
-            <p:extLst>
-              <p:ext uri="{386F3935-93C4-4BCD-93E2-E3B085C9AB24}">
-                <p16:designElem xmlns:p16="http://schemas.microsoft.com/office/powerpoint/2015/main" val="1"/>
-              </p:ext>
-            </p:extLst>
-          </p:nvPr>
-        </p:nvSpPr>
-        <p:spPr>
-          <a:xfrm>
-            <a:off x="0" y="0"/>
-            <a:ext cx="12188952" cy="6858000"/>
-          </a:xfrm>
-          <a:prstGeom prst="rect">
-            <a:avLst/>
-          </a:prstGeom>
-          <a:ln>
-            <a:noFill/>
-          </a:ln>
-        </p:spPr>
-        <p:style>
-          <a:lnRef idx="2">
-            <a:schemeClr val="accent1">
-              <a:shade val="50000"/>
-            </a:schemeClr>
-          </a:lnRef>
-          <a:fillRef idx="1">
-            <a:schemeClr val="accent1"/>
-          </a:fillRef>
-          <a:effectRef idx="0">
-            <a:schemeClr val="accent1"/>
-          </a:effectRef>
-          <a:fontRef idx="minor">
-            <a:schemeClr val="lt1"/>
-          </a:fontRef>
-        </p:style>
-        <p:txBody>
-          <a:bodyPr rtlCol="0" anchor="ctr"/>
-          <a:lstStyle/>
-          <a:p>
-            <a:pPr algn="ctr"/>
-            <a:endParaRPr lang="en-US"/>
-          </a:p>
-        </p:txBody>
-      </p:sp>
-      <p:sp>
-        <p:nvSpPr>
-          <p:cNvPr id="2" name="Title 1">
-            <a:extLst>
-              <a:ext uri="{FF2B5EF4-FFF2-40B4-BE49-F238E27FC236}">
                 <a16:creationId xmlns:a16="http://schemas.microsoft.com/office/drawing/2014/main" id="{FAA82B50-408A-8ADE-87E3-330DE17CF383}"/>
               </a:ext>
             </a:extLst>
@@ -14895,7 +9070,7 @@
           <a:lstStyle/>
           <a:p>
             <a:r>
-              <a:rPr lang="en-US" sz="4200" kern="1200">
+              <a:rPr lang="en-US" sz="4200" kern="1200" dirty="0">
                 <a:solidFill>
                   <a:schemeClr val="tx1"/>
                 </a:solidFill>
@@ -15284,7 +9459,7 @@
               <a:buChar char="•"/>
             </a:pPr>
             <a:r>
-              <a:rPr lang="en-US" sz="2200"/>
+              <a:rPr lang="en-US" sz="2200" dirty="0"/>
               <a:t>Emergency Search</a:t>
             </a:r>
           </a:p>
@@ -15294,7 +9469,7 @@
               <a:buChar char="•"/>
             </a:pPr>
             <a:r>
-              <a:rPr lang="en-US" sz="2200"/>
+              <a:rPr lang="en-US" sz="2200" dirty="0"/>
               <a:t>Detailed Facility Search &amp; Filtering (type, specialty, emergency)</a:t>
             </a:r>
           </a:p>
@@ -15314,13 +9489,13 @@
               <a:buChar char="•"/>
             </a:pPr>
             <a:r>
-              <a:rPr lang="en-US" sz="2200"/>
+              <a:rPr lang="en-US" sz="2200" dirty="0"/>
               <a:t>Interactive Mapping</a:t>
             </a:r>
             <a:br>
-              <a:rPr lang="en-US" sz="2200"/>
+              <a:rPr lang="en-US" sz="2200" dirty="0"/>
             </a:br>
-            <a:endParaRPr lang="en-US" sz="2200"/>
+            <a:endParaRPr lang="en-US" sz="2200" dirty="0"/>
           </a:p>
           <a:p>
             <a:pPr marL="285750" indent="-228600">
@@ -15328,7 +9503,7 @@
               <a:buChar char="•"/>
             </a:pPr>
             <a:r>
-              <a:rPr lang="en-US" sz="2200"/>
+              <a:rPr lang="en-US" sz="2200" dirty="0"/>
               <a:t>Routing</a:t>
             </a:r>
           </a:p>
@@ -15338,7 +9513,7 @@
               <a:buChar char="•"/>
             </a:pPr>
             <a:r>
-              <a:rPr lang="en-US" sz="2200"/>
+              <a:rPr lang="en-US" sz="2200" dirty="0"/>
               <a:t>User Feedback</a:t>
             </a:r>
           </a:p>
@@ -15348,7 +9523,7 @@
               <a:buChar char="•"/>
             </a:pPr>
             <a:r>
-              <a:rPr lang="en-US" sz="2200"/>
+              <a:rPr lang="en-US" sz="2200" dirty="0"/>
               <a:t>Admin Interface</a:t>
             </a:r>
           </a:p>
@@ -15358,7 +9533,7 @@
               <a:buChar char="•"/>
             </a:pPr>
             <a:r>
-              <a:rPr lang="en-US" sz="2200"/>
+              <a:rPr lang="en-US" sz="2200" dirty="0"/>
               <a:t>Limited to Vilnius </a:t>
             </a:r>
           </a:p>
@@ -15377,7 +9552,7 @@
 </p:sld>
 </file>
 
-<file path=ppt/slides/slide7.xml><?xml version="1.0" encoding="utf-8"?>
+<file path=ppt/slides/slide5.xml><?xml version="1.0" encoding="utf-8"?>
 <p:sld xmlns:a="http://schemas.openxmlformats.org/drawingml/2006/main" xmlns:r="http://schemas.openxmlformats.org/officeDocument/2006/relationships" xmlns:p="http://schemas.openxmlformats.org/presentationml/2006/main">
   <p:cSld>
     <p:bg>
@@ -16077,6 +10252,672 @@
 </p:sld>
 </file>
 
+<file path=ppt/slides/slide6.xml><?xml version="1.0" encoding="utf-8"?>
+<p:sld xmlns:a="http://schemas.openxmlformats.org/drawingml/2006/main" xmlns:r="http://schemas.openxmlformats.org/officeDocument/2006/relationships" xmlns:p="http://schemas.openxmlformats.org/presentationml/2006/main">
+  <p:cSld>
+    <p:bg>
+      <p:bgPr>
+        <a:solidFill>
+          <a:schemeClr val="bg1"/>
+        </a:solidFill>
+        <a:effectLst/>
+      </p:bgPr>
+    </p:bg>
+    <p:spTree>
+      <p:nvGrpSpPr>
+        <p:cNvPr id="1" name=""/>
+        <p:cNvGrpSpPr/>
+        <p:nvPr/>
+      </p:nvGrpSpPr>
+      <p:grpSpPr>
+        <a:xfrm>
+          <a:off x="0" y="0"/>
+          <a:ext cx="0" cy="0"/>
+          <a:chOff x="0" y="0"/>
+          <a:chExt cx="0" cy="0"/>
+        </a:xfrm>
+      </p:grpSpPr>
+      <p:sp useBgFill="1">
+        <p:nvSpPr>
+          <p:cNvPr id="36" name="Rectangle 35">
+            <a:extLst>
+              <a:ext uri="{FF2B5EF4-FFF2-40B4-BE49-F238E27FC236}">
+                <a16:creationId xmlns:a16="http://schemas.microsoft.com/office/drawing/2014/main" id="{665DBBEF-238B-476B-96AB-8AAC3224ECEA}"/>
+              </a:ext>
+              <a:ext uri="{C183D7F6-B498-43B3-948B-1728B52AA6E4}">
+                <adec:decorative xmlns:adec="http://schemas.microsoft.com/office/drawing/2017/decorative" val="1"/>
+              </a:ext>
+            </a:extLst>
+          </p:cNvPr>
+          <p:cNvSpPr>
+            <a:spLocks noGrp="1" noRot="1" noChangeAspect="1" noMove="1" noResize="1" noEditPoints="1" noAdjustHandles="1" noChangeArrowheads="1" noChangeShapeType="1" noTextEdit="1"/>
+          </p:cNvSpPr>
+          <p:nvPr>
+            <p:extLst>
+              <p:ext uri="{386F3935-93C4-4BCD-93E2-E3B085C9AB24}">
+                <p16:designElem xmlns:p16="http://schemas.microsoft.com/office/powerpoint/2015/main" val="1"/>
+              </p:ext>
+            </p:extLst>
+          </p:nvPr>
+        </p:nvSpPr>
+        <p:spPr>
+          <a:xfrm>
+            <a:off x="0" y="0"/>
+            <a:ext cx="12192000" cy="6858000"/>
+          </a:xfrm>
+          <a:prstGeom prst="rect">
+            <a:avLst/>
+          </a:prstGeom>
+          <a:ln>
+            <a:noFill/>
+          </a:ln>
+        </p:spPr>
+        <p:style>
+          <a:lnRef idx="2">
+            <a:schemeClr val="accent1">
+              <a:shade val="50000"/>
+            </a:schemeClr>
+          </a:lnRef>
+          <a:fillRef idx="1">
+            <a:schemeClr val="accent1"/>
+          </a:fillRef>
+          <a:effectRef idx="0">
+            <a:schemeClr val="accent1"/>
+          </a:effectRef>
+          <a:fontRef idx="minor">
+            <a:schemeClr val="lt1"/>
+          </a:fontRef>
+        </p:style>
+        <p:txBody>
+          <a:bodyPr rtlCol="0" anchor="ctr"/>
+          <a:lstStyle/>
+          <a:p>
+            <a:pPr algn="ctr"/>
+            <a:endParaRPr lang="en-US"/>
+          </a:p>
+        </p:txBody>
+      </p:sp>
+      <p:sp>
+        <p:nvSpPr>
+          <p:cNvPr id="2" name="Title 1">
+            <a:extLst>
+              <a:ext uri="{FF2B5EF4-FFF2-40B4-BE49-F238E27FC236}">
+                <a16:creationId xmlns:a16="http://schemas.microsoft.com/office/drawing/2014/main" id="{5F2E5B02-607B-ED5D-265A-02155116578B}"/>
+              </a:ext>
+            </a:extLst>
+          </p:cNvPr>
+          <p:cNvSpPr>
+            <a:spLocks noGrp="1"/>
+          </p:cNvSpPr>
+          <p:nvPr>
+            <p:ph type="title"/>
+          </p:nvPr>
+        </p:nvSpPr>
+        <p:spPr>
+          <a:xfrm>
+            <a:off x="638882" y="639193"/>
+            <a:ext cx="3571810" cy="3573516"/>
+          </a:xfrm>
+        </p:spPr>
+        <p:txBody>
+          <a:bodyPr vert="horz" lIns="91440" tIns="45720" rIns="91440" bIns="45720" rtlCol="0" anchor="b">
+            <a:normAutofit/>
+          </a:bodyPr>
+          <a:lstStyle/>
+          <a:p>
+            <a:r>
+              <a:rPr lang="en-US" sz="4600" kern="1200" dirty="0">
+                <a:solidFill>
+                  <a:schemeClr val="tx1"/>
+                </a:solidFill>
+                <a:latin typeface="+mj-lt"/>
+                <a:ea typeface="+mj-ea"/>
+                <a:cs typeface="+mj-cs"/>
+              </a:rPr>
+              <a:t>System Development - Data Model</a:t>
+            </a:r>
+          </a:p>
+        </p:txBody>
+      </p:sp>
+      <p:sp>
+        <p:nvSpPr>
+          <p:cNvPr id="35" name="sketch line">
+            <a:extLst>
+              <a:ext uri="{FF2B5EF4-FFF2-40B4-BE49-F238E27FC236}">
+                <a16:creationId xmlns:a16="http://schemas.microsoft.com/office/drawing/2014/main" id="{3FCFB1DE-0B7E-48CC-BA90-B2AB0889F9D6}"/>
+              </a:ext>
+              <a:ext uri="{C183D7F6-B498-43B3-948B-1728B52AA6E4}">
+                <adec:decorative xmlns:adec="http://schemas.microsoft.com/office/drawing/2017/decorative" val="1"/>
+              </a:ext>
+            </a:extLst>
+          </p:cNvPr>
+          <p:cNvSpPr>
+            <a:spLocks noGrp="1" noRot="1" noChangeAspect="1" noMove="1" noResize="1" noEditPoints="1" noAdjustHandles="1" noChangeArrowheads="1" noChangeShapeType="1" noTextEdit="1"/>
+          </p:cNvSpPr>
+          <p:nvPr>
+            <p:extLst>
+              <p:ext uri="{386F3935-93C4-4BCD-93E2-E3B085C9AB24}">
+                <p16:designElem xmlns:p16="http://schemas.microsoft.com/office/powerpoint/2015/main" val="1"/>
+              </p:ext>
+            </p:extLst>
+          </p:nvPr>
+        </p:nvSpPr>
+        <p:spPr>
+          <a:xfrm>
+            <a:off x="643278" y="4409267"/>
+            <a:ext cx="3255095" cy="18288"/>
+          </a:xfrm>
+          <a:custGeom>
+            <a:avLst/>
+            <a:gdLst>
+              <a:gd name="connsiteX0" fmla="*/ 0 w 3255095"/>
+              <a:gd name="connsiteY0" fmla="*/ 0 h 18288"/>
+              <a:gd name="connsiteX1" fmla="*/ 618468 w 3255095"/>
+              <a:gd name="connsiteY1" fmla="*/ 0 h 18288"/>
+              <a:gd name="connsiteX2" fmla="*/ 1269487 w 3255095"/>
+              <a:gd name="connsiteY2" fmla="*/ 0 h 18288"/>
+              <a:gd name="connsiteX3" fmla="*/ 1953057 w 3255095"/>
+              <a:gd name="connsiteY3" fmla="*/ 0 h 18288"/>
+              <a:gd name="connsiteX4" fmla="*/ 2636627 w 3255095"/>
+              <a:gd name="connsiteY4" fmla="*/ 0 h 18288"/>
+              <a:gd name="connsiteX5" fmla="*/ 3255095 w 3255095"/>
+              <a:gd name="connsiteY5" fmla="*/ 0 h 18288"/>
+              <a:gd name="connsiteX6" fmla="*/ 3255095 w 3255095"/>
+              <a:gd name="connsiteY6" fmla="*/ 18288 h 18288"/>
+              <a:gd name="connsiteX7" fmla="*/ 2538974 w 3255095"/>
+              <a:gd name="connsiteY7" fmla="*/ 18288 h 18288"/>
+              <a:gd name="connsiteX8" fmla="*/ 1822853 w 3255095"/>
+              <a:gd name="connsiteY8" fmla="*/ 18288 h 18288"/>
+              <a:gd name="connsiteX9" fmla="*/ 1171834 w 3255095"/>
+              <a:gd name="connsiteY9" fmla="*/ 18288 h 18288"/>
+              <a:gd name="connsiteX10" fmla="*/ 0 w 3255095"/>
+              <a:gd name="connsiteY10" fmla="*/ 18288 h 18288"/>
+              <a:gd name="connsiteX11" fmla="*/ 0 w 3255095"/>
+              <a:gd name="connsiteY11" fmla="*/ 0 h 18288"/>
+            </a:gdLst>
+            <a:ahLst/>
+            <a:cxnLst>
+              <a:cxn ang="0">
+                <a:pos x="connsiteX0" y="connsiteY0"/>
+              </a:cxn>
+              <a:cxn ang="0">
+                <a:pos x="connsiteX1" y="connsiteY1"/>
+              </a:cxn>
+              <a:cxn ang="0">
+                <a:pos x="connsiteX2" y="connsiteY2"/>
+              </a:cxn>
+              <a:cxn ang="0">
+                <a:pos x="connsiteX3" y="connsiteY3"/>
+              </a:cxn>
+              <a:cxn ang="0">
+                <a:pos x="connsiteX4" y="connsiteY4"/>
+              </a:cxn>
+              <a:cxn ang="0">
+                <a:pos x="connsiteX5" y="connsiteY5"/>
+              </a:cxn>
+              <a:cxn ang="0">
+                <a:pos x="connsiteX6" y="connsiteY6"/>
+              </a:cxn>
+              <a:cxn ang="0">
+                <a:pos x="connsiteX7" y="connsiteY7"/>
+              </a:cxn>
+              <a:cxn ang="0">
+                <a:pos x="connsiteX8" y="connsiteY8"/>
+              </a:cxn>
+              <a:cxn ang="0">
+                <a:pos x="connsiteX9" y="connsiteY9"/>
+              </a:cxn>
+              <a:cxn ang="0">
+                <a:pos x="connsiteX10" y="connsiteY10"/>
+              </a:cxn>
+              <a:cxn ang="0">
+                <a:pos x="connsiteX11" y="connsiteY11"/>
+              </a:cxn>
+            </a:cxnLst>
+            <a:rect l="l" t="t" r="r" b="b"/>
+            <a:pathLst>
+              <a:path w="3255095" h="18288" fill="none" extrusionOk="0">
+                <a:moveTo>
+                  <a:pt x="0" y="0"/>
+                </a:moveTo>
+                <a:cubicBezTo>
+                  <a:pt x="240201" y="-22123"/>
+                  <a:pt x="462021" y="-19623"/>
+                  <a:pt x="618468" y="0"/>
+                </a:cubicBezTo>
+                <a:cubicBezTo>
+                  <a:pt x="774915" y="19623"/>
+                  <a:pt x="974734" y="2035"/>
+                  <a:pt x="1269487" y="0"/>
+                </a:cubicBezTo>
+                <a:cubicBezTo>
+                  <a:pt x="1564240" y="-2035"/>
+                  <a:pt x="1733579" y="10639"/>
+                  <a:pt x="1953057" y="0"/>
+                </a:cubicBezTo>
+                <a:cubicBezTo>
+                  <a:pt x="2172535" y="-10639"/>
+                  <a:pt x="2453962" y="14018"/>
+                  <a:pt x="2636627" y="0"/>
+                </a:cubicBezTo>
+                <a:cubicBezTo>
+                  <a:pt x="2819292" y="-14018"/>
+                  <a:pt x="3121375" y="5399"/>
+                  <a:pt x="3255095" y="0"/>
+                </a:cubicBezTo>
+                <a:cubicBezTo>
+                  <a:pt x="3254386" y="8157"/>
+                  <a:pt x="3254682" y="12125"/>
+                  <a:pt x="3255095" y="18288"/>
+                </a:cubicBezTo>
+                <a:cubicBezTo>
+                  <a:pt x="3088545" y="23203"/>
+                  <a:pt x="2687475" y="7419"/>
+                  <a:pt x="2538974" y="18288"/>
+                </a:cubicBezTo>
+                <a:cubicBezTo>
+                  <a:pt x="2390473" y="29157"/>
+                  <a:pt x="2137381" y="-8959"/>
+                  <a:pt x="1822853" y="18288"/>
+                </a:cubicBezTo>
+                <a:cubicBezTo>
+                  <a:pt x="1508325" y="45535"/>
+                  <a:pt x="1466437" y="20385"/>
+                  <a:pt x="1171834" y="18288"/>
+                </a:cubicBezTo>
+                <a:cubicBezTo>
+                  <a:pt x="877231" y="16191"/>
+                  <a:pt x="561097" y="37643"/>
+                  <a:pt x="0" y="18288"/>
+                </a:cubicBezTo>
+                <a:cubicBezTo>
+                  <a:pt x="-46" y="12483"/>
+                  <a:pt x="-203" y="6491"/>
+                  <a:pt x="0" y="0"/>
+                </a:cubicBezTo>
+                <a:close/>
+              </a:path>
+              <a:path w="3255095" h="18288" stroke="0" extrusionOk="0">
+                <a:moveTo>
+                  <a:pt x="0" y="0"/>
+                </a:moveTo>
+                <a:cubicBezTo>
+                  <a:pt x="291965" y="19429"/>
+                  <a:pt x="363155" y="8568"/>
+                  <a:pt x="618468" y="0"/>
+                </a:cubicBezTo>
+                <a:cubicBezTo>
+                  <a:pt x="873781" y="-8568"/>
+                  <a:pt x="904459" y="-19505"/>
+                  <a:pt x="1171834" y="0"/>
+                </a:cubicBezTo>
+                <a:cubicBezTo>
+                  <a:pt x="1439209" y="19505"/>
+                  <a:pt x="1744369" y="9790"/>
+                  <a:pt x="1887955" y="0"/>
+                </a:cubicBezTo>
+                <a:cubicBezTo>
+                  <a:pt x="2031541" y="-9790"/>
+                  <a:pt x="2346378" y="21240"/>
+                  <a:pt x="2506423" y="0"/>
+                </a:cubicBezTo>
+                <a:cubicBezTo>
+                  <a:pt x="2666468" y="-21240"/>
+                  <a:pt x="2990257" y="30414"/>
+                  <a:pt x="3255095" y="0"/>
+                </a:cubicBezTo>
+                <a:cubicBezTo>
+                  <a:pt x="3254831" y="4493"/>
+                  <a:pt x="3255479" y="9472"/>
+                  <a:pt x="3255095" y="18288"/>
+                </a:cubicBezTo>
+                <a:cubicBezTo>
+                  <a:pt x="3120743" y="16690"/>
+                  <a:pt x="2759628" y="42462"/>
+                  <a:pt x="2604076" y="18288"/>
+                </a:cubicBezTo>
+                <a:cubicBezTo>
+                  <a:pt x="2448524" y="-5886"/>
+                  <a:pt x="2184336" y="19599"/>
+                  <a:pt x="1887955" y="18288"/>
+                </a:cubicBezTo>
+                <a:cubicBezTo>
+                  <a:pt x="1591574" y="16977"/>
+                  <a:pt x="1548845" y="6870"/>
+                  <a:pt x="1334589" y="18288"/>
+                </a:cubicBezTo>
+                <a:cubicBezTo>
+                  <a:pt x="1120333" y="29706"/>
+                  <a:pt x="996014" y="9662"/>
+                  <a:pt x="683570" y="18288"/>
+                </a:cubicBezTo>
+                <a:cubicBezTo>
+                  <a:pt x="371126" y="26914"/>
+                  <a:pt x="198687" y="16167"/>
+                  <a:pt x="0" y="18288"/>
+                </a:cubicBezTo>
+                <a:cubicBezTo>
+                  <a:pt x="843" y="9577"/>
+                  <a:pt x="371" y="6900"/>
+                  <a:pt x="0" y="0"/>
+                </a:cubicBezTo>
+                <a:close/>
+              </a:path>
+            </a:pathLst>
+          </a:custGeom>
+          <a:solidFill>
+            <a:schemeClr val="accent2"/>
+          </a:solidFill>
+          <a:ln w="38100" cap="rnd">
+            <a:solidFill>
+              <a:schemeClr val="accent2"/>
+            </a:solidFill>
+            <a:round/>
+            <a:extLst>
+              <a:ext uri="{C807C97D-BFC1-408E-A445-0C87EB9F89A2}">
+                <ask:lineSketchStyleProps xmlns:ask="http://schemas.microsoft.com/office/drawing/2018/sketchyshapes" sd="1219033472">
+                  <a:prstGeom prst="rect">
+                    <a:avLst/>
+                  </a:prstGeom>
+                  <ask:type>
+                    <ask:lineSketchFreehand/>
+                  </ask:type>
+                </ask:lineSketchStyleProps>
+              </a:ext>
+            </a:extLst>
+          </a:ln>
+        </p:spPr>
+        <p:style>
+          <a:lnRef idx="2">
+            <a:schemeClr val="accent1">
+              <a:shade val="50000"/>
+            </a:schemeClr>
+          </a:lnRef>
+          <a:fillRef idx="1">
+            <a:schemeClr val="accent1"/>
+          </a:fillRef>
+          <a:effectRef idx="0">
+            <a:schemeClr val="accent1"/>
+          </a:effectRef>
+          <a:fontRef idx="minor">
+            <a:schemeClr val="lt1"/>
+          </a:fontRef>
+        </p:style>
+        <p:txBody>
+          <a:bodyPr rtlCol="0" anchor="ctr"/>
+          <a:lstStyle/>
+          <a:p>
+            <a:pPr algn="ctr"/>
+            <a:endParaRPr lang="en-US"/>
+          </a:p>
+        </p:txBody>
+      </p:sp>
+      <p:pic>
+        <p:nvPicPr>
+          <p:cNvPr id="6" name="Content Placeholder 5" descr="A screenshot of a computer&#10;&#10;Description automatically generated">
+            <a:extLst>
+              <a:ext uri="{FF2B5EF4-FFF2-40B4-BE49-F238E27FC236}">
+                <a16:creationId xmlns:a16="http://schemas.microsoft.com/office/drawing/2014/main" id="{3B66C09A-4BD2-F3EF-1DED-A3377D082B33}"/>
+              </a:ext>
+            </a:extLst>
+          </p:cNvPr>
+          <p:cNvPicPr>
+            <a:picLocks noChangeAspect="1"/>
+          </p:cNvPicPr>
+          <p:nvPr/>
+        </p:nvPicPr>
+        <p:blipFill>
+          <a:blip r:embed="rId3"/>
+          <a:stretch>
+            <a:fillRect/>
+          </a:stretch>
+        </p:blipFill>
+        <p:spPr>
+          <a:xfrm>
+            <a:off x="4654296" y="736858"/>
+            <a:ext cx="7214616" cy="5356851"/>
+          </a:xfrm>
+          <a:prstGeom prst="rect">
+            <a:avLst/>
+          </a:prstGeom>
+        </p:spPr>
+      </p:pic>
+    </p:spTree>
+    <p:extLst>
+      <p:ext uri="{BB962C8B-B14F-4D97-AF65-F5344CB8AC3E}">
+        <p14:creationId xmlns:p14="http://schemas.microsoft.com/office/powerpoint/2010/main" val="4163475466"/>
+      </p:ext>
+    </p:extLst>
+  </p:cSld>
+  <p:clrMapOvr>
+    <a:masterClrMapping/>
+  </p:clrMapOvr>
+</p:sld>
+</file>
+
+<file path=ppt/slides/slide7.xml><?xml version="1.0" encoding="utf-8"?>
+<p:sld xmlns:a="http://schemas.openxmlformats.org/drawingml/2006/main" xmlns:r="http://schemas.openxmlformats.org/officeDocument/2006/relationships" xmlns:p="http://schemas.openxmlformats.org/presentationml/2006/main">
+  <p:cSld>
+    <p:bg>
+      <p:bgPr>
+        <a:solidFill>
+          <a:schemeClr val="bg1"/>
+        </a:solidFill>
+        <a:effectLst/>
+      </p:bgPr>
+    </p:bg>
+    <p:spTree>
+      <p:nvGrpSpPr>
+        <p:cNvPr id="1" name=""/>
+        <p:cNvGrpSpPr/>
+        <p:nvPr/>
+      </p:nvGrpSpPr>
+      <p:grpSpPr>
+        <a:xfrm>
+          <a:off x="0" y="0"/>
+          <a:ext cx="0" cy="0"/>
+          <a:chOff x="0" y="0"/>
+          <a:chExt cx="0" cy="0"/>
+        </a:xfrm>
+      </p:grpSpPr>
+      <p:sp>
+        <p:nvSpPr>
+          <p:cNvPr id="33" name="Down Arrow 7">
+            <a:extLst>
+              <a:ext uri="{FF2B5EF4-FFF2-40B4-BE49-F238E27FC236}">
+                <a16:creationId xmlns:a16="http://schemas.microsoft.com/office/drawing/2014/main" id="{D4771268-CB57-404A-9271-370EB28F6090}"/>
+              </a:ext>
+              <a:ext uri="{C183D7F6-B498-43B3-948B-1728B52AA6E4}">
+                <adec:decorative xmlns:adec="http://schemas.microsoft.com/office/drawing/2017/decorative" val="1"/>
+              </a:ext>
+            </a:extLst>
+          </p:cNvPr>
+          <p:cNvSpPr>
+            <a:spLocks noGrp="1" noRot="1" noChangeAspect="1" noMove="1" noResize="1" noEditPoints="1" noAdjustHandles="1" noChangeArrowheads="1" noChangeShapeType="1" noTextEdit="1"/>
+          </p:cNvSpPr>
+          <p:nvPr>
+            <p:extLst>
+              <p:ext uri="{386F3935-93C4-4BCD-93E2-E3B085C9AB24}">
+                <p16:designElem xmlns:p16="http://schemas.microsoft.com/office/powerpoint/2015/main" val="1"/>
+              </p:ext>
+            </p:extLst>
+          </p:nvPr>
+        </p:nvSpPr>
+        <p:spPr>
+          <a:xfrm rot="16200000">
+            <a:off x="800100" y="1491343"/>
+            <a:ext cx="3333749" cy="3499103"/>
+          </a:xfrm>
+          <a:prstGeom prst="downArrow">
+            <a:avLst>
+              <a:gd name="adj1" fmla="val 100000"/>
+              <a:gd name="adj2" fmla="val 15788"/>
+            </a:avLst>
+          </a:prstGeom>
+          <a:solidFill>
+            <a:srgbClr val="404040"/>
+          </a:solidFill>
+          <a:ln w="53975">
+            <a:noFill/>
+          </a:ln>
+        </p:spPr>
+        <p:style>
+          <a:lnRef idx="2">
+            <a:schemeClr val="accent1">
+              <a:shade val="50000"/>
+            </a:schemeClr>
+          </a:lnRef>
+          <a:fillRef idx="1">
+            <a:schemeClr val="accent1"/>
+          </a:fillRef>
+          <a:effectRef idx="0">
+            <a:schemeClr val="accent1"/>
+          </a:effectRef>
+          <a:fontRef idx="minor">
+            <a:schemeClr val="lt1"/>
+          </a:fontRef>
+        </p:style>
+        <p:txBody>
+          <a:bodyPr rtlCol="0" anchor="ctr"/>
+          <a:lstStyle/>
+          <a:p>
+            <a:pPr algn="ctr"/>
+            <a:endParaRPr lang="en-US"/>
+          </a:p>
+        </p:txBody>
+      </p:sp>
+      <p:sp>
+        <p:nvSpPr>
+          <p:cNvPr id="2" name="Title 1">
+            <a:extLst>
+              <a:ext uri="{FF2B5EF4-FFF2-40B4-BE49-F238E27FC236}">
+                <a16:creationId xmlns:a16="http://schemas.microsoft.com/office/drawing/2014/main" id="{B00D3921-216D-5053-7810-E936643BF306}"/>
+              </a:ext>
+            </a:extLst>
+          </p:cNvPr>
+          <p:cNvSpPr>
+            <a:spLocks noGrp="1"/>
+          </p:cNvSpPr>
+          <p:nvPr>
+            <p:ph type="title"/>
+          </p:nvPr>
+        </p:nvSpPr>
+        <p:spPr>
+          <a:xfrm>
+            <a:off x="1028700" y="1967266"/>
+            <a:ext cx="2628900" cy="2547257"/>
+          </a:xfrm>
+          <a:noFill/>
+        </p:spPr>
+        <p:txBody>
+          <a:bodyPr vert="horz" lIns="91440" tIns="45720" rIns="91440" bIns="45720" rtlCol="0" anchor="ctr">
+            <a:normAutofit/>
+          </a:bodyPr>
+          <a:lstStyle/>
+          <a:p>
+            <a:pPr algn="ctr"/>
+            <a:r>
+              <a:rPr lang="en-US" sz="3600" kern="1200">
+                <a:solidFill>
+                  <a:srgbClr val="FFFFFF"/>
+                </a:solidFill>
+                <a:latin typeface="+mj-lt"/>
+                <a:ea typeface="+mj-ea"/>
+                <a:cs typeface="+mj-cs"/>
+              </a:rPr>
+              <a:t>Deployment Architecture</a:t>
+            </a:r>
+          </a:p>
+        </p:txBody>
+      </p:sp>
+      <p:pic>
+        <p:nvPicPr>
+          <p:cNvPr id="14" name="Picture 13" descr="A diagram of a computer&#10;&#10;Description automatically generated">
+            <a:extLst>
+              <a:ext uri="{FF2B5EF4-FFF2-40B4-BE49-F238E27FC236}">
+                <a16:creationId xmlns:a16="http://schemas.microsoft.com/office/drawing/2014/main" id="{B9A2BB9A-1FC6-06FE-156C-7D78BD6E141D}"/>
+              </a:ext>
+            </a:extLst>
+          </p:cNvPr>
+          <p:cNvPicPr>
+            <a:picLocks noChangeAspect="1"/>
+          </p:cNvPicPr>
+          <p:nvPr/>
+        </p:nvPicPr>
+        <p:blipFill>
+          <a:blip r:embed="rId3"/>
+          <a:stretch>
+            <a:fillRect/>
+          </a:stretch>
+        </p:blipFill>
+        <p:spPr>
+          <a:xfrm>
+            <a:off x="4843046" y="643466"/>
+            <a:ext cx="6649240" cy="5568739"/>
+          </a:xfrm>
+          <a:prstGeom prst="rect">
+            <a:avLst/>
+          </a:prstGeom>
+        </p:spPr>
+      </p:pic>
+      <p:sp>
+        <p:nvSpPr>
+          <p:cNvPr id="6" name="AutoShape 4">
+            <a:extLst>
+              <a:ext uri="{FF2B5EF4-FFF2-40B4-BE49-F238E27FC236}">
+                <a16:creationId xmlns:a16="http://schemas.microsoft.com/office/drawing/2014/main" id="{2D27B565-9ABD-A63F-3998-86988E84B192}"/>
+              </a:ext>
+            </a:extLst>
+          </p:cNvPr>
+          <p:cNvSpPr>
+            <a:spLocks noChangeAspect="1" noChangeArrowheads="1"/>
+          </p:cNvSpPr>
+          <p:nvPr/>
+        </p:nvSpPr>
+        <p:spPr bwMode="auto">
+          <a:xfrm>
+            <a:off x="5943600" y="3276600"/>
+            <a:ext cx="304800" cy="304800"/>
+          </a:xfrm>
+          <a:prstGeom prst="rect">
+            <a:avLst/>
+          </a:prstGeom>
+          <a:noFill/>
+          <a:extLst>
+            <a:ext uri="{909E8E84-426E-40DD-AFC4-6F175D3DCCD1}">
+              <a14:hiddenFill xmlns:a14="http://schemas.microsoft.com/office/drawing/2010/main">
+                <a:solidFill>
+                  <a:srgbClr val="FFFFFF"/>
+                </a:solidFill>
+              </a14:hiddenFill>
+            </a:ext>
+          </a:extLst>
+        </p:spPr>
+        <p:txBody>
+          <a:bodyPr vert="horz" wrap="square" lIns="91440" tIns="45720" rIns="91440" bIns="45720" numCol="1" anchor="t" anchorCtr="0" compatLnSpc="1">
+            <a:prstTxWarp prst="textNoShape">
+              <a:avLst/>
+            </a:prstTxWarp>
+          </a:bodyPr>
+          <a:lstStyle/>
+          <a:p>
+            <a:endParaRPr lang="en-US"/>
+          </a:p>
+        </p:txBody>
+      </p:sp>
+    </p:spTree>
+    <p:extLst>
+      <p:ext uri="{BB962C8B-B14F-4D97-AF65-F5344CB8AC3E}">
+        <p14:creationId xmlns:p14="http://schemas.microsoft.com/office/powerpoint/2010/main" val="2254943194"/>
+      </p:ext>
+    </p:extLst>
+  </p:cSld>
+  <p:clrMapOvr>
+    <a:masterClrMapping/>
+  </p:clrMapOvr>
+</p:sld>
+</file>
+
 <file path=ppt/slides/slide8.xml><?xml version="1.0" encoding="utf-8"?>
 <p:sld xmlns:a="http://schemas.openxmlformats.org/drawingml/2006/main" xmlns:r="http://schemas.openxmlformats.org/officeDocument/2006/relationships" xmlns:p="http://schemas.openxmlformats.org/presentationml/2006/main">
   <p:cSld>
@@ -16104,10 +10945,10 @@
       </p:grpSpPr>
       <p:sp useBgFill="1">
         <p:nvSpPr>
-          <p:cNvPr id="26" name="Rectangle 25">
+          <p:cNvPr id="30" name="Rectangle 29">
             <a:extLst>
               <a:ext uri="{FF2B5EF4-FFF2-40B4-BE49-F238E27FC236}">
-                <a16:creationId xmlns:a16="http://schemas.microsoft.com/office/drawing/2014/main" id="{C4879EFC-8E62-4E00-973C-C45EE9EC676D}"/>
+                <a16:creationId xmlns:a16="http://schemas.microsoft.com/office/drawing/2014/main" id="{94BFCCA4-109C-4B21-816E-144FE75C38EE}"/>
               </a:ext>
               <a:ext uri="{C183D7F6-B498-43B3-948B-1728B52AA6E4}">
                 <adec:decorative xmlns:adec="http://schemas.microsoft.com/office/drawing/2017/decorative" val="1"/>
@@ -16167,7 +11008,7 @@
           <p:cNvPr id="2" name="Title 1">
             <a:extLst>
               <a:ext uri="{FF2B5EF4-FFF2-40B4-BE49-F238E27FC236}">
-                <a16:creationId xmlns:a16="http://schemas.microsoft.com/office/drawing/2014/main" id="{B00D3921-216D-5053-7810-E936643BF306}"/>
+                <a16:creationId xmlns:a16="http://schemas.microsoft.com/office/drawing/2014/main" id="{1CA83CCB-8D09-8AF7-283C-93A870E646E0}"/>
               </a:ext>
             </a:extLst>
           </p:cNvPr>
@@ -16180,30 +11021,29 @@
         </p:nvSpPr>
         <p:spPr>
           <a:xfrm>
-            <a:off x="638881" y="457200"/>
-            <a:ext cx="10909640" cy="1368614"/>
+            <a:off x="630918" y="643465"/>
+            <a:ext cx="3895359" cy="1846615"/>
           </a:xfrm>
         </p:spPr>
         <p:txBody>
-          <a:bodyPr vert="horz" lIns="91440" tIns="45720" rIns="91440" bIns="45720" rtlCol="0" anchor="ctr">
+          <a:bodyPr vert="horz" lIns="91440" tIns="45720" rIns="91440" bIns="45720" rtlCol="0" anchor="b">
             <a:normAutofit/>
           </a:bodyPr>
           <a:lstStyle/>
           <a:p>
-            <a:pPr algn="ctr"/>
-            <a:r>
-              <a:rPr lang="en-US" sz="5600"/>
-              <a:t>System Development - Architecture</a:t>
+            <a:r>
+              <a:rPr lang="en-US" sz="3000" dirty="0"/>
+              <a:t>System Development - Frontend User Interaction</a:t>
             </a:r>
           </a:p>
         </p:txBody>
       </p:sp>
       <p:sp>
         <p:nvSpPr>
-          <p:cNvPr id="28" name="sketch line">
+          <p:cNvPr id="35" name="sketch line">
             <a:extLst>
               <a:ext uri="{FF2B5EF4-FFF2-40B4-BE49-F238E27FC236}">
-                <a16:creationId xmlns:a16="http://schemas.microsoft.com/office/drawing/2014/main" id="{D6A9C53F-5F90-40A5-8C85-5412D39C8C68}"/>
+                <a16:creationId xmlns:a16="http://schemas.microsoft.com/office/drawing/2014/main" id="{0059B5C0-FEC8-4370-AF45-02E3AEF6FA6D}"/>
               </a:ext>
               <a:ext uri="{C183D7F6-B498-43B3-948B-1728B52AA6E4}">
                 <adec:decorative xmlns:adec="http://schemas.microsoft.com/office/drawing/2017/decorative" val="1"/>
@@ -16223,38 +11063,42 @@
         </p:nvSpPr>
         <p:spPr>
           <a:xfrm>
-            <a:off x="4450080" y="1850683"/>
-            <a:ext cx="3291840" cy="18288"/>
+            <a:off x="640080" y="2659144"/>
+            <a:ext cx="3566160" cy="18288"/>
           </a:xfrm>
           <a:custGeom>
             <a:avLst/>
             <a:gdLst>
-              <a:gd name="connsiteX0" fmla="*/ 0 w 3291840"/>
+              <a:gd name="connsiteX0" fmla="*/ 0 w 3566160"/>
               <a:gd name="connsiteY0" fmla="*/ 0 h 18288"/>
-              <a:gd name="connsiteX1" fmla="*/ 658368 w 3291840"/>
+              <a:gd name="connsiteX1" fmla="*/ 665683 w 3566160"/>
               <a:gd name="connsiteY1" fmla="*/ 0 h 18288"/>
-              <a:gd name="connsiteX2" fmla="*/ 1283818 w 3291840"/>
+              <a:gd name="connsiteX2" fmla="*/ 1331366 w 3566160"/>
               <a:gd name="connsiteY2" fmla="*/ 0 h 18288"/>
-              <a:gd name="connsiteX3" fmla="*/ 1909267 w 3291840"/>
+              <a:gd name="connsiteX3" fmla="*/ 1818742 w 3566160"/>
               <a:gd name="connsiteY3" fmla="*/ 0 h 18288"/>
-              <a:gd name="connsiteX4" fmla="*/ 2633472 w 3291840"/>
+              <a:gd name="connsiteX4" fmla="*/ 2413102 w 3566160"/>
               <a:gd name="connsiteY4" fmla="*/ 0 h 18288"/>
-              <a:gd name="connsiteX5" fmla="*/ 3291840 w 3291840"/>
+              <a:gd name="connsiteX5" fmla="*/ 2936138 w 3566160"/>
               <a:gd name="connsiteY5" fmla="*/ 0 h 18288"/>
-              <a:gd name="connsiteX6" fmla="*/ 3291840 w 3291840"/>
-              <a:gd name="connsiteY6" fmla="*/ 18288 h 18288"/>
-              <a:gd name="connsiteX7" fmla="*/ 2633472 w 3291840"/>
+              <a:gd name="connsiteX6" fmla="*/ 3566160 w 3566160"/>
+              <a:gd name="connsiteY6" fmla="*/ 0 h 18288"/>
+              <a:gd name="connsiteX7" fmla="*/ 3566160 w 3566160"/>
               <a:gd name="connsiteY7" fmla="*/ 18288 h 18288"/>
-              <a:gd name="connsiteX8" fmla="*/ 2073859 w 3291840"/>
+              <a:gd name="connsiteX8" fmla="*/ 2971800 w 3566160"/>
               <a:gd name="connsiteY8" fmla="*/ 18288 h 18288"/>
-              <a:gd name="connsiteX9" fmla="*/ 1448410 w 3291840"/>
+              <a:gd name="connsiteX9" fmla="*/ 2448763 w 3566160"/>
               <a:gd name="connsiteY9" fmla="*/ 18288 h 18288"/>
-              <a:gd name="connsiteX10" fmla="*/ 822960 w 3291840"/>
+              <a:gd name="connsiteX10" fmla="*/ 1854403 w 3566160"/>
               <a:gd name="connsiteY10" fmla="*/ 18288 h 18288"/>
-              <a:gd name="connsiteX11" fmla="*/ 0 w 3291840"/>
+              <a:gd name="connsiteX11" fmla="*/ 1295705 w 3566160"/>
               <a:gd name="connsiteY11" fmla="*/ 18288 h 18288"/>
-              <a:gd name="connsiteX12" fmla="*/ 0 w 3291840"/>
-              <a:gd name="connsiteY12" fmla="*/ 0 h 18288"/>
+              <a:gd name="connsiteX12" fmla="*/ 772668 w 3566160"/>
+              <a:gd name="connsiteY12" fmla="*/ 18288 h 18288"/>
+              <a:gd name="connsiteX13" fmla="*/ 0 w 3566160"/>
+              <a:gd name="connsiteY13" fmla="*/ 18288 h 18288"/>
+              <a:gd name="connsiteX14" fmla="*/ 0 w 3566160"/>
+              <a:gd name="connsiteY14" fmla="*/ 0 h 18288"/>
             </a:gdLst>
             <a:ahLst/>
             <a:cxnLst>
@@ -16297,137 +11141,163 @@
               <a:cxn ang="0">
                 <a:pos x="connsiteX12" y="connsiteY12"/>
               </a:cxn>
+              <a:cxn ang="0">
+                <a:pos x="connsiteX13" y="connsiteY13"/>
+              </a:cxn>
+              <a:cxn ang="0">
+                <a:pos x="connsiteX14" y="connsiteY14"/>
+              </a:cxn>
             </a:cxnLst>
             <a:rect l="l" t="t" r="r" b="b"/>
             <a:pathLst>
-              <a:path w="3291840" h="18288" fill="none" extrusionOk="0">
+              <a:path w="3566160" h="18288" fill="none" extrusionOk="0">
                 <a:moveTo>
                   <a:pt x="0" y="0"/>
                 </a:moveTo>
                 <a:cubicBezTo>
-                  <a:pt x="173077" y="-20031"/>
-                  <a:pt x="443104" y="6424"/>
-                  <a:pt x="658368" y="0"/>
-                </a:cubicBezTo>
-                <a:cubicBezTo>
-                  <a:pt x="873632" y="-6424"/>
-                  <a:pt x="1034028" y="11764"/>
-                  <a:pt x="1283818" y="0"/>
-                </a:cubicBezTo>
-                <a:cubicBezTo>
-                  <a:pt x="1533608" y="-11764"/>
-                  <a:pt x="1691227" y="-30112"/>
-                  <a:pt x="1909267" y="0"/>
-                </a:cubicBezTo>
-                <a:cubicBezTo>
-                  <a:pt x="2127307" y="30112"/>
-                  <a:pt x="2272465" y="-18735"/>
-                  <a:pt x="2633472" y="0"/>
-                </a:cubicBezTo>
-                <a:cubicBezTo>
-                  <a:pt x="2994479" y="18735"/>
-                  <a:pt x="3023324" y="-32030"/>
-                  <a:pt x="3291840" y="0"/>
-                </a:cubicBezTo>
-                <a:cubicBezTo>
-                  <a:pt x="3291406" y="7551"/>
-                  <a:pt x="3291373" y="9822"/>
-                  <a:pt x="3291840" y="18288"/>
-                </a:cubicBezTo>
-                <a:cubicBezTo>
-                  <a:pt x="3048445" y="38989"/>
-                  <a:pt x="2846548" y="-14400"/>
-                  <a:pt x="2633472" y="18288"/>
-                </a:cubicBezTo>
-                <a:cubicBezTo>
-                  <a:pt x="2420396" y="50976"/>
-                  <a:pt x="2304099" y="6336"/>
-                  <a:pt x="2073859" y="18288"/>
-                </a:cubicBezTo>
-                <a:cubicBezTo>
-                  <a:pt x="1843619" y="30240"/>
-                  <a:pt x="1706926" y="10778"/>
-                  <a:pt x="1448410" y="18288"/>
-                </a:cubicBezTo>
-                <a:cubicBezTo>
-                  <a:pt x="1189894" y="25798"/>
-                  <a:pt x="1002278" y="8992"/>
-                  <a:pt x="822960" y="18288"/>
-                </a:cubicBezTo>
-                <a:cubicBezTo>
-                  <a:pt x="643642" y="27585"/>
-                  <a:pt x="307039" y="38051"/>
+                  <a:pt x="222644" y="15773"/>
+                  <a:pt x="447078" y="-30288"/>
+                  <a:pt x="665683" y="0"/>
+                </a:cubicBezTo>
+                <a:cubicBezTo>
+                  <a:pt x="884288" y="30288"/>
+                  <a:pt x="1132425" y="-6167"/>
+                  <a:pt x="1331366" y="0"/>
+                </a:cubicBezTo>
+                <a:cubicBezTo>
+                  <a:pt x="1530307" y="6167"/>
+                  <a:pt x="1680942" y="17562"/>
+                  <a:pt x="1818742" y="0"/>
+                </a:cubicBezTo>
+                <a:cubicBezTo>
+                  <a:pt x="1956542" y="-17562"/>
+                  <a:pt x="2130227" y="23032"/>
+                  <a:pt x="2413102" y="0"/>
+                </a:cubicBezTo>
+                <a:cubicBezTo>
+                  <a:pt x="2695977" y="-23032"/>
+                  <a:pt x="2679988" y="-13260"/>
+                  <a:pt x="2936138" y="0"/>
+                </a:cubicBezTo>
+                <a:cubicBezTo>
+                  <a:pt x="3192288" y="13260"/>
+                  <a:pt x="3378668" y="16268"/>
+                  <a:pt x="3566160" y="0"/>
+                </a:cubicBezTo>
+                <a:cubicBezTo>
+                  <a:pt x="3566199" y="7328"/>
+                  <a:pt x="3566779" y="9982"/>
+                  <a:pt x="3566160" y="18288"/>
+                </a:cubicBezTo>
+                <a:cubicBezTo>
+                  <a:pt x="3315478" y="45899"/>
+                  <a:pt x="3188272" y="-7574"/>
+                  <a:pt x="2971800" y="18288"/>
+                </a:cubicBezTo>
+                <a:cubicBezTo>
+                  <a:pt x="2755328" y="44150"/>
+                  <a:pt x="2598570" y="34692"/>
+                  <a:pt x="2448763" y="18288"/>
+                </a:cubicBezTo>
+                <a:cubicBezTo>
+                  <a:pt x="2298956" y="1884"/>
+                  <a:pt x="2011344" y="-7043"/>
+                  <a:pt x="1854403" y="18288"/>
+                </a:cubicBezTo>
+                <a:cubicBezTo>
+                  <a:pt x="1697462" y="43619"/>
+                  <a:pt x="1444994" y="618"/>
+                  <a:pt x="1295705" y="18288"/>
+                </a:cubicBezTo>
+                <a:cubicBezTo>
+                  <a:pt x="1146416" y="35958"/>
+                  <a:pt x="965401" y="42167"/>
+                  <a:pt x="772668" y="18288"/>
+                </a:cubicBezTo>
+                <a:cubicBezTo>
+                  <a:pt x="579935" y="-5591"/>
+                  <a:pt x="352420" y="-19381"/>
                   <a:pt x="0" y="18288"/>
                 </a:cubicBezTo>
                 <a:cubicBezTo>
-                  <a:pt x="60" y="11696"/>
-                  <a:pt x="66" y="3758"/>
+                  <a:pt x="-593" y="9736"/>
+                  <a:pt x="244" y="6610"/>
                   <a:pt x="0" y="0"/>
                 </a:cubicBezTo>
                 <a:close/>
               </a:path>
-              <a:path w="3291840" h="18288" stroke="0" extrusionOk="0">
+              <a:path w="3566160" h="18288" stroke="0" extrusionOk="0">
                 <a:moveTo>
                   <a:pt x="0" y="0"/>
                 </a:moveTo>
                 <a:cubicBezTo>
-                  <a:pt x="195850" y="28018"/>
-                  <a:pt x="434891" y="17390"/>
-                  <a:pt x="592531" y="0"/>
-                </a:cubicBezTo>
-                <a:cubicBezTo>
-                  <a:pt x="750171" y="-17390"/>
-                  <a:pt x="1018709" y="32200"/>
-                  <a:pt x="1316736" y="0"/>
-                </a:cubicBezTo>
-                <a:cubicBezTo>
-                  <a:pt x="1614763" y="-32200"/>
-                  <a:pt x="1696480" y="-11367"/>
-                  <a:pt x="1876349" y="0"/>
-                </a:cubicBezTo>
-                <a:cubicBezTo>
-                  <a:pt x="2056218" y="11367"/>
-                  <a:pt x="2193364" y="13433"/>
-                  <a:pt x="2435962" y="0"/>
-                </a:cubicBezTo>
-                <a:cubicBezTo>
-                  <a:pt x="2678560" y="-13433"/>
-                  <a:pt x="3010901" y="-42367"/>
-                  <a:pt x="3291840" y="0"/>
-                </a:cubicBezTo>
-                <a:cubicBezTo>
-                  <a:pt x="3291758" y="4406"/>
-                  <a:pt x="3291751" y="9982"/>
-                  <a:pt x="3291840" y="18288"/>
-                </a:cubicBezTo>
-                <a:cubicBezTo>
-                  <a:pt x="3108993" y="14228"/>
-                  <a:pt x="2952658" y="46900"/>
-                  <a:pt x="2666390" y="18288"/>
-                </a:cubicBezTo>
-                <a:cubicBezTo>
-                  <a:pt x="2380122" y="-10324"/>
-                  <a:pt x="2263855" y="41055"/>
-                  <a:pt x="2040941" y="18288"/>
-                </a:cubicBezTo>
-                <a:cubicBezTo>
-                  <a:pt x="1818027" y="-4479"/>
-                  <a:pt x="1675097" y="6509"/>
-                  <a:pt x="1415491" y="18288"/>
-                </a:cubicBezTo>
-                <a:cubicBezTo>
-                  <a:pt x="1155885" y="30068"/>
-                  <a:pt x="852976" y="36210"/>
-                  <a:pt x="691286" y="18288"/>
-                </a:cubicBezTo>
-                <a:cubicBezTo>
-                  <a:pt x="529596" y="366"/>
-                  <a:pt x="187183" y="13912"/>
+                  <a:pt x="169947" y="-5008"/>
+                  <a:pt x="340602" y="-17518"/>
+                  <a:pt x="594360" y="0"/>
+                </a:cubicBezTo>
+                <a:cubicBezTo>
+                  <a:pt x="848118" y="17518"/>
+                  <a:pt x="997921" y="8866"/>
+                  <a:pt x="1224382" y="0"/>
+                </a:cubicBezTo>
+                <a:cubicBezTo>
+                  <a:pt x="1450843" y="-8866"/>
+                  <a:pt x="1572343" y="8392"/>
+                  <a:pt x="1783080" y="0"/>
+                </a:cubicBezTo>
+                <a:cubicBezTo>
+                  <a:pt x="1993817" y="-8392"/>
+                  <a:pt x="2266728" y="2126"/>
+                  <a:pt x="2448763" y="0"/>
+                </a:cubicBezTo>
+                <a:cubicBezTo>
+                  <a:pt x="2630798" y="-2126"/>
+                  <a:pt x="2815508" y="-13843"/>
+                  <a:pt x="3043123" y="0"/>
+                </a:cubicBezTo>
+                <a:cubicBezTo>
+                  <a:pt x="3270738" y="13843"/>
+                  <a:pt x="3420568" y="2184"/>
+                  <a:pt x="3566160" y="0"/>
+                </a:cubicBezTo>
+                <a:cubicBezTo>
+                  <a:pt x="3566487" y="8595"/>
+                  <a:pt x="3566088" y="13110"/>
+                  <a:pt x="3566160" y="18288"/>
+                </a:cubicBezTo>
+                <a:cubicBezTo>
+                  <a:pt x="3421748" y="9323"/>
+                  <a:pt x="3176383" y="-3939"/>
+                  <a:pt x="2971800" y="18288"/>
+                </a:cubicBezTo>
+                <a:cubicBezTo>
+                  <a:pt x="2767217" y="40515"/>
+                  <a:pt x="2590769" y="4336"/>
+                  <a:pt x="2306117" y="18288"/>
+                </a:cubicBezTo>
+                <a:cubicBezTo>
+                  <a:pt x="2021465" y="32240"/>
+                  <a:pt x="1860727" y="-9280"/>
+                  <a:pt x="1676095" y="18288"/>
+                </a:cubicBezTo>
+                <a:cubicBezTo>
+                  <a:pt x="1491463" y="45856"/>
+                  <a:pt x="1329173" y="5765"/>
+                  <a:pt x="1153058" y="18288"/>
+                </a:cubicBezTo>
+                <a:cubicBezTo>
+                  <a:pt x="976943" y="30811"/>
+                  <a:pt x="895178" y="4751"/>
+                  <a:pt x="665683" y="18288"/>
+                </a:cubicBezTo>
+                <a:cubicBezTo>
+                  <a:pt x="436189" y="31825"/>
+                  <a:pt x="302924" y="2002"/>
                   <a:pt x="0" y="18288"/>
                 </a:cubicBezTo>
                 <a:cubicBezTo>
-                  <a:pt x="189" y="14288"/>
-                  <a:pt x="-703" y="3747"/>
+                  <a:pt x="822" y="10564"/>
+                  <a:pt x="-23" y="4571"/>
                   <a:pt x="0" y="0"/>
                 </a:cubicBezTo>
                 <a:close/>
@@ -16444,7 +11314,7 @@
             <a:round/>
             <a:extLst>
               <a:ext uri="{C807C97D-BFC1-408E-A445-0C87EB9F89A2}">
-                <ask:lineSketchStyleProps xmlns:ask="http://schemas.microsoft.com/office/drawing/2018/sketchyshapes" sd="2863741219">
+                <ask:lineSketchStyleProps xmlns:ask="http://schemas.microsoft.com/office/drawing/2018/sketchyshapes" sd="2448976505">
                   <a:prstGeom prst="rect">
                     <a:avLst/>
                   </a:prstGeom>
@@ -16483,10 +11353,40 @@
       </p:sp>
       <p:pic>
         <p:nvPicPr>
-          <p:cNvPr id="14" name="Picture 13" descr="A diagram of a computer&#10;&#10;Description automatically generated">
+          <p:cNvPr id="7" name="Content Placeholder 6" descr="A screenshot of a medical finder&#10;&#10;Description automatically generated">
             <a:extLst>
               <a:ext uri="{FF2B5EF4-FFF2-40B4-BE49-F238E27FC236}">
-                <a16:creationId xmlns:a16="http://schemas.microsoft.com/office/drawing/2014/main" id="{B9A2BB9A-1FC6-06FE-156C-7D78BD6E141D}"/>
+                <a16:creationId xmlns:a16="http://schemas.microsoft.com/office/drawing/2014/main" id="{E9696875-EB48-60D3-3124-B224994AB858}"/>
+              </a:ext>
+            </a:extLst>
+          </p:cNvPr>
+          <p:cNvPicPr>
+            <a:picLocks noChangeAspect="1"/>
+          </p:cNvPicPr>
+          <p:nvPr/>
+        </p:nvPicPr>
+        <p:blipFill>
+          <a:blip r:embed="rId2"/>
+          <a:stretch>
+            <a:fillRect/>
+          </a:stretch>
+        </p:blipFill>
+        <p:spPr>
+          <a:xfrm>
+            <a:off x="4635575" y="231198"/>
+            <a:ext cx="3099816" cy="3187471"/>
+          </a:xfrm>
+          <a:prstGeom prst="rect">
+            <a:avLst/>
+          </a:prstGeom>
+        </p:spPr>
+      </p:pic>
+      <p:pic>
+        <p:nvPicPr>
+          <p:cNvPr id="14" name="Picture 13" descr="A screenshot of a computer&#10;&#10;Description automatically generated">
+            <a:extLst>
+              <a:ext uri="{FF2B5EF4-FFF2-40B4-BE49-F238E27FC236}">
+                <a16:creationId xmlns:a16="http://schemas.microsoft.com/office/drawing/2014/main" id="{67A6F2AB-FE94-11BF-8AEA-86A7FE103563}"/>
               </a:ext>
             </a:extLst>
           </p:cNvPr>
@@ -16503,8 +11403,8 @@
         </p:blipFill>
         <p:spPr>
           <a:xfrm>
-            <a:off x="137375" y="2068168"/>
-            <a:ext cx="5429504" cy="4547208"/>
+            <a:off x="8247888" y="468496"/>
+            <a:ext cx="3785616" cy="2034767"/>
           </a:xfrm>
           <a:prstGeom prst="rect">
             <a:avLst/>
@@ -16513,10 +11413,10 @@
       </p:pic>
       <p:pic>
         <p:nvPicPr>
-          <p:cNvPr id="12" name="Picture 11" descr="A diagram of a software&#10;&#10;Description automatically generated">
+          <p:cNvPr id="12" name="Picture 11" descr="A screenshot of a medical search&#10;&#10;Description automatically generated">
             <a:extLst>
               <a:ext uri="{FF2B5EF4-FFF2-40B4-BE49-F238E27FC236}">
-                <a16:creationId xmlns:a16="http://schemas.microsoft.com/office/drawing/2014/main" id="{ECA817F6-1AA1-B53B-A3EB-CEED4A392774}"/>
+                <a16:creationId xmlns:a16="http://schemas.microsoft.com/office/drawing/2014/main" id="{A88B5E25-DE40-1FF2-06F0-88856DC47999}"/>
               </a:ext>
             </a:extLst>
           </p:cNvPr>
@@ -16533,8 +11433,38 @@
         </p:blipFill>
         <p:spPr>
           <a:xfrm>
-            <a:off x="5782614" y="2068168"/>
-            <a:ext cx="6272011" cy="4547208"/>
+            <a:off x="5370488" y="3795522"/>
+            <a:ext cx="2344087" cy="2398044"/>
+          </a:xfrm>
+          <a:prstGeom prst="rect">
+            <a:avLst/>
+          </a:prstGeom>
+        </p:spPr>
+      </p:pic>
+      <p:pic>
+        <p:nvPicPr>
+          <p:cNvPr id="10" name="Picture 9" descr="A map of a city&#10;&#10;Description automatically generated">
+            <a:extLst>
+              <a:ext uri="{FF2B5EF4-FFF2-40B4-BE49-F238E27FC236}">
+                <a16:creationId xmlns:a16="http://schemas.microsoft.com/office/drawing/2014/main" id="{813E4A9C-8786-0E94-3417-E7DF8FAC8F3E}"/>
+              </a:ext>
+            </a:extLst>
+          </p:cNvPr>
+          <p:cNvPicPr>
+            <a:picLocks noChangeAspect="1"/>
+          </p:cNvPicPr>
+          <p:nvPr/>
+        </p:nvPicPr>
+        <p:blipFill>
+          <a:blip r:embed="rId5"/>
+          <a:stretch>
+            <a:fillRect/>
+          </a:stretch>
+        </p:blipFill>
+        <p:spPr>
+          <a:xfrm>
+            <a:off x="8570066" y="2971759"/>
+            <a:ext cx="3141260" cy="3221807"/>
           </a:xfrm>
           <a:prstGeom prst="rect">
             <a:avLst/>
@@ -16543,53 +11473,118 @@
       </p:pic>
       <p:sp>
         <p:nvSpPr>
-          <p:cNvPr id="6" name="AutoShape 4">
+          <p:cNvPr id="17" name="Title 1">
             <a:extLst>
               <a:ext uri="{FF2B5EF4-FFF2-40B4-BE49-F238E27FC236}">
-                <a16:creationId xmlns:a16="http://schemas.microsoft.com/office/drawing/2014/main" id="{2D27B565-9ABD-A63F-3998-86988E84B192}"/>
+                <a16:creationId xmlns:a16="http://schemas.microsoft.com/office/drawing/2014/main" id="{01EFECAA-F6C8-5FC9-18E1-14B1B0451B98}"/>
               </a:ext>
             </a:extLst>
           </p:cNvPr>
-          <p:cNvSpPr>
-            <a:spLocks noChangeAspect="1" noChangeArrowheads="1"/>
+          <p:cNvSpPr txBox="1">
+            <a:spLocks/>
           </p:cNvSpPr>
           <p:nvPr/>
         </p:nvSpPr>
-        <p:spPr bwMode="auto">
+        <p:spPr>
           <a:xfrm>
-            <a:off x="5943600" y="3276600"/>
-            <a:ext cx="304800" cy="304800"/>
+            <a:off x="619638" y="3187512"/>
+            <a:ext cx="3895359" cy="1846615"/>
           </a:xfrm>
           <a:prstGeom prst="rect">
             <a:avLst/>
           </a:prstGeom>
-          <a:noFill/>
-          <a:extLst>
-            <a:ext uri="{909E8E84-426E-40DD-AFC4-6F175D3DCCD1}">
-              <a14:hiddenFill xmlns:a14="http://schemas.microsoft.com/office/drawing/2010/main">
-                <a:solidFill>
-                  <a:srgbClr val="FFFFFF"/>
-                </a:solidFill>
-              </a14:hiddenFill>
-            </a:ext>
-          </a:extLst>
         </p:spPr>
         <p:txBody>
-          <a:bodyPr vert="horz" wrap="square" lIns="91440" tIns="45720" rIns="91440" bIns="45720" numCol="1" anchor="t" anchorCtr="0" compatLnSpc="1">
-            <a:prstTxWarp prst="textNoShape">
-              <a:avLst/>
-            </a:prstTxWarp>
+          <a:bodyPr vert="horz" lIns="91440" tIns="45720" rIns="91440" bIns="45720" rtlCol="0" anchor="b">
+            <a:normAutofit/>
           </a:bodyPr>
-          <a:lstStyle/>
-          <a:p>
-            <a:endParaRPr lang="en-US"/>
+          <a:lstStyle>
+            <a:lvl1pPr algn="l" defTabSz="914400" rtl="0" eaLnBrk="1" latinLnBrk="0" hangingPunct="1">
+              <a:lnSpc>
+                <a:spcPct val="90000"/>
+              </a:lnSpc>
+              <a:spcBef>
+                <a:spcPct val="0"/>
+              </a:spcBef>
+              <a:buNone/>
+              <a:defRPr sz="3200" kern="1200">
+                <a:solidFill>
+                  <a:schemeClr val="tx1"/>
+                </a:solidFill>
+                <a:latin typeface="+mj-lt"/>
+                <a:ea typeface="+mj-ea"/>
+                <a:cs typeface="+mj-cs"/>
+              </a:defRPr>
+            </a:lvl1pPr>
+          </a:lstStyle>
+          <a:p>
+            <a:endParaRPr lang="en-US" sz="3000" dirty="0"/>
+          </a:p>
+        </p:txBody>
+      </p:sp>
+      <p:sp>
+        <p:nvSpPr>
+          <p:cNvPr id="19" name="Title 1">
+            <a:extLst>
+              <a:ext uri="{FF2B5EF4-FFF2-40B4-BE49-F238E27FC236}">
+                <a16:creationId xmlns:a16="http://schemas.microsoft.com/office/drawing/2014/main" id="{3F6287A4-058A-8345-FF1E-0E53D6D3D44A}"/>
+              </a:ext>
+            </a:extLst>
+          </p:cNvPr>
+          <p:cNvSpPr txBox="1">
+            <a:spLocks/>
+          </p:cNvSpPr>
+          <p:nvPr/>
+        </p:nvSpPr>
+        <p:spPr>
+          <a:xfrm>
+            <a:off x="630917" y="3147929"/>
+            <a:ext cx="3895359" cy="1846615"/>
+          </a:xfrm>
+          <a:prstGeom prst="rect">
+            <a:avLst/>
+          </a:prstGeom>
+        </p:spPr>
+        <p:txBody>
+          <a:bodyPr vert="horz" lIns="91440" tIns="45720" rIns="91440" bIns="45720" rtlCol="0" anchor="b">
+            <a:normAutofit/>
+          </a:bodyPr>
+          <a:lstStyle>
+            <a:lvl1pPr algn="l" defTabSz="914400" rtl="0" eaLnBrk="1" latinLnBrk="0" hangingPunct="1">
+              <a:lnSpc>
+                <a:spcPct val="90000"/>
+              </a:lnSpc>
+              <a:spcBef>
+                <a:spcPct val="0"/>
+              </a:spcBef>
+              <a:buNone/>
+              <a:defRPr sz="3200" kern="1200">
+                <a:solidFill>
+                  <a:schemeClr val="tx1"/>
+                </a:solidFill>
+                <a:latin typeface="+mj-lt"/>
+                <a:ea typeface="+mj-ea"/>
+                <a:cs typeface="+mj-cs"/>
+              </a:defRPr>
+            </a:lvl1pPr>
+          </a:lstStyle>
+          <a:p>
+            <a:r>
+              <a:rPr lang="en-US" sz="2000" dirty="0"/>
+              <a:t>https://emergency-facility-finder-</a:t>
+            </a:r>
+            <a:r>
+              <a:rPr lang="en-US" sz="2000" dirty="0" err="1"/>
+              <a:t>ui.onrender.com</a:t>
+            </a:r>
+            <a:endParaRPr lang="en-US" sz="2000" dirty="0"/>
           </a:p>
         </p:txBody>
       </p:sp>
     </p:spTree>
     <p:extLst>
       <p:ext uri="{BB962C8B-B14F-4D97-AF65-F5344CB8AC3E}">
-        <p14:creationId xmlns:p14="http://schemas.microsoft.com/office/powerpoint/2010/main" val="2254943194"/>
+        <p14:creationId xmlns:p14="http://schemas.microsoft.com/office/powerpoint/2010/main" val="2664168184"/>
       </p:ext>
     </p:extLst>
   </p:cSld>
@@ -16626,10 +11621,10 @@
       </p:grpSpPr>
       <p:sp useBgFill="1">
         <p:nvSpPr>
-          <p:cNvPr id="36" name="Rectangle 35">
+          <p:cNvPr id="10" name="Rectangle 9">
             <a:extLst>
               <a:ext uri="{FF2B5EF4-FFF2-40B4-BE49-F238E27FC236}">
-                <a16:creationId xmlns:a16="http://schemas.microsoft.com/office/drawing/2014/main" id="{665DBBEF-238B-476B-96AB-8AAC3224ECEA}"/>
+                <a16:creationId xmlns:a16="http://schemas.microsoft.com/office/drawing/2014/main" id="{2B97F24A-32CE-4C1C-A50D-3016B394DCFB}"/>
               </a:ext>
               <a:ext uri="{C183D7F6-B498-43B3-948B-1728B52AA6E4}">
                 <adec:decorative xmlns:adec="http://schemas.microsoft.com/office/drawing/2017/decorative" val="1"/>
@@ -16689,7 +11684,7 @@
           <p:cNvPr id="2" name="Title 1">
             <a:extLst>
               <a:ext uri="{FF2B5EF4-FFF2-40B4-BE49-F238E27FC236}">
-                <a16:creationId xmlns:a16="http://schemas.microsoft.com/office/drawing/2014/main" id="{5F2E5B02-607B-ED5D-265A-02155116578B}"/>
+                <a16:creationId xmlns:a16="http://schemas.microsoft.com/office/drawing/2014/main" id="{F5515DF3-7141-D465-B6A2-A70F48A65E7A}"/>
               </a:ext>
             </a:extLst>
           </p:cNvPr>
@@ -16702,8 +11697,8 @@
         </p:nvSpPr>
         <p:spPr>
           <a:xfrm>
-            <a:off x="638882" y="639193"/>
-            <a:ext cx="3571810" cy="3573516"/>
+            <a:off x="630936" y="639520"/>
+            <a:ext cx="3429000" cy="1719072"/>
           </a:xfrm>
         </p:spPr>
         <p:txBody>
@@ -16713,7 +11708,7 @@
           <a:lstStyle/>
           <a:p>
             <a:r>
-              <a:rPr lang="en-US" sz="4600" kern="1200" dirty="0">
+              <a:rPr lang="en-US" sz="4200" kern="1200">
                 <a:solidFill>
                   <a:schemeClr val="tx1"/>
                 </a:solidFill>
@@ -16721,17 +11716,17 @@
                 <a:ea typeface="+mj-ea"/>
                 <a:cs typeface="+mj-cs"/>
               </a:rPr>
-              <a:t>System Development - Data Model</a:t>
+              <a:t>System Testing &amp; Evaluation</a:t>
             </a:r>
           </a:p>
         </p:txBody>
       </p:sp>
       <p:sp>
         <p:nvSpPr>
-          <p:cNvPr id="35" name="sketch line">
+          <p:cNvPr id="12" name="sketch line">
             <a:extLst>
               <a:ext uri="{FF2B5EF4-FFF2-40B4-BE49-F238E27FC236}">
-                <a16:creationId xmlns:a16="http://schemas.microsoft.com/office/drawing/2014/main" id="{3FCFB1DE-0B7E-48CC-BA90-B2AB0889F9D6}"/>
+                <a16:creationId xmlns:a16="http://schemas.microsoft.com/office/drawing/2014/main" id="{CD8B4F24-440B-49E9-B85D-733523DC064B}"/>
               </a:ext>
               <a:ext uri="{C183D7F6-B498-43B3-948B-1728B52AA6E4}">
                 <adec:decorative xmlns:adec="http://schemas.microsoft.com/office/drawing/2017/decorative" val="1"/>
@@ -16751,7 +11746,7 @@
         </p:nvSpPr>
         <p:spPr>
           <a:xfrm>
-            <a:off x="643278" y="4409267"/>
+            <a:off x="643278" y="2573756"/>
             <a:ext cx="3255095" cy="18288"/>
           </a:xfrm>
           <a:custGeom>
@@ -16999,19 +11994,88 @@
           </a:p>
         </p:txBody>
       </p:sp>
+      <p:sp>
+        <p:nvSpPr>
+          <p:cNvPr id="4" name="Text Placeholder 3">
+            <a:extLst>
+              <a:ext uri="{FF2B5EF4-FFF2-40B4-BE49-F238E27FC236}">
+                <a16:creationId xmlns:a16="http://schemas.microsoft.com/office/drawing/2014/main" id="{E6C175ED-0349-D0AC-A4F6-1ECAEA9CA88D}"/>
+              </a:ext>
+            </a:extLst>
+          </p:cNvPr>
+          <p:cNvSpPr>
+            <a:spLocks noGrp="1"/>
+          </p:cNvSpPr>
+          <p:nvPr>
+            <p:ph type="body" sz="half" idx="2"/>
+          </p:nvPr>
+        </p:nvSpPr>
+        <p:spPr>
+          <a:xfrm>
+            <a:off x="630936" y="2807208"/>
+            <a:ext cx="3429000" cy="3410712"/>
+          </a:xfrm>
+        </p:spPr>
+        <p:txBody>
+          <a:bodyPr vert="horz" lIns="91440" tIns="45720" rIns="91440" bIns="45720" rtlCol="0" anchor="t">
+            <a:normAutofit/>
+          </a:bodyPr>
+          <a:lstStyle/>
+          <a:p>
+            <a:r>
+              <a:rPr lang="en-US" sz="2200" b="1" dirty="0"/>
+              <a:t>Backend Testing:</a:t>
+            </a:r>
+            <a:r>
+              <a:rPr lang="en-US" sz="2200" dirty="0"/>
+              <a:t> </a:t>
+            </a:r>
+            <a:r>
+              <a:rPr lang="en-US" sz="2200" dirty="0" err="1"/>
+              <a:t>RSpec</a:t>
+            </a:r>
+            <a:r>
+              <a:rPr lang="en-US" sz="2200" dirty="0"/>
+              <a:t>, 82.35% coverage </a:t>
+            </a:r>
+            <a:br>
+              <a:rPr lang="en-US" sz="2200" dirty="0"/>
+            </a:br>
+            <a:br>
+              <a:rPr lang="en-US" sz="2200" dirty="0"/>
+            </a:br>
+            <a:r>
+              <a:rPr lang="en-US" sz="2200" b="1" dirty="0"/>
+              <a:t>User Feedback (Informal):</a:t>
+            </a:r>
+            <a:r>
+              <a:rPr lang="en-US" sz="2200" dirty="0"/>
+              <a:t> Positive reception, intuitive. Rehab anecdote.</a:t>
+            </a:r>
+          </a:p>
+          <a:p>
+            <a:r>
+              <a:rPr lang="en-US" sz="2200" b="1" dirty="0"/>
+              <a:t>Proposed Formal Usability Testing</a:t>
+            </a:r>
+          </a:p>
+        </p:txBody>
+      </p:sp>
       <p:pic>
         <p:nvPicPr>
-          <p:cNvPr id="6" name="Content Placeholder 5" descr="A screenshot of a computer&#10;&#10;Description automatically generated">
+          <p:cNvPr id="5" name="Content Placeholder 4">
             <a:extLst>
               <a:ext uri="{FF2B5EF4-FFF2-40B4-BE49-F238E27FC236}">
-                <a16:creationId xmlns:a16="http://schemas.microsoft.com/office/drawing/2014/main" id="{3B66C09A-4BD2-F3EF-1DED-A3377D082B33}"/>
+                <a16:creationId xmlns:a16="http://schemas.microsoft.com/office/drawing/2014/main" id="{B8E4E544-C856-253E-5770-645A3F04AC95}"/>
               </a:ext>
             </a:extLst>
           </p:cNvPr>
           <p:cNvPicPr>
-            <a:picLocks noChangeAspect="1"/>
+            <a:picLocks noGrp="1" noChangeAspect="1"/>
           </p:cNvPicPr>
-          <p:nvPr/>
+          <p:nvPr>
+            <p:ph idx="1"/>
+          </p:nvPr>
         </p:nvPicPr>
         <p:blipFill>
           <a:blip r:embed="rId3"/>
@@ -17021,8 +12085,8 @@
         </p:blipFill>
         <p:spPr>
           <a:xfrm>
-            <a:off x="4654296" y="736858"/>
-            <a:ext cx="7214616" cy="5356851"/>
+            <a:off x="4654296" y="1375143"/>
+            <a:ext cx="6903720" cy="4107713"/>
           </a:xfrm>
           <a:prstGeom prst="rect">
             <a:avLst/>
@@ -17032,7 +12096,7 @@
     </p:spTree>
     <p:extLst>
       <p:ext uri="{BB962C8B-B14F-4D97-AF65-F5344CB8AC3E}">
-        <p14:creationId xmlns:p14="http://schemas.microsoft.com/office/powerpoint/2010/main" val="4163475466"/>
+        <p14:creationId xmlns:p14="http://schemas.microsoft.com/office/powerpoint/2010/main" val="1572593086"/>
       </p:ext>
     </p:extLst>
   </p:cSld>
